--- a/slides/A02-ativos-ameacas-e-vulnerabilidades/fonte/A02-ativos-ameacas-e-vulnerabilidades.pptx
+++ b/slides/A02-ativos-ameacas-e-vulnerabilidades/fonte/A02-ativos-ameacas-e-vulnerabilidades.pptx
@@ -510,7 +510,7 @@
           <a:p>
             <a:r>
               <a:rPr lang="en-US" dirty="0"/>
-              <a:t>Mostre a resposta por 30 segundos. Colete observações sem aceitar ainda as palavras vulnerabilidade ou ataque como fatos.</a:t>
+              <a:t>Retome a disciplina de evidência da A01. Mostre a resposta por 30 segundos e não aceite vulnerabilidade ou ataque como fatos antes de discutir ativo e consequência.</a:t>
             </a:r>
             <a:endParaRPr lang="en-US" dirty="0"/>
           </a:p>
@@ -1656,7 +1656,7 @@
         </p:nvSpPr>
         <p:spPr>
           <a:xfrm>
-            <a:off x="731520" y="1325880"/>
+            <a:off x="731520" y="1188720"/>
             <a:ext cx="6492240" cy="1417320"/>
           </a:xfrm>
           <a:prstGeom prst="rect">
@@ -1706,8 +1706,8 @@
         </p:nvSpPr>
         <p:spPr>
           <a:xfrm>
-            <a:off x="749808" y="3063240"/>
-            <a:ext cx="6675120" cy="1005840"/>
+            <a:off x="749808" y="2816352"/>
+            <a:ext cx="6720840" cy="1371600"/>
           </a:xfrm>
           <a:prstGeom prst="rect">
             <a:avLst/>
@@ -1725,20 +1725,56 @@
               <a:buNone/>
             </a:pPr>
             <a:r>
-              <a:rPr lang="en-US" sz="2100" dirty="0">
+              <a:rPr lang="en-US" sz="1850" dirty="0">
                 <a:solidFill>
                   <a:srgbClr val="E6EEF5"/>
                 </a:solidFill>
               </a:rPr>
-              <a:t>O servidor entregou um arquivo interno. Qual ativo, fraqueza e consequência justificam agir primeiro?</a:t>
-            </a:r>
-            <a:endParaRPr lang="en-US" sz="2100" dirty="0"/>
-          </a:p>
-        </p:txBody>
-      </p:sp>
-      <p:sp>
-        <p:nvSpPr>
-          <p:cNvPr id="6" name="Shape 4"/>
+              <a:t>Na A01, aprendemos a não confundir correlação com causa. Agora o servidor entrega um arquivo interno: precisamos ligar a evidência ao ativo, à fraqueza e à consequência antes de priorizar a resposta.</a:t>
+            </a:r>
+            <a:endParaRPr lang="en-US" sz="1850" dirty="0"/>
+          </a:p>
+        </p:txBody>
+      </p:sp>
+      <p:sp>
+        <p:nvSpPr>
+          <p:cNvPr id="6" name="Text 4"/>
+          <p:cNvSpPr/>
+          <p:nvPr/>
+        </p:nvSpPr>
+        <p:spPr>
+          <a:xfrm>
+            <a:off x="749808" y="4434840"/>
+            <a:ext cx="6629400" cy="457200"/>
+          </a:xfrm>
+          <a:prstGeom prst="rect">
+            <a:avLst/>
+          </a:prstGeom>
+          <a:noFill/>
+          <a:ln/>
+        </p:spPr>
+        <p:txBody>
+          <a:bodyPr wrap="square" lIns="0" tIns="0" rIns="0" bIns="0" rtlCol="0" anchor="ctr"/>
+          <a:lstStyle/>
+          <a:p>
+            <a:pPr indent="0" marL="0">
+              <a:buNone/>
+            </a:pPr>
+            <a:r>
+              <a:rPr lang="en-US" sz="1700" b="1" dirty="0">
+                <a:solidFill>
+                  <a:srgbClr val="7DE0D8"/>
+                </a:solidFill>
+              </a:rPr>
+              <a:t>O código 200 prova entrega; ainda não explica alcance, intenção ou impacto.</a:t>
+            </a:r>
+            <a:endParaRPr lang="en-US" sz="1700" dirty="0"/>
+          </a:p>
+        </p:txBody>
+      </p:sp>
+      <p:sp>
+        <p:nvSpPr>
+          <p:cNvPr id="7" name="Shape 5"/>
           <p:cNvSpPr/>
           <p:nvPr/>
         </p:nvSpPr>
@@ -1763,7 +1799,7 @@
       </p:sp>
       <p:sp>
         <p:nvSpPr>
-          <p:cNvPr id="7" name="Text 5"/>
+          <p:cNvPr id="8" name="Text 6"/>
           <p:cNvSpPr/>
           <p:nvPr/>
         </p:nvSpPr>
@@ -1819,7 +1855,7 @@
       </p:sp>
       <p:sp>
         <p:nvSpPr>
-          <p:cNvPr id="8" name="Text 6"/>
+          <p:cNvPr id="9" name="Text 7"/>
           <p:cNvSpPr/>
           <p:nvPr/>
         </p:nvSpPr>

--- a/slides/A02-ativos-ameacas-e-vulnerabilidades/fonte/A02-ativos-ameacas-e-vulnerabilidades.pptx
+++ b/slides/A02-ativos-ameacas-e-vulnerabilidades/fonte/A02-ativos-ameacas-e-vulnerabilidades.pptx
@@ -1126,7 +1126,7 @@
           <a:p>
             <a:r>
               <a:rPr lang="en-US" dirty="0"/>
-              <a:t>Distribua o PDF e troque os papéis após a evidência inicial.</a:t>
+              <a:t>Confirme Docker ativo e URL 127.0.0.1. O PDF contém Windows/Linux, diagnóstico de porta, logs e limpeza.</a:t>
             </a:r>
             <a:endParaRPr lang="en-US" dirty="0"/>
           </a:p>
@@ -6391,7 +6391,7 @@
                   <a:srgbClr val="12304A"/>
                 </a:solidFill>
               </a:rPr>
-              <a:t>Produza um ticket que outra equipe possa retestar</a:t>
+              <a:t>Suba localmente, investigue e encerre com segurança</a:t>
             </a:r>
             <a:endParaRPr lang="en-US" sz="3000" dirty="0"/>
           </a:p>
@@ -6429,7 +6429,7 @@
                   <a:srgbClr val="4B5E71"/>
                 </a:solidFill>
               </a:rPr>
-              <a:t>A flag não é o produto da atividade.</a:t>
+              <a:t>Cada estudante acessa seu próprio container em http://127.0.0.1:3000.</a:t>
             </a:r>
             <a:endParaRPr lang="en-US" sz="1700" dirty="0"/>
           </a:p>
@@ -6443,8 +6443,8 @@
         </p:nvSpPr>
         <p:spPr>
           <a:xfrm>
-            <a:off x="731520" y="2011680"/>
-            <a:ext cx="6903720" cy="3337560"/>
+            <a:off x="594360" y="1965960"/>
+            <a:ext cx="7178040" cy="3520440"/>
           </a:xfrm>
           <a:prstGeom prst="roundRect">
             <a:avLst/>
@@ -6468,8 +6468,8 @@
         </p:nvSpPr>
         <p:spPr>
           <a:xfrm>
-            <a:off x="1097280" y="2423160"/>
-            <a:ext cx="1828800" cy="274320"/>
+            <a:off x="932688" y="2286000"/>
+            <a:ext cx="6217920" cy="274320"/>
           </a:xfrm>
           <a:prstGeom prst="rect">
             <a:avLst/>
@@ -6485,14 +6485,14 @@
               <a:buNone/>
             </a:pPr>
             <a:r>
-              <a:rPr lang="en-US" sz="1500" b="1" dirty="0">
+              <a:rPr lang="en-US" sz="1300" b="1" dirty="0">
                 <a:solidFill>
                   <a:srgbClr val="087F7A"/>
                 </a:solidFill>
               </a:rPr>
-              <a:t>MISSÃO</a:t>
-            </a:r>
-            <a:endParaRPr lang="en-US" sz="1500" dirty="0"/>
+              <a:t>PREPARAÇÃO — POWERSHELL OU TERMINAL LINUX</a:t>
+            </a:r>
+            <a:endParaRPr lang="en-US" sz="1300" dirty="0"/>
           </a:p>
         </p:txBody>
       </p:sp>
@@ -6504,8 +6504,8 @@
         </p:nvSpPr>
         <p:spPr>
           <a:xfrm>
-            <a:off x="1097280" y="2971800"/>
-            <a:ext cx="5760720" cy="1371600"/>
+            <a:off x="932688" y="2761488"/>
+            <a:ext cx="6217920" cy="1143000"/>
           </a:xfrm>
           <a:prstGeom prst="rect">
             <a:avLst/>
@@ -6523,14 +6523,34 @@
               <a:buNone/>
             </a:pPr>
             <a:r>
-              <a:rPr lang="en-US" sz="2500" b="1" dirty="0">
+              <a:rPr lang="en-US" sz="1550" dirty="0">
                 <a:solidFill>
                   <a:srgbClr val="12304A"/>
                 </a:solidFill>
-              </a:rPr>
-              <a:t>Relacione ativo, fraqueza, vetor e impacto; escolha um controle e prove como validá-lo.</a:t>
-            </a:r>
-            <a:endParaRPr lang="en-US" sz="2500" dirty="0"/>
+                <a:latin typeface="Courier New" pitchFamily="34" charset="0"/>
+                <a:ea typeface="Courier New" pitchFamily="34" charset="-122"/>
+                <a:cs typeface="Courier New" pitchFamily="34" charset="-120"/>
+              </a:rPr>
+              <a:t>docker pull bkimminich/juice-shop</a:t>
+            </a:r>
+            <a:endParaRPr lang="en-US" sz="1550" dirty="0"/>
+          </a:p>
+          <a:p>
+            <a:pPr indent="0" marL="0">
+              <a:buNone/>
+            </a:pPr>
+            <a:r>
+              <a:rPr lang="en-US" sz="1550" dirty="0">
+                <a:solidFill>
+                  <a:srgbClr val="12304A"/>
+                </a:solidFill>
+                <a:latin typeface="Courier New" pitchFamily="34" charset="0"/>
+                <a:ea typeface="Courier New" pitchFamily="34" charset="-122"/>
+                <a:cs typeface="Courier New" pitchFamily="34" charset="-120"/>
+              </a:rPr>
+              <a:t>docker run --rm -d --name juice-shop-a02 -p 127.0.0.1:3000:3000 bkimminich/juice-shop</a:t>
+            </a:r>
+            <a:endParaRPr lang="en-US" sz="1550" dirty="0"/>
           </a:p>
         </p:txBody>
       </p:sp>
@@ -6542,7 +6562,79 @@
         </p:nvSpPr>
         <p:spPr>
           <a:xfrm>
-            <a:off x="8321040" y="2331720"/>
+            <a:off x="932688" y="4261104"/>
+            <a:ext cx="6035040" cy="384048"/>
+          </a:xfrm>
+          <a:prstGeom prst="rect">
+            <a:avLst/>
+          </a:prstGeom>
+          <a:noFill/>
+          <a:ln/>
+        </p:spPr>
+        <p:txBody>
+          <a:bodyPr wrap="square" lIns="0" tIns="0" rIns="0" bIns="0" rtlCol="0" anchor="ctr"/>
+          <a:lstStyle/>
+          <a:p>
+            <a:pPr indent="0" marL="0">
+              <a:buNone/>
+            </a:pPr>
+            <a:r>
+              <a:rPr lang="en-US" sz="1900" b="1" dirty="0">
+                <a:solidFill>
+                  <a:srgbClr val="0B65C2"/>
+                </a:solidFill>
+              </a:rPr>
+              <a:t>ABRA  http://127.0.0.1:3000</a:t>
+            </a:r>
+            <a:endParaRPr lang="en-US" sz="1900" dirty="0"/>
+          </a:p>
+        </p:txBody>
+      </p:sp>
+      <p:sp>
+        <p:nvSpPr>
+          <p:cNvPr id="9" name="Text 7"/>
+          <p:cNvSpPr/>
+          <p:nvPr/>
+        </p:nvSpPr>
+        <p:spPr>
+          <a:xfrm>
+            <a:off x="932688" y="4846320"/>
+            <a:ext cx="6035040" cy="310896"/>
+          </a:xfrm>
+          <a:prstGeom prst="rect">
+            <a:avLst/>
+          </a:prstGeom>
+          <a:noFill/>
+          <a:ln/>
+        </p:spPr>
+        <p:txBody>
+          <a:bodyPr wrap="square" lIns="0" tIns="0" rIns="0" bIns="0" rtlCol="0" anchor="ctr"/>
+          <a:lstStyle/>
+          <a:p>
+            <a:pPr indent="0" marL="0">
+              <a:buNone/>
+            </a:pPr>
+            <a:r>
+              <a:rPr lang="en-US" sz="1500" b="1" dirty="0">
+                <a:solidFill>
+                  <a:srgbClr val="B42318"/>
+                </a:solidFill>
+              </a:rPr>
+              <a:t>ENCERRE  docker stop juice-shop-a02</a:t>
+            </a:r>
+            <a:endParaRPr lang="en-US" sz="1500" dirty="0"/>
+          </a:p>
+        </p:txBody>
+      </p:sp>
+      <p:sp>
+        <p:nvSpPr>
+          <p:cNvPr id="10" name="Text 8"/>
+          <p:cNvSpPr/>
+          <p:nvPr/>
+        </p:nvSpPr>
+        <p:spPr>
+          <a:xfrm>
+            <a:off x="8275320" y="2240280"/>
             <a:ext cx="2377440" cy="274320"/>
           </a:xfrm>
           <a:prstGeom prst="rect">
@@ -6572,14 +6664,14 @@
       </p:sp>
       <p:sp>
         <p:nvSpPr>
-          <p:cNvPr id="9" name="Text 7"/>
-          <p:cNvSpPr/>
-          <p:nvPr/>
-        </p:nvSpPr>
-        <p:spPr>
-          <a:xfrm>
-            <a:off x="8321040" y="2834640"/>
-            <a:ext cx="2834640" cy="1600200"/>
+          <p:cNvPr id="11" name="Text 9"/>
+          <p:cNvSpPr/>
+          <p:nvPr/>
+        </p:nvSpPr>
+        <p:spPr>
+          <a:xfrm>
+            <a:off x="8275320" y="2761488"/>
+            <a:ext cx="2926080" cy="1600200"/>
           </a:xfrm>
           <a:prstGeom prst="rect">
             <a:avLst/>
@@ -6595,69 +6687,69 @@
               <a:buNone/>
             </a:pPr>
             <a:r>
-              <a:rPr lang="en-US" sz="1900" b="1" dirty="0">
+              <a:rPr lang="en-US" sz="1850" b="1" dirty="0">
                 <a:solidFill>
                   <a:srgbClr val="12304A"/>
                 </a:solidFill>
               </a:rPr>
-              <a:t>Inventário priorizado</a:t>
-            </a:r>
-            <a:endParaRPr lang="en-US" sz="1900" dirty="0"/>
+              <a:t>Inventário do Juice Shop</a:t>
+            </a:r>
+            <a:endParaRPr lang="en-US" sz="1850" dirty="0"/>
           </a:p>
           <a:p>
             <a:pPr indent="0" marL="0">
               <a:buNone/>
             </a:pPr>
             <a:r>
-              <a:rPr lang="en-US" sz="1900" b="1" dirty="0">
+              <a:rPr lang="en-US" sz="1850" b="1" dirty="0">
                 <a:solidFill>
                   <a:srgbClr val="12304A"/>
                 </a:solidFill>
               </a:rPr>
               <a:t>Evidência interpretada</a:t>
             </a:r>
-            <a:endParaRPr lang="en-US" sz="1900" dirty="0"/>
+            <a:endParaRPr lang="en-US" sz="1850" dirty="0"/>
           </a:p>
           <a:p>
             <a:pPr indent="0" marL="0">
               <a:buNone/>
             </a:pPr>
             <a:r>
-              <a:rPr lang="en-US" sz="1900" b="1" dirty="0">
+              <a:rPr lang="en-US" sz="1850" b="1" dirty="0">
                 <a:solidFill>
                   <a:srgbClr val="12304A"/>
                 </a:solidFill>
               </a:rPr>
               <a:t>Controle justificado</a:t>
             </a:r>
-            <a:endParaRPr lang="en-US" sz="1900" dirty="0"/>
+            <a:endParaRPr lang="en-US" sz="1850" dirty="0"/>
           </a:p>
           <a:p>
             <a:pPr indent="0" marL="0">
               <a:buNone/>
             </a:pPr>
             <a:r>
-              <a:rPr lang="en-US" sz="1900" b="1" dirty="0">
+              <a:rPr lang="en-US" sz="1850" b="1" dirty="0">
                 <a:solidFill>
                   <a:srgbClr val="12304A"/>
                 </a:solidFill>
               </a:rPr>
               <a:t>Reteste definido</a:t>
             </a:r>
-            <a:endParaRPr lang="en-US" sz="1900" dirty="0"/>
-          </a:p>
-        </p:txBody>
-      </p:sp>
-      <p:sp>
-        <p:nvSpPr>
-          <p:cNvPr id="10" name="Text 8"/>
-          <p:cNvSpPr/>
-          <p:nvPr/>
-        </p:nvSpPr>
-        <p:spPr>
-          <a:xfrm>
-            <a:off x="8321040" y="4800600"/>
-            <a:ext cx="2834640" cy="457200"/>
+            <a:endParaRPr lang="en-US" sz="1850" dirty="0"/>
+          </a:p>
+        </p:txBody>
+      </p:sp>
+      <p:sp>
+        <p:nvSpPr>
+          <p:cNvPr id="12" name="Text 10"/>
+          <p:cNvSpPr/>
+          <p:nvPr/>
+        </p:nvSpPr>
+        <p:spPr>
+          <a:xfrm>
+            <a:off x="8275320" y="4754880"/>
+            <a:ext cx="2926080" cy="457200"/>
           </a:xfrm>
           <a:prstGeom prst="rect">
             <a:avLst/>
@@ -6686,7 +6778,7 @@
       </p:sp>
       <p:sp>
         <p:nvSpPr>
-          <p:cNvPr id="11" name="Shape 9"/>
+          <p:cNvPr id="13" name="Shape 11"/>
           <p:cNvSpPr/>
           <p:nvPr/>
         </p:nvSpPr>
@@ -6709,7 +6801,7 @@
       </p:sp>
       <p:sp>
         <p:nvSpPr>
-          <p:cNvPr id="12" name="Text 10"/>
+          <p:cNvPr id="14" name="Text 12"/>
           <p:cNvSpPr/>
           <p:nvPr/>
         </p:nvSpPr>
@@ -6745,7 +6837,7 @@
       </p:sp>
       <p:sp>
         <p:nvSpPr>
-          <p:cNvPr id="13" name="Text 11"/>
+          <p:cNvPr id="15" name="Text 13"/>
           <p:cNvSpPr/>
           <p:nvPr/>
         </p:nvSpPr>

--- a/slides/A02-ativos-ameacas-e-vulnerabilidades/fonte/A02-ativos-ameacas-e-vulnerabilidades.pptx
+++ b/slides/A02-ativos-ameacas-e-vulnerabilidades/fonte/A02-ativos-ameacas-e-vulnerabilidades.pptx
@@ -14,9 +14,11 @@
     <p:sldId id="262" r:id="rId8"/>
     <p:sldId id="263" r:id="rId9"/>
     <p:sldId id="264" r:id="rId10"/>
+    <p:sldId id="265" r:id="rId11"/>
+    <p:sldId id="266" r:id="rId12"/>
   </p:sldIdLst>
   <p:notesMasterIdLst>
-    <p:notesMasterId r:id="rId11"/>
+    <p:notesMasterId r:id="rId13"/>
   </p:notesMasterIdLst>
   <p:sldSz cx="12192000" cy="6858000"/>
   <p:notesSz cx="6858000" cy="12192000"/>
@@ -552,6 +554,182 @@
 </p:notes>
 </file>
 
+<file path=ppt/notesSlides/notesSlide10.xml><?xml version="1.0" encoding="utf-8"?>
+<p:notes xmlns:a="http://schemas.openxmlformats.org/drawingml/2006/main" xmlns:r="http://schemas.openxmlformats.org/officeDocument/2006/relationships" xmlns:p="http://schemas.openxmlformats.org/presentationml/2006/main">
+  <p:cSld>
+    <p:spTree>
+      <p:nvGrpSpPr>
+        <p:cNvPr id="1" name=""/>
+        <p:cNvGrpSpPr/>
+        <p:nvPr/>
+      </p:nvGrpSpPr>
+      <p:grpSpPr>
+        <a:xfrm>
+          <a:off x="0" y="0"/>
+          <a:ext cx="0" cy="0"/>
+          <a:chOff x="0" y="0"/>
+          <a:chExt cx="0" cy="0"/>
+        </a:xfrm>
+      </p:grpSpPr>
+      <p:sp>
+        <p:nvSpPr>
+          <p:cNvPr id="2" name="Slide Image Placeholder 1"/>
+          <p:cNvSpPr>
+            <a:spLocks noGrp="1" noRot="1" noChangeAspect="1"/>
+          </p:cNvSpPr>
+          <p:nvPr>
+            <p:ph type="sldImg"/>
+          </p:nvPr>
+        </p:nvSpPr>
+        <p:spPr/>
+      </p:sp>
+      <p:sp>
+        <p:nvSpPr>
+          <p:cNvPr id="3" name="Notes Placeholder 2"/>
+          <p:cNvSpPr>
+            <a:spLocks noGrp="1"/>
+          </p:cNvSpPr>
+          <p:nvPr>
+            <p:ph type="body" idx="1"/>
+          </p:nvPr>
+        </p:nvSpPr>
+        <p:spPr/>
+        <p:txBody>
+          <a:bodyPr/>
+          <a:lstStyle/>
+          <a:p>
+            <a:r>
+              <a:rPr lang="en-US" dirty="0"/>
+              <a:t>Confirme Docker ativo e URL 127.0.0.1. O PDF contém Windows/Linux, diagnóstico de porta, logs e limpeza.</a:t>
+            </a:r>
+            <a:endParaRPr lang="en-US" dirty="0"/>
+          </a:p>
+        </p:txBody>
+      </p:sp>
+      <p:sp>
+        <p:nvSpPr>
+          <p:cNvPr id="4" name="Slide Number Placeholder 3"/>
+          <p:cNvSpPr>
+            <a:spLocks noGrp="1"/>
+          </p:cNvSpPr>
+          <p:nvPr>
+            <p:ph type="sldNum" sz="quarter" idx="10"/>
+          </p:nvPr>
+        </p:nvSpPr>
+        <p:spPr/>
+        <p:txBody>
+          <a:bodyPr/>
+          <a:lstStyle/>
+          <a:p>
+            <a:fld id="{F7021451-1387-4CA6-816F-3879F97B5CBC}" type="slidenum">
+              <a:rPr lang="en-US"/>
+              <a:t>10</a:t>
+            </a:fld>
+            <a:endParaRPr lang="en-US"/>
+          </a:p>
+        </p:txBody>
+      </p:sp>
+    </p:spTree>
+    <p:extLst>
+      <p:ext uri="{BB962C8B-B14F-4D97-AF65-F5344CB8AC3E}">
+        <p14:creationId xmlns:p14="http://schemas.microsoft.com/office/powerpoint/2010/main" val="1024086991"/>
+      </p:ext>
+    </p:extLst>
+  </p:cSld>
+  <p:clrMapOvr>
+    <a:masterClrMapping/>
+  </p:clrMapOvr>
+</p:notes>
+</file>
+
+<file path=ppt/notesSlides/notesSlide11.xml><?xml version="1.0" encoding="utf-8"?>
+<p:notes xmlns:a="http://schemas.openxmlformats.org/drawingml/2006/main" xmlns:r="http://schemas.openxmlformats.org/officeDocument/2006/relationships" xmlns:p="http://schemas.openxmlformats.org/presentationml/2006/main">
+  <p:cSld>
+    <p:spTree>
+      <p:nvGrpSpPr>
+        <p:cNvPr id="1" name=""/>
+        <p:cNvGrpSpPr/>
+        <p:nvPr/>
+      </p:nvGrpSpPr>
+      <p:grpSpPr>
+        <a:xfrm>
+          <a:off x="0" y="0"/>
+          <a:ext cx="0" cy="0"/>
+          <a:chOff x="0" y="0"/>
+          <a:chExt cx="0" cy="0"/>
+        </a:xfrm>
+      </p:grpSpPr>
+      <p:sp>
+        <p:nvSpPr>
+          <p:cNvPr id="2" name="Slide Image Placeholder 1"/>
+          <p:cNvSpPr>
+            <a:spLocks noGrp="1" noRot="1" noChangeAspect="1"/>
+          </p:cNvSpPr>
+          <p:nvPr>
+            <p:ph type="sldImg"/>
+          </p:nvPr>
+        </p:nvSpPr>
+        <p:spPr/>
+      </p:sp>
+      <p:sp>
+        <p:nvSpPr>
+          <p:cNvPr id="3" name="Notes Placeholder 2"/>
+          <p:cNvSpPr>
+            <a:spLocks noGrp="1"/>
+          </p:cNvSpPr>
+          <p:nvPr>
+            <p:ph type="body" idx="1"/>
+          </p:nvPr>
+        </p:nvSpPr>
+        <p:spPr/>
+        <p:txBody>
+          <a:bodyPr/>
+          <a:lstStyle/>
+          <a:p>
+            <a:r>
+              <a:rPr lang="en-US" dirty="0"/>
+              <a:t>Feche com: Priorizamos o ativo..., porque..., e validaremos o controle por...</a:t>
+            </a:r>
+            <a:endParaRPr lang="en-US" dirty="0"/>
+          </a:p>
+        </p:txBody>
+      </p:sp>
+      <p:sp>
+        <p:nvSpPr>
+          <p:cNvPr id="4" name="Slide Number Placeholder 3"/>
+          <p:cNvSpPr>
+            <a:spLocks noGrp="1"/>
+          </p:cNvSpPr>
+          <p:nvPr>
+            <p:ph type="sldNum" sz="quarter" idx="10"/>
+          </p:nvPr>
+        </p:nvSpPr>
+        <p:spPr/>
+        <p:txBody>
+          <a:bodyPr/>
+          <a:lstStyle/>
+          <a:p>
+            <a:fld id="{F7021451-1387-4CA6-816F-3879F97B5CBC}" type="slidenum">
+              <a:rPr lang="en-US"/>
+              <a:t>11</a:t>
+            </a:fld>
+            <a:endParaRPr lang="en-US"/>
+          </a:p>
+        </p:txBody>
+      </p:sp>
+    </p:spTree>
+    <p:extLst>
+      <p:ext uri="{BB962C8B-B14F-4D97-AF65-F5344CB8AC3E}">
+        <p14:creationId xmlns:p14="http://schemas.microsoft.com/office/powerpoint/2010/main" val="1024086991"/>
+      </p:ext>
+    </p:extLst>
+  </p:cSld>
+  <p:clrMapOvr>
+    <a:masterClrMapping/>
+  </p:clrMapOvr>
+</p:notes>
+</file>
+
 <file path=ppt/notesSlides/notesSlide2.xml><?xml version="1.0" encoding="utf-8"?>
 <p:notes xmlns:a="http://schemas.openxmlformats.org/drawingml/2006/main" xmlns:r="http://schemas.openxmlformats.org/officeDocument/2006/relationships" xmlns:p="http://schemas.openxmlformats.org/presentationml/2006/main">
   <p:cSld>
@@ -598,7 +776,7 @@
           <a:p>
             <a:r>
               <a:rPr lang="en-US" dirty="0"/>
-              <a:t>Confirme alvo, dados fictícios e critério de parada. DevTools é suficiente; Burp é opcional.</a:t>
+              <a:t>Faça a ponte direta com o slide 1: temos um 200; a competência é transformar esse fato em uma decisão defensável, sem exigir descoberta autônoma.</a:t>
             </a:r>
             <a:endParaRPr lang="en-US" dirty="0"/>
           </a:p>
@@ -686,7 +864,7 @@
           <a:p>
             <a:r>
               <a:rPr lang="en-US" dirty="0"/>
-              <a:t>Resposta esperada: o recurso foi entregue naquela requisição. Não há prova suficiente de autoria, intenção, alcance ou causa.</a:t>
+              <a:t>Só aqui introduza o escopo. Confirme Docker ativo. Se houver falha, use a evidência impressa; não peça que o estudante procure outro alvo.</a:t>
             </a:r>
             <a:endParaRPr lang="en-US" dirty="0"/>
           </a:p>
@@ -774,7 +952,7 @@
           <a:p>
             <a:r>
               <a:rPr lang="en-US" dirty="0"/>
-              <a:t>Peça um ativo que não seja equipamento. Em OT, acrescente processo físico, qualidade, ambiente e safety.</a:t>
+              <a:t>Execute junto com a turma. Se a versão não responder como esperado, use a captura/evidência do PDF. Não peça enumeração nem descoberta de caminhos.</a:t>
             </a:r>
             <a:endParaRPr lang="en-US" dirty="0"/>
           </a:p>
@@ -862,7 +1040,7 @@
           <a:p>
             <a:r>
               <a:rPr lang="en-US" dirty="0"/>
-              <a:t>CWE é classe de fraqueza; CVE é vulnerabilidade específica publicada. Não atribuir CVE ao desafio sem fonte.</a:t>
+              <a:t>Construa as quatro linhas com a turma. Não introduza OT aqui; deixe a comparação para o fechamento.</a:t>
             </a:r>
             <a:endParaRPr lang="en-US" dirty="0"/>
           </a:p>
@@ -950,7 +1128,7 @@
           <a:p>
             <a:r>
               <a:rPr lang="en-US" dirty="0"/>
-              <a:t>Monitorar não substitui correção. Aceite escolhas condicionadas à função do arquivo e à arquitetura.</a:t>
+              <a:t>Leia de cima para baixo. Pergunte em qual linha começamos a inferir. Depois apague verbalmente uma linha e peça à turma que a reconstrua.</a:t>
             </a:r>
             <a:endParaRPr lang="en-US" dirty="0"/>
           </a:p>
@@ -1038,7 +1216,7 @@
           <a:p>
             <a:r>
               <a:rPr lang="en-US" dirty="0"/>
-              <a:t>Plano alternativo: use a resposta HTTP e os ativos do PDF. Não improvise contra a demonstração pública.</a:t>
+              <a:t>Construa a definição antes das categorias. Pergunte como cada medida altera probabilidade, consequência ou tempo de detecção.</a:t>
             </a:r>
             <a:endParaRPr lang="en-US" dirty="0"/>
           </a:p>
@@ -1126,7 +1304,7 @@
           <a:p>
             <a:r>
               <a:rPr lang="en-US" dirty="0"/>
-              <a:t>Confirme Docker ativo e URL 127.0.0.1. O PDF contém Windows/Linux, diagnóstico de porta, logs e limpeza.</a:t>
+              <a:t>Monitorar não substitui correção. Aceite escolhas condicionadas à função do arquivo e à arquitetura.</a:t>
             </a:r>
             <a:endParaRPr lang="en-US" dirty="0"/>
           </a:p>
@@ -1214,7 +1392,7 @@
           <a:p>
             <a:r>
               <a:rPr lang="en-US" dirty="0"/>
-              <a:t>Feche com: Priorizamos o ativo..., porque..., e validaremos o controle por...</a:t>
+              <a:t>Leia a frase pausadamente e peça que a turma identifique cada trecho. Mostre que a hipótese de fraqueza não deve ser escrita como causa confirmada.</a:t>
             </a:r>
             <a:endParaRPr lang="en-US" dirty="0"/>
           </a:p>
@@ -1897,6 +2075,1166 @@
 </p:sld>
 </file>
 
+<file path=ppt/slides/slide10.xml><?xml version="1.0" encoding="utf-8"?>
+<p:sld xmlns:a="http://schemas.openxmlformats.org/drawingml/2006/main" xmlns:r="http://schemas.openxmlformats.org/officeDocument/2006/relationships" xmlns:p="http://schemas.openxmlformats.org/presentationml/2006/main">
+  <p:cSld name="Slide 10">
+    <p:bg>
+      <p:bgPr>
+        <a:solidFill>
+          <a:srgbClr val="FFFFFF"/>
+        </a:solidFill>
+      </p:bgPr>
+    </p:bg>
+    <p:spTree>
+      <p:nvGrpSpPr>
+        <p:cNvPr id="1" name=""/>
+        <p:cNvGrpSpPr/>
+        <p:nvPr/>
+      </p:nvGrpSpPr>
+      <p:grpSpPr>
+        <a:xfrm>
+          <a:off x="0" y="0"/>
+          <a:ext cx="0" cy="0"/>
+          <a:chOff x="0" y="0"/>
+          <a:chExt cx="0" cy="0"/>
+        </a:xfrm>
+      </p:grpSpPr>
+      <p:sp>
+        <p:nvSpPr>
+          <p:cNvPr id="2" name="Text 0"/>
+          <p:cNvSpPr/>
+          <p:nvPr/>
+        </p:nvSpPr>
+        <p:spPr>
+          <a:xfrm>
+            <a:off x="640080" y="384048"/>
+            <a:ext cx="4389120" cy="256032"/>
+          </a:xfrm>
+          <a:prstGeom prst="rect">
+            <a:avLst/>
+          </a:prstGeom>
+          <a:noFill/>
+          <a:ln/>
+        </p:spPr>
+        <p:txBody>
+          <a:bodyPr wrap="square" lIns="0" tIns="0" rIns="0" bIns="0" rtlCol="0" anchor="ctr"/>
+          <a:lstStyle/>
+          <a:p>
+            <a:pPr indent="0" marL="0">
+              <a:buNone/>
+            </a:pPr>
+            <a:r>
+              <a:rPr lang="en-US" sz="1300" b="1" spc="100" kern="0" dirty="0">
+                <a:solidFill>
+                  <a:srgbClr val="087F7A"/>
+                </a:solidFill>
+              </a:rPr>
+              <a:t>PRÁTICA</a:t>
+            </a:r>
+            <a:endParaRPr lang="en-US" sz="1300" dirty="0"/>
+          </a:p>
+        </p:txBody>
+      </p:sp>
+      <p:sp>
+        <p:nvSpPr>
+          <p:cNvPr id="3" name="Text 1"/>
+          <p:cNvSpPr/>
+          <p:nvPr/>
+        </p:nvSpPr>
+        <p:spPr>
+          <a:xfrm>
+            <a:off x="640080" y="768096"/>
+            <a:ext cx="10881360" cy="658368"/>
+          </a:xfrm>
+          <a:prstGeom prst="rect">
+            <a:avLst/>
+          </a:prstGeom>
+          <a:noFill/>
+          <a:ln/>
+        </p:spPr>
+        <p:txBody>
+          <a:bodyPr wrap="square" lIns="0" tIns="0" rIns="0" bIns="0" rtlCol="0" anchor="ctr">
+            <a:normAutofit/>
+          </a:bodyPr>
+          <a:lstStyle/>
+          <a:p>
+            <a:pPr indent="0" marL="0">
+              <a:buNone/>
+            </a:pPr>
+            <a:r>
+              <a:rPr lang="en-US" sz="3000" b="1" dirty="0">
+                <a:solidFill>
+                  <a:srgbClr val="12304A"/>
+                </a:solidFill>
+              </a:rPr>
+              <a:t>Suba localmente, investigue e encerre com segurança</a:t>
+            </a:r>
+            <a:endParaRPr lang="en-US" sz="3000" dirty="0"/>
+          </a:p>
+        </p:txBody>
+      </p:sp>
+      <p:sp>
+        <p:nvSpPr>
+          <p:cNvPr id="4" name="Text 2"/>
+          <p:cNvSpPr/>
+          <p:nvPr/>
+        </p:nvSpPr>
+        <p:spPr>
+          <a:xfrm>
+            <a:off x="658368" y="1508760"/>
+            <a:ext cx="10424160" cy="402336"/>
+          </a:xfrm>
+          <a:prstGeom prst="rect">
+            <a:avLst/>
+          </a:prstGeom>
+          <a:noFill/>
+          <a:ln/>
+        </p:spPr>
+        <p:txBody>
+          <a:bodyPr wrap="square" lIns="0" tIns="0" rIns="0" bIns="0" rtlCol="0" anchor="ctr">
+            <a:normAutofit/>
+          </a:bodyPr>
+          <a:lstStyle/>
+          <a:p>
+            <a:pPr indent="0" marL="0">
+              <a:buNone/>
+            </a:pPr>
+            <a:r>
+              <a:rPr lang="en-US" sz="1700" dirty="0">
+                <a:solidFill>
+                  <a:srgbClr val="4B5E71"/>
+                </a:solidFill>
+              </a:rPr>
+              <a:t>Cada estudante acessa seu próprio container em http://127.0.0.1:3000.</a:t>
+            </a:r>
+            <a:endParaRPr lang="en-US" sz="1700" dirty="0"/>
+          </a:p>
+        </p:txBody>
+      </p:sp>
+      <p:sp>
+        <p:nvSpPr>
+          <p:cNvPr id="5" name="Shape 3"/>
+          <p:cNvSpPr/>
+          <p:nvPr/>
+        </p:nvSpPr>
+        <p:spPr>
+          <a:xfrm>
+            <a:off x="594360" y="1965960"/>
+            <a:ext cx="7178040" cy="3520440"/>
+          </a:xfrm>
+          <a:prstGeom prst="roundRect">
+            <a:avLst/>
+          </a:prstGeom>
+          <a:solidFill>
+            <a:srgbClr val="E7F5F3"/>
+          </a:solidFill>
+          <a:ln w="25400">
+            <a:solidFill>
+              <a:srgbClr val="087F7A"/>
+            </a:solidFill>
+            <a:prstDash val="solid"/>
+          </a:ln>
+        </p:spPr>
+      </p:sp>
+      <p:sp>
+        <p:nvSpPr>
+          <p:cNvPr id="6" name="Text 4"/>
+          <p:cNvSpPr/>
+          <p:nvPr/>
+        </p:nvSpPr>
+        <p:spPr>
+          <a:xfrm>
+            <a:off x="932688" y="2286000"/>
+            <a:ext cx="6217920" cy="274320"/>
+          </a:xfrm>
+          <a:prstGeom prst="rect">
+            <a:avLst/>
+          </a:prstGeom>
+          <a:noFill/>
+          <a:ln/>
+        </p:spPr>
+        <p:txBody>
+          <a:bodyPr wrap="square" lIns="0" tIns="0" rIns="0" bIns="0" rtlCol="0" anchor="ctr"/>
+          <a:lstStyle/>
+          <a:p>
+            <a:pPr indent="0" marL="0">
+              <a:buNone/>
+            </a:pPr>
+            <a:r>
+              <a:rPr lang="en-US" sz="1300" b="1" dirty="0">
+                <a:solidFill>
+                  <a:srgbClr val="087F7A"/>
+                </a:solidFill>
+              </a:rPr>
+              <a:t>PREPARAÇÃO — POWERSHELL OU TERMINAL LINUX</a:t>
+            </a:r>
+            <a:endParaRPr lang="en-US" sz="1300" dirty="0"/>
+          </a:p>
+        </p:txBody>
+      </p:sp>
+      <p:sp>
+        <p:nvSpPr>
+          <p:cNvPr id="7" name="Text 5"/>
+          <p:cNvSpPr/>
+          <p:nvPr/>
+        </p:nvSpPr>
+        <p:spPr>
+          <a:xfrm>
+            <a:off x="932688" y="2761488"/>
+            <a:ext cx="6217920" cy="1143000"/>
+          </a:xfrm>
+          <a:prstGeom prst="rect">
+            <a:avLst/>
+          </a:prstGeom>
+          <a:noFill/>
+          <a:ln/>
+        </p:spPr>
+        <p:txBody>
+          <a:bodyPr wrap="square" lIns="0" tIns="0" rIns="0" bIns="0" rtlCol="0" anchor="ctr">
+            <a:normAutofit/>
+          </a:bodyPr>
+          <a:lstStyle/>
+          <a:p>
+            <a:pPr indent="0" marL="0">
+              <a:buNone/>
+            </a:pPr>
+            <a:r>
+              <a:rPr lang="en-US" sz="1550" dirty="0">
+                <a:solidFill>
+                  <a:srgbClr val="12304A"/>
+                </a:solidFill>
+                <a:latin typeface="Courier New" pitchFamily="34" charset="0"/>
+                <a:ea typeface="Courier New" pitchFamily="34" charset="-122"/>
+                <a:cs typeface="Courier New" pitchFamily="34" charset="-120"/>
+              </a:rPr>
+              <a:t>docker pull bkimminich/juice-shop</a:t>
+            </a:r>
+            <a:endParaRPr lang="en-US" sz="1550" dirty="0"/>
+          </a:p>
+          <a:p>
+            <a:pPr indent="0" marL="0">
+              <a:buNone/>
+            </a:pPr>
+            <a:r>
+              <a:rPr lang="en-US" sz="1550" dirty="0">
+                <a:solidFill>
+                  <a:srgbClr val="12304A"/>
+                </a:solidFill>
+                <a:latin typeface="Courier New" pitchFamily="34" charset="0"/>
+                <a:ea typeface="Courier New" pitchFamily="34" charset="-122"/>
+                <a:cs typeface="Courier New" pitchFamily="34" charset="-120"/>
+              </a:rPr>
+              <a:t>docker run --rm -d --name juice-shop-a02 -p 127.0.0.1:3000:3000 bkimminich/juice-shop</a:t>
+            </a:r>
+            <a:endParaRPr lang="en-US" sz="1550" dirty="0"/>
+          </a:p>
+        </p:txBody>
+      </p:sp>
+      <p:sp>
+        <p:nvSpPr>
+          <p:cNvPr id="8" name="Text 6"/>
+          <p:cNvSpPr/>
+          <p:nvPr/>
+        </p:nvSpPr>
+        <p:spPr>
+          <a:xfrm>
+            <a:off x="932688" y="4261104"/>
+            <a:ext cx="6035040" cy="384048"/>
+          </a:xfrm>
+          <a:prstGeom prst="rect">
+            <a:avLst/>
+          </a:prstGeom>
+          <a:noFill/>
+          <a:ln/>
+        </p:spPr>
+        <p:txBody>
+          <a:bodyPr wrap="square" lIns="0" tIns="0" rIns="0" bIns="0" rtlCol="0" anchor="ctr"/>
+          <a:lstStyle/>
+          <a:p>
+            <a:pPr indent="0" marL="0">
+              <a:buNone/>
+            </a:pPr>
+            <a:r>
+              <a:rPr lang="en-US" sz="1900" b="1" dirty="0">
+                <a:solidFill>
+                  <a:srgbClr val="0B65C2"/>
+                </a:solidFill>
+              </a:rPr>
+              <a:t>ABRA  http://127.0.0.1:3000</a:t>
+            </a:r>
+            <a:endParaRPr lang="en-US" sz="1900" dirty="0"/>
+          </a:p>
+        </p:txBody>
+      </p:sp>
+      <p:sp>
+        <p:nvSpPr>
+          <p:cNvPr id="9" name="Text 7"/>
+          <p:cNvSpPr/>
+          <p:nvPr/>
+        </p:nvSpPr>
+        <p:spPr>
+          <a:xfrm>
+            <a:off x="932688" y="4846320"/>
+            <a:ext cx="6035040" cy="310896"/>
+          </a:xfrm>
+          <a:prstGeom prst="rect">
+            <a:avLst/>
+          </a:prstGeom>
+          <a:noFill/>
+          <a:ln/>
+        </p:spPr>
+        <p:txBody>
+          <a:bodyPr wrap="square" lIns="0" tIns="0" rIns="0" bIns="0" rtlCol="0" anchor="ctr"/>
+          <a:lstStyle/>
+          <a:p>
+            <a:pPr indent="0" marL="0">
+              <a:buNone/>
+            </a:pPr>
+            <a:r>
+              <a:rPr lang="en-US" sz="1500" b="1" dirty="0">
+                <a:solidFill>
+                  <a:srgbClr val="B42318"/>
+                </a:solidFill>
+              </a:rPr>
+              <a:t>ENCERRE  docker stop juice-shop-a02</a:t>
+            </a:r>
+            <a:endParaRPr lang="en-US" sz="1500" dirty="0"/>
+          </a:p>
+        </p:txBody>
+      </p:sp>
+      <p:sp>
+        <p:nvSpPr>
+          <p:cNvPr id="10" name="Text 8"/>
+          <p:cNvSpPr/>
+          <p:nvPr/>
+        </p:nvSpPr>
+        <p:spPr>
+          <a:xfrm>
+            <a:off x="8275320" y="2240280"/>
+            <a:ext cx="2377440" cy="274320"/>
+          </a:xfrm>
+          <a:prstGeom prst="rect">
+            <a:avLst/>
+          </a:prstGeom>
+          <a:noFill/>
+          <a:ln/>
+        </p:spPr>
+        <p:txBody>
+          <a:bodyPr wrap="square" lIns="0" tIns="0" rIns="0" bIns="0" rtlCol="0" anchor="ctr"/>
+          <a:lstStyle/>
+          <a:p>
+            <a:pPr indent="0" marL="0">
+              <a:buNone/>
+            </a:pPr>
+            <a:r>
+              <a:rPr lang="en-US" sz="1500" b="1" dirty="0">
+                <a:solidFill>
+                  <a:srgbClr val="0B65C2"/>
+                </a:solidFill>
+              </a:rPr>
+              <a:t>ENTREGA</a:t>
+            </a:r>
+            <a:endParaRPr lang="en-US" sz="1500" dirty="0"/>
+          </a:p>
+        </p:txBody>
+      </p:sp>
+      <p:sp>
+        <p:nvSpPr>
+          <p:cNvPr id="11" name="Text 9"/>
+          <p:cNvSpPr/>
+          <p:nvPr/>
+        </p:nvSpPr>
+        <p:spPr>
+          <a:xfrm>
+            <a:off x="8275320" y="2761488"/>
+            <a:ext cx="2926080" cy="1600200"/>
+          </a:xfrm>
+          <a:prstGeom prst="rect">
+            <a:avLst/>
+          </a:prstGeom>
+          <a:noFill/>
+          <a:ln/>
+        </p:spPr>
+        <p:txBody>
+          <a:bodyPr wrap="square" lIns="0" tIns="0" rIns="0" bIns="0" rtlCol="0" anchor="ctr"/>
+          <a:lstStyle/>
+          <a:p>
+            <a:pPr indent="0" marL="0">
+              <a:buNone/>
+            </a:pPr>
+            <a:r>
+              <a:rPr lang="en-US" sz="1850" b="1" dirty="0">
+                <a:solidFill>
+                  <a:srgbClr val="12304A"/>
+                </a:solidFill>
+              </a:rPr>
+              <a:t>Inventário do Juice Shop</a:t>
+            </a:r>
+            <a:endParaRPr lang="en-US" sz="1850" dirty="0"/>
+          </a:p>
+          <a:p>
+            <a:pPr indent="0" marL="0">
+              <a:buNone/>
+            </a:pPr>
+            <a:r>
+              <a:rPr lang="en-US" sz="1850" b="1" dirty="0">
+                <a:solidFill>
+                  <a:srgbClr val="12304A"/>
+                </a:solidFill>
+              </a:rPr>
+              <a:t>Evidência interpretada</a:t>
+            </a:r>
+            <a:endParaRPr lang="en-US" sz="1850" dirty="0"/>
+          </a:p>
+          <a:p>
+            <a:pPr indent="0" marL="0">
+              <a:buNone/>
+            </a:pPr>
+            <a:r>
+              <a:rPr lang="en-US" sz="1850" b="1" dirty="0">
+                <a:solidFill>
+                  <a:srgbClr val="12304A"/>
+                </a:solidFill>
+              </a:rPr>
+              <a:t>Controle justificado</a:t>
+            </a:r>
+            <a:endParaRPr lang="en-US" sz="1850" dirty="0"/>
+          </a:p>
+          <a:p>
+            <a:pPr indent="0" marL="0">
+              <a:buNone/>
+            </a:pPr>
+            <a:r>
+              <a:rPr lang="en-US" sz="1850" b="1" dirty="0">
+                <a:solidFill>
+                  <a:srgbClr val="12304A"/>
+                </a:solidFill>
+              </a:rPr>
+              <a:t>Reteste definido</a:t>
+            </a:r>
+            <a:endParaRPr lang="en-US" sz="1850" dirty="0"/>
+          </a:p>
+        </p:txBody>
+      </p:sp>
+      <p:sp>
+        <p:nvSpPr>
+          <p:cNvPr id="12" name="Text 10"/>
+          <p:cNvSpPr/>
+          <p:nvPr/>
+        </p:nvSpPr>
+        <p:spPr>
+          <a:xfrm>
+            <a:off x="8275320" y="4754880"/>
+            <a:ext cx="2926080" cy="457200"/>
+          </a:xfrm>
+          <a:prstGeom prst="rect">
+            <a:avLst/>
+          </a:prstGeom>
+          <a:noFill/>
+          <a:ln/>
+        </p:spPr>
+        <p:txBody>
+          <a:bodyPr wrap="square" lIns="0" tIns="0" rIns="0" bIns="0" rtlCol="0" anchor="ctr"/>
+          <a:lstStyle/>
+          <a:p>
+            <a:pPr indent="0" marL="0">
+              <a:buNone/>
+            </a:pPr>
+            <a:r>
+              <a:rPr lang="en-US" sz="1400" dirty="0">
+                <a:solidFill>
+                  <a:srgbClr val="B42318"/>
+                </a:solidFill>
+              </a:rPr>
+              <a:t>Sem credenciais ou dados reais</a:t>
+            </a:r>
+            <a:endParaRPr lang="en-US" sz="1400" dirty="0"/>
+          </a:p>
+        </p:txBody>
+      </p:sp>
+      <p:sp>
+        <p:nvSpPr>
+          <p:cNvPr id="13" name="Shape 11"/>
+          <p:cNvSpPr/>
+          <p:nvPr/>
+        </p:nvSpPr>
+        <p:spPr>
+          <a:xfrm>
+            <a:off x="548640" y="6473952"/>
+            <a:ext cx="11018520" cy="0"/>
+          </a:xfrm>
+          <a:prstGeom prst="line">
+            <a:avLst/>
+          </a:prstGeom>
+          <a:noFill/>
+          <a:ln w="12700">
+            <a:solidFill>
+              <a:srgbClr val="C9D4DF"/>
+            </a:solidFill>
+            <a:prstDash val="solid"/>
+          </a:ln>
+        </p:spPr>
+      </p:sp>
+      <p:sp>
+        <p:nvSpPr>
+          <p:cNvPr id="14" name="Text 12"/>
+          <p:cNvSpPr/>
+          <p:nvPr/>
+        </p:nvSpPr>
+        <p:spPr>
+          <a:xfrm>
+            <a:off x="594360" y="6528816"/>
+            <a:ext cx="3657600" cy="182880"/>
+          </a:xfrm>
+          <a:prstGeom prst="rect">
+            <a:avLst/>
+          </a:prstGeom>
+          <a:noFill/>
+          <a:ln/>
+        </p:spPr>
+        <p:txBody>
+          <a:bodyPr wrap="square" lIns="0" tIns="0" rIns="0" bIns="0" rtlCol="0" anchor="ctr"/>
+          <a:lstStyle/>
+          <a:p>
+            <a:pPr indent="0" marL="0">
+              <a:buNone/>
+            </a:pPr>
+            <a:r>
+              <a:rPr lang="en-US" sz="1000" dirty="0">
+                <a:solidFill>
+                  <a:srgbClr val="4B5E71"/>
+                </a:solidFill>
+              </a:rPr>
+              <a:t>A02  •  Segurança Digital</a:t>
+            </a:r>
+            <a:endParaRPr lang="en-US" sz="1000" dirty="0"/>
+          </a:p>
+        </p:txBody>
+      </p:sp>
+      <p:sp>
+        <p:nvSpPr>
+          <p:cNvPr id="15" name="Text 13"/>
+          <p:cNvSpPr/>
+          <p:nvPr/>
+        </p:nvSpPr>
+        <p:spPr>
+          <a:xfrm>
+            <a:off x="5943600" y="6528816"/>
+            <a:ext cx="5623560" cy="182880"/>
+          </a:xfrm>
+          <a:prstGeom prst="rect">
+            <a:avLst/>
+          </a:prstGeom>
+          <a:noFill/>
+          <a:ln/>
+        </p:spPr>
+        <p:txBody>
+          <a:bodyPr wrap="square" lIns="0" tIns="0" rIns="0" bIns="0" rtlCol="0" anchor="ctr"/>
+          <a:lstStyle/>
+          <a:p>
+            <a:pPr algn="r" indent="0" marL="0">
+              <a:buNone/>
+            </a:pPr>
+            <a:r>
+              <a:rPr lang="en-US" sz="900" dirty="0">
+                <a:solidFill>
+                  <a:srgbClr val="4B5E71"/>
+                </a:solidFill>
+              </a:rPr>
+              <a:t>NIST CSF 2.0 • CWE • CVE</a:t>
+            </a:r>
+            <a:endParaRPr lang="en-US" sz="900" dirty="0"/>
+          </a:p>
+        </p:txBody>
+      </p:sp>
+    </p:spTree>
+  </p:cSld>
+  <p:clrMapOvr>
+    <a:masterClrMapping/>
+  </p:clrMapOvr>
+</p:sld>
+</file>
+
+<file path=ppt/slides/slide11.xml><?xml version="1.0" encoding="utf-8"?>
+<p:sld xmlns:a="http://schemas.openxmlformats.org/drawingml/2006/main" xmlns:r="http://schemas.openxmlformats.org/officeDocument/2006/relationships" xmlns:p="http://schemas.openxmlformats.org/presentationml/2006/main">
+  <p:cSld name="Slide 11">
+    <p:bg>
+      <p:bgPr>
+        <a:solidFill>
+          <a:srgbClr val="F4F7FA"/>
+        </a:solidFill>
+      </p:bgPr>
+    </p:bg>
+    <p:spTree>
+      <p:nvGrpSpPr>
+        <p:cNvPr id="1" name=""/>
+        <p:cNvGrpSpPr/>
+        <p:nvPr/>
+      </p:nvGrpSpPr>
+      <p:grpSpPr>
+        <a:xfrm>
+          <a:off x="0" y="0"/>
+          <a:ext cx="0" cy="0"/>
+          <a:chOff x="0" y="0"/>
+          <a:chExt cx="0" cy="0"/>
+        </a:xfrm>
+      </p:grpSpPr>
+      <p:sp>
+        <p:nvSpPr>
+          <p:cNvPr id="2" name="Text 0"/>
+          <p:cNvSpPr/>
+          <p:nvPr/>
+        </p:nvSpPr>
+        <p:spPr>
+          <a:xfrm>
+            <a:off x="640080" y="384048"/>
+            <a:ext cx="4389120" cy="256032"/>
+          </a:xfrm>
+          <a:prstGeom prst="rect">
+            <a:avLst/>
+          </a:prstGeom>
+          <a:noFill/>
+          <a:ln/>
+        </p:spPr>
+        <p:txBody>
+          <a:bodyPr wrap="square" lIns="0" tIns="0" rIns="0" bIns="0" rtlCol="0" anchor="ctr"/>
+          <a:lstStyle/>
+          <a:p>
+            <a:pPr indent="0" marL="0">
+              <a:buNone/>
+            </a:pPr>
+            <a:r>
+              <a:rPr lang="en-US" sz="1300" b="1" spc="100" kern="0" dirty="0">
+                <a:solidFill>
+                  <a:srgbClr val="087F7A"/>
+                </a:solidFill>
+              </a:rPr>
+              <a:t>SÍNTESE</a:t>
+            </a:r>
+            <a:endParaRPr lang="en-US" sz="1300" dirty="0"/>
+          </a:p>
+        </p:txBody>
+      </p:sp>
+      <p:sp>
+        <p:nvSpPr>
+          <p:cNvPr id="3" name="Text 1"/>
+          <p:cNvSpPr/>
+          <p:nvPr/>
+        </p:nvSpPr>
+        <p:spPr>
+          <a:xfrm>
+            <a:off x="640080" y="768096"/>
+            <a:ext cx="10881360" cy="658368"/>
+          </a:xfrm>
+          <a:prstGeom prst="rect">
+            <a:avLst/>
+          </a:prstGeom>
+          <a:noFill/>
+          <a:ln/>
+        </p:spPr>
+        <p:txBody>
+          <a:bodyPr wrap="square" lIns="0" tIns="0" rIns="0" bIns="0" rtlCol="0" anchor="ctr">
+            <a:normAutofit/>
+          </a:bodyPr>
+          <a:lstStyle/>
+          <a:p>
+            <a:pPr indent="0" marL="0">
+              <a:buNone/>
+            </a:pPr>
+            <a:r>
+              <a:rPr lang="en-US" sz="3000" b="1" dirty="0">
+                <a:solidFill>
+                  <a:srgbClr val="12304A"/>
+                </a:solidFill>
+              </a:rPr>
+              <a:t>Inventário orienta a prioridade</a:t>
+            </a:r>
+            <a:endParaRPr lang="en-US" sz="3000" dirty="0"/>
+          </a:p>
+        </p:txBody>
+      </p:sp>
+      <p:sp>
+        <p:nvSpPr>
+          <p:cNvPr id="4" name="Text 2"/>
+          <p:cNvSpPr/>
+          <p:nvPr/>
+        </p:nvSpPr>
+        <p:spPr>
+          <a:xfrm>
+            <a:off x="658368" y="1508760"/>
+            <a:ext cx="10424160" cy="402336"/>
+          </a:xfrm>
+          <a:prstGeom prst="rect">
+            <a:avLst/>
+          </a:prstGeom>
+          <a:noFill/>
+          <a:ln/>
+        </p:spPr>
+        <p:txBody>
+          <a:bodyPr wrap="square" lIns="0" tIns="0" rIns="0" bIns="0" rtlCol="0" anchor="ctr">
+            <a:normAutofit/>
+          </a:bodyPr>
+          <a:lstStyle/>
+          <a:p>
+            <a:pPr indent="0" marL="0">
+              <a:buNone/>
+            </a:pPr>
+            <a:r>
+              <a:rPr lang="en-US" sz="1700" dirty="0">
+                <a:solidFill>
+                  <a:srgbClr val="4B5E71"/>
+                </a:solidFill>
+              </a:rPr>
+              <a:t>A terminologia conecta evidência, causa, consequência, ação e validação.</a:t>
+            </a:r>
+            <a:endParaRPr lang="en-US" sz="1700" dirty="0"/>
+          </a:p>
+        </p:txBody>
+      </p:sp>
+      <p:sp>
+        <p:nvSpPr>
+          <p:cNvPr id="5" name="Shape 3"/>
+          <p:cNvSpPr/>
+          <p:nvPr/>
+        </p:nvSpPr>
+        <p:spPr>
+          <a:xfrm>
+            <a:off x="411480" y="2423160"/>
+            <a:ext cx="2103120" cy="1097280"/>
+          </a:xfrm>
+          <a:prstGeom prst="roundRect">
+            <a:avLst/>
+          </a:prstGeom>
+          <a:solidFill>
+            <a:srgbClr val="0B65C2"/>
+          </a:solidFill>
+          <a:ln w="12700">
+            <a:solidFill>
+              <a:srgbClr val="0B65C2"/>
+            </a:solidFill>
+            <a:prstDash val="solid"/>
+          </a:ln>
+        </p:spPr>
+      </p:sp>
+      <p:sp>
+        <p:nvSpPr>
+          <p:cNvPr id="6" name="Text 4"/>
+          <p:cNvSpPr/>
+          <p:nvPr/>
+        </p:nvSpPr>
+        <p:spPr>
+          <a:xfrm>
+            <a:off x="521208" y="2770632"/>
+            <a:ext cx="1883664" cy="320040"/>
+          </a:xfrm>
+          <a:prstGeom prst="rect">
+            <a:avLst/>
+          </a:prstGeom>
+          <a:noFill/>
+          <a:ln/>
+        </p:spPr>
+        <p:txBody>
+          <a:bodyPr wrap="square" lIns="0" tIns="0" rIns="0" bIns="0" rtlCol="0" anchor="ctr"/>
+          <a:lstStyle/>
+          <a:p>
+            <a:pPr algn="ctr" indent="0" marL="0">
+              <a:buNone/>
+            </a:pPr>
+            <a:r>
+              <a:rPr lang="en-US" sz="1500" b="1" dirty="0">
+                <a:solidFill>
+                  <a:srgbClr val="FFFFFF"/>
+                </a:solidFill>
+              </a:rPr>
+              <a:t>INVENTARIAR</a:t>
+            </a:r>
+            <a:endParaRPr lang="en-US" sz="1500" dirty="0"/>
+          </a:p>
+        </p:txBody>
+      </p:sp>
+      <p:sp>
+        <p:nvSpPr>
+          <p:cNvPr id="7" name="Shape 5"/>
+          <p:cNvSpPr/>
+          <p:nvPr/>
+        </p:nvSpPr>
+        <p:spPr>
+          <a:xfrm>
+            <a:off x="2770632" y="2423160"/>
+            <a:ext cx="2103120" cy="1097280"/>
+          </a:xfrm>
+          <a:prstGeom prst="roundRect">
+            <a:avLst/>
+          </a:prstGeom>
+          <a:solidFill>
+            <a:srgbClr val="087F7A"/>
+          </a:solidFill>
+          <a:ln w="12700">
+            <a:solidFill>
+              <a:srgbClr val="087F7A"/>
+            </a:solidFill>
+            <a:prstDash val="solid"/>
+          </a:ln>
+        </p:spPr>
+      </p:sp>
+      <p:sp>
+        <p:nvSpPr>
+          <p:cNvPr id="8" name="Text 6"/>
+          <p:cNvSpPr/>
+          <p:nvPr/>
+        </p:nvSpPr>
+        <p:spPr>
+          <a:xfrm>
+            <a:off x="2880360" y="2770632"/>
+            <a:ext cx="1883664" cy="320040"/>
+          </a:xfrm>
+          <a:prstGeom prst="rect">
+            <a:avLst/>
+          </a:prstGeom>
+          <a:noFill/>
+          <a:ln/>
+        </p:spPr>
+        <p:txBody>
+          <a:bodyPr wrap="square" lIns="0" tIns="0" rIns="0" bIns="0" rtlCol="0" anchor="ctr"/>
+          <a:lstStyle/>
+          <a:p>
+            <a:pPr algn="ctr" indent="0" marL="0">
+              <a:buNone/>
+            </a:pPr>
+            <a:r>
+              <a:rPr lang="en-US" sz="1500" b="1" dirty="0">
+                <a:solidFill>
+                  <a:srgbClr val="FFFFFF"/>
+                </a:solidFill>
+              </a:rPr>
+              <a:t>OBSERVAR</a:t>
+            </a:r>
+            <a:endParaRPr lang="en-US" sz="1500" dirty="0"/>
+          </a:p>
+        </p:txBody>
+      </p:sp>
+      <p:sp>
+        <p:nvSpPr>
+          <p:cNvPr id="9" name="Shape 7"/>
+          <p:cNvSpPr/>
+          <p:nvPr/>
+        </p:nvSpPr>
+        <p:spPr>
+          <a:xfrm>
+            <a:off x="5129784" y="2423160"/>
+            <a:ext cx="2103120" cy="1097280"/>
+          </a:xfrm>
+          <a:prstGeom prst="roundRect">
+            <a:avLst/>
+          </a:prstGeom>
+          <a:solidFill>
+            <a:srgbClr val="B75D00"/>
+          </a:solidFill>
+          <a:ln w="12700">
+            <a:solidFill>
+              <a:srgbClr val="B75D00"/>
+            </a:solidFill>
+            <a:prstDash val="solid"/>
+          </a:ln>
+        </p:spPr>
+      </p:sp>
+      <p:sp>
+        <p:nvSpPr>
+          <p:cNvPr id="10" name="Text 8"/>
+          <p:cNvSpPr/>
+          <p:nvPr/>
+        </p:nvSpPr>
+        <p:spPr>
+          <a:xfrm>
+            <a:off x="5239512" y="2770632"/>
+            <a:ext cx="1883664" cy="320040"/>
+          </a:xfrm>
+          <a:prstGeom prst="rect">
+            <a:avLst/>
+          </a:prstGeom>
+          <a:noFill/>
+          <a:ln/>
+        </p:spPr>
+        <p:txBody>
+          <a:bodyPr wrap="square" lIns="0" tIns="0" rIns="0" bIns="0" rtlCol="0" anchor="ctr"/>
+          <a:lstStyle/>
+          <a:p>
+            <a:pPr algn="ctr" indent="0" marL="0">
+              <a:buNone/>
+            </a:pPr>
+            <a:r>
+              <a:rPr lang="en-US" sz="1500" b="1" dirty="0">
+                <a:solidFill>
+                  <a:srgbClr val="FFFFFF"/>
+                </a:solidFill>
+              </a:rPr>
+              <a:t>EXPLICAR</a:t>
+            </a:r>
+            <a:endParaRPr lang="en-US" sz="1500" dirty="0"/>
+          </a:p>
+        </p:txBody>
+      </p:sp>
+      <p:sp>
+        <p:nvSpPr>
+          <p:cNvPr id="11" name="Shape 9"/>
+          <p:cNvSpPr/>
+          <p:nvPr/>
+        </p:nvSpPr>
+        <p:spPr>
+          <a:xfrm>
+            <a:off x="7488936" y="2423160"/>
+            <a:ext cx="2103120" cy="1097280"/>
+          </a:xfrm>
+          <a:prstGeom prst="roundRect">
+            <a:avLst/>
+          </a:prstGeom>
+          <a:solidFill>
+            <a:srgbClr val="B42318"/>
+          </a:solidFill>
+          <a:ln w="12700">
+            <a:solidFill>
+              <a:srgbClr val="B42318"/>
+            </a:solidFill>
+            <a:prstDash val="solid"/>
+          </a:ln>
+        </p:spPr>
+      </p:sp>
+      <p:sp>
+        <p:nvSpPr>
+          <p:cNvPr id="12" name="Text 10"/>
+          <p:cNvSpPr/>
+          <p:nvPr/>
+        </p:nvSpPr>
+        <p:spPr>
+          <a:xfrm>
+            <a:off x="7598664" y="2770632"/>
+            <a:ext cx="1883664" cy="320040"/>
+          </a:xfrm>
+          <a:prstGeom prst="rect">
+            <a:avLst/>
+          </a:prstGeom>
+          <a:noFill/>
+          <a:ln/>
+        </p:spPr>
+        <p:txBody>
+          <a:bodyPr wrap="square" lIns="0" tIns="0" rIns="0" bIns="0" rtlCol="0" anchor="ctr"/>
+          <a:lstStyle/>
+          <a:p>
+            <a:pPr algn="ctr" indent="0" marL="0">
+              <a:buNone/>
+            </a:pPr>
+            <a:r>
+              <a:rPr lang="en-US" sz="1500" b="1" dirty="0">
+                <a:solidFill>
+                  <a:srgbClr val="FFFFFF"/>
+                </a:solidFill>
+              </a:rPr>
+              <a:t>TRATAR</a:t>
+            </a:r>
+            <a:endParaRPr lang="en-US" sz="1500" dirty="0"/>
+          </a:p>
+        </p:txBody>
+      </p:sp>
+      <p:sp>
+        <p:nvSpPr>
+          <p:cNvPr id="13" name="Shape 11"/>
+          <p:cNvSpPr/>
+          <p:nvPr/>
+        </p:nvSpPr>
+        <p:spPr>
+          <a:xfrm>
+            <a:off x="9848088" y="2423160"/>
+            <a:ext cx="2103120" cy="1097280"/>
+          </a:xfrm>
+          <a:prstGeom prst="roundRect">
+            <a:avLst/>
+          </a:prstGeom>
+          <a:solidFill>
+            <a:srgbClr val="26734D"/>
+          </a:solidFill>
+          <a:ln w="12700">
+            <a:solidFill>
+              <a:srgbClr val="26734D"/>
+            </a:solidFill>
+            <a:prstDash val="solid"/>
+          </a:ln>
+        </p:spPr>
+      </p:sp>
+      <p:sp>
+        <p:nvSpPr>
+          <p:cNvPr id="14" name="Text 12"/>
+          <p:cNvSpPr/>
+          <p:nvPr/>
+        </p:nvSpPr>
+        <p:spPr>
+          <a:xfrm>
+            <a:off x="9957816" y="2770632"/>
+            <a:ext cx="1883664" cy="320040"/>
+          </a:xfrm>
+          <a:prstGeom prst="rect">
+            <a:avLst/>
+          </a:prstGeom>
+          <a:noFill/>
+          <a:ln/>
+        </p:spPr>
+        <p:txBody>
+          <a:bodyPr wrap="square" lIns="0" tIns="0" rIns="0" bIns="0" rtlCol="0" anchor="ctr"/>
+          <a:lstStyle/>
+          <a:p>
+            <a:pPr algn="ctr" indent="0" marL="0">
+              <a:buNone/>
+            </a:pPr>
+            <a:r>
+              <a:rPr lang="en-US" sz="1500" b="1" dirty="0">
+                <a:solidFill>
+                  <a:srgbClr val="FFFFFF"/>
+                </a:solidFill>
+              </a:rPr>
+              <a:t>RETESTAR</a:t>
+            </a:r>
+            <a:endParaRPr lang="en-US" sz="1500" dirty="0"/>
+          </a:p>
+        </p:txBody>
+      </p:sp>
+      <p:sp>
+        <p:nvSpPr>
+          <p:cNvPr id="15" name="Text 13"/>
+          <p:cNvSpPr/>
+          <p:nvPr/>
+        </p:nvSpPr>
+        <p:spPr>
+          <a:xfrm>
+            <a:off x="960120" y="4389120"/>
+            <a:ext cx="10241280" cy="822960"/>
+          </a:xfrm>
+          <a:prstGeom prst="rect">
+            <a:avLst/>
+          </a:prstGeom>
+          <a:noFill/>
+          <a:ln/>
+        </p:spPr>
+        <p:txBody>
+          <a:bodyPr wrap="square" lIns="0" tIns="0" rIns="0" bIns="0" rtlCol="0" anchor="ctr"/>
+          <a:lstStyle/>
+          <a:p>
+            <a:pPr algn="ctr" indent="0" marL="0">
+              <a:buNone/>
+            </a:pPr>
+            <a:r>
+              <a:rPr lang="en-US" sz="2400" b="1" dirty="0">
+                <a:solidFill>
+                  <a:srgbClr val="12304A"/>
+                </a:solidFill>
+              </a:rPr>
+              <a:t>Transferência: qual consequência física mudaria sua prioridade em uma HMI?</a:t>
+            </a:r>
+            <a:endParaRPr lang="en-US" sz="2400" dirty="0"/>
+          </a:p>
+        </p:txBody>
+      </p:sp>
+      <p:sp>
+        <p:nvSpPr>
+          <p:cNvPr id="16" name="Shape 14"/>
+          <p:cNvSpPr/>
+          <p:nvPr/>
+        </p:nvSpPr>
+        <p:spPr>
+          <a:xfrm>
+            <a:off x="548640" y="6473952"/>
+            <a:ext cx="11018520" cy="0"/>
+          </a:xfrm>
+          <a:prstGeom prst="line">
+            <a:avLst/>
+          </a:prstGeom>
+          <a:noFill/>
+          <a:ln w="12700">
+            <a:solidFill>
+              <a:srgbClr val="C9D4DF"/>
+            </a:solidFill>
+            <a:prstDash val="solid"/>
+          </a:ln>
+        </p:spPr>
+      </p:sp>
+      <p:sp>
+        <p:nvSpPr>
+          <p:cNvPr id="17" name="Text 15"/>
+          <p:cNvSpPr/>
+          <p:nvPr/>
+        </p:nvSpPr>
+        <p:spPr>
+          <a:xfrm>
+            <a:off x="594360" y="6528816"/>
+            <a:ext cx="3657600" cy="182880"/>
+          </a:xfrm>
+          <a:prstGeom prst="rect">
+            <a:avLst/>
+          </a:prstGeom>
+          <a:noFill/>
+          <a:ln/>
+        </p:spPr>
+        <p:txBody>
+          <a:bodyPr wrap="square" lIns="0" tIns="0" rIns="0" bIns="0" rtlCol="0" anchor="ctr"/>
+          <a:lstStyle/>
+          <a:p>
+            <a:pPr indent="0" marL="0">
+              <a:buNone/>
+            </a:pPr>
+            <a:r>
+              <a:rPr lang="en-US" sz="1000" dirty="0">
+                <a:solidFill>
+                  <a:srgbClr val="4B5E71"/>
+                </a:solidFill>
+              </a:rPr>
+              <a:t>A02  •  Segurança Digital</a:t>
+            </a:r>
+            <a:endParaRPr lang="en-US" sz="1000" dirty="0"/>
+          </a:p>
+        </p:txBody>
+      </p:sp>
+      <p:sp>
+        <p:nvSpPr>
+          <p:cNvPr id="18" name="Text 16"/>
+          <p:cNvSpPr/>
+          <p:nvPr/>
+        </p:nvSpPr>
+        <p:spPr>
+          <a:xfrm>
+            <a:off x="5943600" y="6528816"/>
+            <a:ext cx="5623560" cy="182880"/>
+          </a:xfrm>
+          <a:prstGeom prst="rect">
+            <a:avLst/>
+          </a:prstGeom>
+          <a:noFill/>
+          <a:ln/>
+        </p:spPr>
+        <p:txBody>
+          <a:bodyPr wrap="square" lIns="0" tIns="0" rIns="0" bIns="0" rtlCol="0" anchor="ctr"/>
+          <a:lstStyle/>
+          <a:p>
+            <a:pPr algn="r" indent="0" marL="0">
+              <a:buNone/>
+            </a:pPr>
+            <a:r>
+              <a:rPr lang="en-US" sz="900" dirty="0">
+                <a:solidFill>
+                  <a:srgbClr val="4B5E71"/>
+                </a:solidFill>
+              </a:rPr>
+              <a:t>NIST CSF 2.0; CWE; CVE; OWASP Juice Shop</a:t>
+            </a:r>
+            <a:endParaRPr lang="en-US" sz="900" dirty="0"/>
+          </a:p>
+        </p:txBody>
+      </p:sp>
+    </p:spTree>
+  </p:cSld>
+  <p:clrMapOvr>
+    <a:masterClrMapping/>
+  </p:clrMapOvr>
+</p:sld>
+</file>
+
 <file path=ppt/slides/slide2.xml><?xml version="1.0" encoding="utf-8"?>
 <p:sld xmlns:a="http://schemas.openxmlformats.org/drawingml/2006/main" xmlns:r="http://schemas.openxmlformats.org/officeDocument/2006/relationships" xmlns:p="http://schemas.openxmlformats.org/presentationml/2006/main">
   <p:cSld name="Slide 2">
@@ -1951,7 +3289,7 @@
                   <a:srgbClr val="087F7A"/>
                 </a:solidFill>
               </a:rPr>
-              <a:t>MISSÃO</a:t>
+              <a:t>OBJETIVO DA AULA</a:t>
             </a:r>
             <a:endParaRPr lang="en-US" sz="1300" dirty="0"/>
           </a:p>
@@ -1989,7 +3327,7 @@
                   <a:srgbClr val="12304A"/>
                 </a:solidFill>
               </a:rPr>
-              <a:t>Transformar uma exposição em decisão verificável</a:t>
+              <a:t>Aprender a explicar uma exposição observada</a:t>
             </a:r>
             <a:endParaRPr lang="en-US" sz="3000" dirty="0"/>
           </a:p>
@@ -2027,7 +3365,7 @@
                   <a:srgbClr val="4B5E71"/>
                 </a:solidFill>
               </a:rPr>
-              <a:t>Você integra a equipe que revisa a publicação da loja de testes.</a:t>
+              <a:t>Não vamos procurar falhas: vamos analisar juntos uma evidência conhecida.</a:t>
             </a:r>
             <a:endParaRPr lang="en-US" sz="1700" dirty="0"/>
           </a:p>
@@ -2041,8 +3379,8 @@
         </p:nvSpPr>
         <p:spPr>
           <a:xfrm>
-            <a:off x="685800" y="2148840"/>
-            <a:ext cx="3401568" cy="2468880"/>
+            <a:off x="502920" y="2103120"/>
+            <a:ext cx="2587752" cy="2514600"/>
           </a:xfrm>
           <a:prstGeom prst="roundRect">
             <a:avLst/>
@@ -2052,7 +3390,7 @@
           </a:solidFill>
           <a:ln w="25400">
             <a:solidFill>
-              <a:srgbClr val="B42318"/>
+              <a:srgbClr val="0B65C2"/>
             </a:solidFill>
             <a:prstDash val="solid"/>
           </a:ln>
@@ -2066,31 +3404,33 @@
         </p:nvSpPr>
         <p:spPr>
           <a:xfrm>
-            <a:off x="886968" y="2377440"/>
-            <a:ext cx="2999232" cy="274320"/>
-          </a:xfrm>
-          <a:prstGeom prst="rect">
-            <a:avLst/>
-          </a:prstGeom>
-          <a:noFill/>
+            <a:off x="1380744" y="2359152"/>
+            <a:ext cx="658368" cy="502920"/>
+          </a:xfrm>
+          <a:prstGeom prst="rect">
+            <a:avLst/>
+          </a:prstGeom>
+          <a:solidFill>
+            <a:srgbClr val="0B65C2"/>
+          </a:solidFill>
           <a:ln/>
         </p:spPr>
         <p:txBody>
           <a:bodyPr wrap="square" lIns="0" tIns="0" rIns="0" bIns="0" rtlCol="0" anchor="ctr"/>
           <a:lstStyle/>
           <a:p>
-            <a:pPr indent="0" marL="0">
-              <a:buNone/>
-            </a:pPr>
-            <a:r>
-              <a:rPr lang="en-US" sz="1400" b="1" dirty="0">
-                <a:solidFill>
-                  <a:srgbClr val="B42318"/>
-                </a:solidFill>
-              </a:rPr>
-              <a:t>RESTRIÇÃO</a:t>
-            </a:r>
-            <a:endParaRPr lang="en-US" sz="1400" dirty="0"/>
+            <a:pPr algn="ctr" indent="0" marL="0">
+              <a:buNone/>
+            </a:pPr>
+            <a:r>
+              <a:rPr lang="en-US" sz="2200" b="1" dirty="0">
+                <a:solidFill>
+                  <a:srgbClr val="FFFFFF"/>
+                </a:solidFill>
+              </a:rPr>
+              <a:t>1</a:t>
+            </a:r>
+            <a:endParaRPr lang="en-US" sz="2200" dirty="0"/>
           </a:p>
         </p:txBody>
       </p:sp>
@@ -2102,46 +3442,215 @@
         </p:nvSpPr>
         <p:spPr>
           <a:xfrm>
-            <a:off x="886968" y="2898648"/>
-            <a:ext cx="2999232" cy="1508760"/>
-          </a:xfrm>
-          <a:prstGeom prst="rect">
-            <a:avLst/>
-          </a:prstGeom>
-          <a:noFill/>
-          <a:ln/>
-        </p:spPr>
-        <p:txBody>
-          <a:bodyPr wrap="square" lIns="0" tIns="0" rIns="0" bIns="0" rtlCol="0" anchor="ctr">
-            <a:normAutofit/>
-          </a:bodyPr>
-          <a:lstStyle/>
-          <a:p>
-            <a:pPr indent="0" marL="0">
-              <a:buNone/>
-            </a:pPr>
-            <a:r>
-              <a:rPr lang="en-US" sz="1800" b="1" dirty="0">
-                <a:solidFill>
-                  <a:srgbClr val="172B4D"/>
-                </a:solidFill>
-              </a:rPr>
-              <a:t>Somente o Juice Shop local fornecido.</a:t>
-            </a:r>
-            <a:endParaRPr lang="en-US" sz="1800" dirty="0"/>
-          </a:p>
-        </p:txBody>
-      </p:sp>
-      <p:sp>
-        <p:nvSpPr>
-          <p:cNvPr id="8" name="Shape 6"/>
-          <p:cNvSpPr/>
-          <p:nvPr/>
-        </p:nvSpPr>
-        <p:spPr>
-          <a:xfrm>
-            <a:off x="4389120" y="2148840"/>
-            <a:ext cx="3401568" cy="2468880"/>
+            <a:off x="685800" y="3182112"/>
+            <a:ext cx="2221992" cy="274320"/>
+          </a:xfrm>
+          <a:prstGeom prst="rect">
+            <a:avLst/>
+          </a:prstGeom>
+          <a:noFill/>
+          <a:ln/>
+        </p:spPr>
+        <p:txBody>
+          <a:bodyPr wrap="square" lIns="0" tIns="0" rIns="0" bIns="0" rtlCol="0" anchor="ctr"/>
+          <a:lstStyle/>
+          <a:p>
+            <a:pPr algn="ctr" indent="0" marL="0">
+              <a:buNone/>
+            </a:pPr>
+            <a:r>
+              <a:rPr lang="en-US" sz="1500" b="1" dirty="0">
+                <a:solidFill>
+                  <a:srgbClr val="0B65C2"/>
+                </a:solidFill>
+              </a:rPr>
+              <a:t>OBSERVAR</a:t>
+            </a:r>
+            <a:endParaRPr lang="en-US" sz="1500" dirty="0"/>
+          </a:p>
+        </p:txBody>
+      </p:sp>
+      <p:sp>
+        <p:nvSpPr>
+          <p:cNvPr id="8" name="Text 6"/>
+          <p:cNvSpPr/>
+          <p:nvPr/>
+        </p:nvSpPr>
+        <p:spPr>
+          <a:xfrm>
+            <a:off x="777240" y="3730752"/>
+            <a:ext cx="2039112" cy="502920"/>
+          </a:xfrm>
+          <a:prstGeom prst="rect">
+            <a:avLst/>
+          </a:prstGeom>
+          <a:noFill/>
+          <a:ln/>
+        </p:spPr>
+        <p:txBody>
+          <a:bodyPr wrap="square" lIns="0" tIns="0" rIns="0" bIns="0" rtlCol="0" anchor="ctr"/>
+          <a:lstStyle/>
+          <a:p>
+            <a:pPr algn="ctr" indent="0" marL="0">
+              <a:buNone/>
+            </a:pPr>
+            <a:r>
+              <a:rPr lang="en-US" sz="1700" b="1" dirty="0">
+                <a:solidFill>
+                  <a:srgbClr val="12304A"/>
+                </a:solidFill>
+              </a:rPr>
+              <a:t>o servidor entregou o quê?</a:t>
+            </a:r>
+            <a:endParaRPr lang="en-US" sz="1700" dirty="0"/>
+          </a:p>
+        </p:txBody>
+      </p:sp>
+      <p:sp>
+        <p:nvSpPr>
+          <p:cNvPr id="9" name="Shape 7"/>
+          <p:cNvSpPr/>
+          <p:nvPr/>
+        </p:nvSpPr>
+        <p:spPr>
+          <a:xfrm>
+            <a:off x="3383280" y="2103120"/>
+            <a:ext cx="2587752" cy="2514600"/>
+          </a:xfrm>
+          <a:prstGeom prst="roundRect">
+            <a:avLst/>
+          </a:prstGeom>
+          <a:solidFill>
+            <a:srgbClr val="FFFFFF"/>
+          </a:solidFill>
+          <a:ln w="25400">
+            <a:solidFill>
+              <a:srgbClr val="087F7A"/>
+            </a:solidFill>
+            <a:prstDash val="solid"/>
+          </a:ln>
+        </p:spPr>
+      </p:sp>
+      <p:sp>
+        <p:nvSpPr>
+          <p:cNvPr id="10" name="Text 8"/>
+          <p:cNvSpPr/>
+          <p:nvPr/>
+        </p:nvSpPr>
+        <p:spPr>
+          <a:xfrm>
+            <a:off x="4261104" y="2359152"/>
+            <a:ext cx="658368" cy="502920"/>
+          </a:xfrm>
+          <a:prstGeom prst="rect">
+            <a:avLst/>
+          </a:prstGeom>
+          <a:solidFill>
+            <a:srgbClr val="087F7A"/>
+          </a:solidFill>
+          <a:ln/>
+        </p:spPr>
+        <p:txBody>
+          <a:bodyPr wrap="square" lIns="0" tIns="0" rIns="0" bIns="0" rtlCol="0" anchor="ctr"/>
+          <a:lstStyle/>
+          <a:p>
+            <a:pPr algn="ctr" indent="0" marL="0">
+              <a:buNone/>
+            </a:pPr>
+            <a:r>
+              <a:rPr lang="en-US" sz="2200" b="1" dirty="0">
+                <a:solidFill>
+                  <a:srgbClr val="FFFFFF"/>
+                </a:solidFill>
+              </a:rPr>
+              <a:t>2</a:t>
+            </a:r>
+            <a:endParaRPr lang="en-US" sz="2200" dirty="0"/>
+          </a:p>
+        </p:txBody>
+      </p:sp>
+      <p:sp>
+        <p:nvSpPr>
+          <p:cNvPr id="11" name="Text 9"/>
+          <p:cNvSpPr/>
+          <p:nvPr/>
+        </p:nvSpPr>
+        <p:spPr>
+          <a:xfrm>
+            <a:off x="3566160" y="3182112"/>
+            <a:ext cx="2221992" cy="274320"/>
+          </a:xfrm>
+          <a:prstGeom prst="rect">
+            <a:avLst/>
+          </a:prstGeom>
+          <a:noFill/>
+          <a:ln/>
+        </p:spPr>
+        <p:txBody>
+          <a:bodyPr wrap="square" lIns="0" tIns="0" rIns="0" bIns="0" rtlCol="0" anchor="ctr"/>
+          <a:lstStyle/>
+          <a:p>
+            <a:pPr algn="ctr" indent="0" marL="0">
+              <a:buNone/>
+            </a:pPr>
+            <a:r>
+              <a:rPr lang="en-US" sz="1500" b="1" dirty="0">
+                <a:solidFill>
+                  <a:srgbClr val="087F7A"/>
+                </a:solidFill>
+              </a:rPr>
+              <a:t>NOMEAR</a:t>
+            </a:r>
+            <a:endParaRPr lang="en-US" sz="1500" dirty="0"/>
+          </a:p>
+        </p:txBody>
+      </p:sp>
+      <p:sp>
+        <p:nvSpPr>
+          <p:cNvPr id="12" name="Text 10"/>
+          <p:cNvSpPr/>
+          <p:nvPr/>
+        </p:nvSpPr>
+        <p:spPr>
+          <a:xfrm>
+            <a:off x="3657600" y="3730752"/>
+            <a:ext cx="2039112" cy="502920"/>
+          </a:xfrm>
+          <a:prstGeom prst="rect">
+            <a:avLst/>
+          </a:prstGeom>
+          <a:noFill/>
+          <a:ln/>
+        </p:spPr>
+        <p:txBody>
+          <a:bodyPr wrap="square" lIns="0" tIns="0" rIns="0" bIns="0" rtlCol="0" anchor="ctr"/>
+          <a:lstStyle/>
+          <a:p>
+            <a:pPr algn="ctr" indent="0" marL="0">
+              <a:buNone/>
+            </a:pPr>
+            <a:r>
+              <a:rPr lang="en-US" sz="1700" b="1" dirty="0">
+                <a:solidFill>
+                  <a:srgbClr val="12304A"/>
+                </a:solidFill>
+              </a:rPr>
+              <a:t>qual ativo e quais conceitos?</a:t>
+            </a:r>
+            <a:endParaRPr lang="en-US" sz="1700" dirty="0"/>
+          </a:p>
+        </p:txBody>
+      </p:sp>
+      <p:sp>
+        <p:nvSpPr>
+          <p:cNvPr id="13" name="Shape 11"/>
+          <p:cNvSpPr/>
+          <p:nvPr/>
+        </p:nvSpPr>
+        <p:spPr>
+          <a:xfrm>
+            <a:off x="6263640" y="2103120"/>
+            <a:ext cx="2587752" cy="2514600"/>
           </a:xfrm>
           <a:prstGeom prst="roundRect">
             <a:avLst/>
@@ -2159,88 +3668,124 @@
       </p:sp>
       <p:sp>
         <p:nvSpPr>
-          <p:cNvPr id="9" name="Text 7"/>
-          <p:cNvSpPr/>
-          <p:nvPr/>
-        </p:nvSpPr>
-        <p:spPr>
-          <a:xfrm>
-            <a:off x="4590288" y="2377440"/>
-            <a:ext cx="2999232" cy="274320"/>
-          </a:xfrm>
-          <a:prstGeom prst="rect">
-            <a:avLst/>
-          </a:prstGeom>
-          <a:noFill/>
+          <p:cNvPr id="14" name="Text 12"/>
+          <p:cNvSpPr/>
+          <p:nvPr/>
+        </p:nvSpPr>
+        <p:spPr>
+          <a:xfrm>
+            <a:off x="7141464" y="2359152"/>
+            <a:ext cx="658368" cy="502920"/>
+          </a:xfrm>
+          <a:prstGeom prst="rect">
+            <a:avLst/>
+          </a:prstGeom>
+          <a:solidFill>
+            <a:srgbClr val="B75D00"/>
+          </a:solidFill>
           <a:ln/>
         </p:spPr>
         <p:txBody>
           <a:bodyPr wrap="square" lIns="0" tIns="0" rIns="0" bIns="0" rtlCol="0" anchor="ctr"/>
           <a:lstStyle/>
           <a:p>
-            <a:pPr indent="0" marL="0">
-              <a:buNone/>
-            </a:pPr>
-            <a:r>
-              <a:rPr lang="en-US" sz="1400" b="1" dirty="0">
+            <a:pPr algn="ctr" indent="0" marL="0">
+              <a:buNone/>
+            </a:pPr>
+            <a:r>
+              <a:rPr lang="en-US" sz="2200" b="1" dirty="0">
+                <a:solidFill>
+                  <a:srgbClr val="FFFFFF"/>
+                </a:solidFill>
+              </a:rPr>
+              <a:t>3</a:t>
+            </a:r>
+            <a:endParaRPr lang="en-US" sz="2200" dirty="0"/>
+          </a:p>
+        </p:txBody>
+      </p:sp>
+      <p:sp>
+        <p:nvSpPr>
+          <p:cNvPr id="15" name="Text 13"/>
+          <p:cNvSpPr/>
+          <p:nvPr/>
+        </p:nvSpPr>
+        <p:spPr>
+          <a:xfrm>
+            <a:off x="6446520" y="3182112"/>
+            <a:ext cx="2221992" cy="274320"/>
+          </a:xfrm>
+          <a:prstGeom prst="rect">
+            <a:avLst/>
+          </a:prstGeom>
+          <a:noFill/>
+          <a:ln/>
+        </p:spPr>
+        <p:txBody>
+          <a:bodyPr wrap="square" lIns="0" tIns="0" rIns="0" bIns="0" rtlCol="0" anchor="ctr"/>
+          <a:lstStyle/>
+          <a:p>
+            <a:pPr algn="ctr" indent="0" marL="0">
+              <a:buNone/>
+            </a:pPr>
+            <a:r>
+              <a:rPr lang="en-US" sz="1500" b="1" dirty="0">
                 <a:solidFill>
                   <a:srgbClr val="B75D00"/>
                 </a:solidFill>
               </a:rPr>
-              <a:t>INVESTIGAÇÃO</a:t>
-            </a:r>
-            <a:endParaRPr lang="en-US" sz="1400" dirty="0"/>
-          </a:p>
-        </p:txBody>
-      </p:sp>
-      <p:sp>
-        <p:nvSpPr>
-          <p:cNvPr id="10" name="Text 8"/>
-          <p:cNvSpPr/>
-          <p:nvPr/>
-        </p:nvSpPr>
-        <p:spPr>
-          <a:xfrm>
-            <a:off x="4590288" y="2898648"/>
-            <a:ext cx="2999232" cy="1508760"/>
-          </a:xfrm>
-          <a:prstGeom prst="rect">
-            <a:avLst/>
-          </a:prstGeom>
-          <a:noFill/>
-          <a:ln/>
-        </p:spPr>
-        <p:txBody>
-          <a:bodyPr wrap="square" lIns="0" tIns="0" rIns="0" bIns="0" rtlCol="0" anchor="ctr">
-            <a:normAutofit/>
-          </a:bodyPr>
-          <a:lstStyle/>
-          <a:p>
-            <a:pPr indent="0" marL="0">
-              <a:buNone/>
-            </a:pPr>
-            <a:r>
-              <a:rPr lang="en-US" sz="1800" b="1" dirty="0">
-                <a:solidFill>
-                  <a:srgbClr val="172B4D"/>
-                </a:solidFill>
-              </a:rPr>
-              <a:t>Uma requisição por vez; sem enumeração.</a:t>
-            </a:r>
-            <a:endParaRPr lang="en-US" sz="1800" dirty="0"/>
-          </a:p>
-        </p:txBody>
-      </p:sp>
-      <p:sp>
-        <p:nvSpPr>
-          <p:cNvPr id="11" name="Shape 9"/>
-          <p:cNvSpPr/>
-          <p:nvPr/>
-        </p:nvSpPr>
-        <p:spPr>
-          <a:xfrm>
-            <a:off x="8092440" y="2148840"/>
-            <a:ext cx="3401568" cy="2468880"/>
+              <a:t>DECIDIR</a:t>
+            </a:r>
+            <a:endParaRPr lang="en-US" sz="1500" dirty="0"/>
+          </a:p>
+        </p:txBody>
+      </p:sp>
+      <p:sp>
+        <p:nvSpPr>
+          <p:cNvPr id="16" name="Text 14"/>
+          <p:cNvSpPr/>
+          <p:nvPr/>
+        </p:nvSpPr>
+        <p:spPr>
+          <a:xfrm>
+            <a:off x="6537960" y="3730752"/>
+            <a:ext cx="2039112" cy="502920"/>
+          </a:xfrm>
+          <a:prstGeom prst="rect">
+            <a:avLst/>
+          </a:prstGeom>
+          <a:noFill/>
+          <a:ln/>
+        </p:spPr>
+        <p:txBody>
+          <a:bodyPr wrap="square" lIns="0" tIns="0" rIns="0" bIns="0" rtlCol="0" anchor="ctr"/>
+          <a:lstStyle/>
+          <a:p>
+            <a:pPr algn="ctr" indent="0" marL="0">
+              <a:buNone/>
+            </a:pPr>
+            <a:r>
+              <a:rPr lang="en-US" sz="1700" b="1" dirty="0">
+                <a:solidFill>
+                  <a:srgbClr val="12304A"/>
+                </a:solidFill>
+              </a:rPr>
+              <a:t>qual controle faz sentido?</a:t>
+            </a:r>
+            <a:endParaRPr lang="en-US" sz="1700" dirty="0"/>
+          </a:p>
+        </p:txBody>
+      </p:sp>
+      <p:sp>
+        <p:nvSpPr>
+          <p:cNvPr id="17" name="Shape 15"/>
+          <p:cNvSpPr/>
+          <p:nvPr/>
+        </p:nvSpPr>
+        <p:spPr>
+          <a:xfrm>
+            <a:off x="9144000" y="2103120"/>
+            <a:ext cx="2587752" cy="2514600"/>
           </a:xfrm>
           <a:prstGeom prst="roundRect">
             <a:avLst/>
@@ -2250,7 +3795,7 @@
           </a:solidFill>
           <a:ln w="25400">
             <a:solidFill>
-              <a:srgbClr val="087F7A"/>
+              <a:srgbClr val="26734D"/>
             </a:solidFill>
             <a:prstDash val="solid"/>
           </a:ln>
@@ -2258,81 +3803,153 @@
       </p:sp>
       <p:sp>
         <p:nvSpPr>
-          <p:cNvPr id="12" name="Text 10"/>
-          <p:cNvSpPr/>
-          <p:nvPr/>
-        </p:nvSpPr>
-        <p:spPr>
-          <a:xfrm>
-            <a:off x="8293608" y="2377440"/>
-            <a:ext cx="2999232" cy="274320"/>
-          </a:xfrm>
-          <a:prstGeom prst="rect">
-            <a:avLst/>
-          </a:prstGeom>
-          <a:noFill/>
+          <p:cNvPr id="18" name="Text 16"/>
+          <p:cNvSpPr/>
+          <p:nvPr/>
+        </p:nvSpPr>
+        <p:spPr>
+          <a:xfrm>
+            <a:off x="10021824" y="2359152"/>
+            <a:ext cx="658368" cy="502920"/>
+          </a:xfrm>
+          <a:prstGeom prst="rect">
+            <a:avLst/>
+          </a:prstGeom>
+          <a:solidFill>
+            <a:srgbClr val="26734D"/>
+          </a:solidFill>
           <a:ln/>
         </p:spPr>
         <p:txBody>
           <a:bodyPr wrap="square" lIns="0" tIns="0" rIns="0" bIns="0" rtlCol="0" anchor="ctr"/>
           <a:lstStyle/>
           <a:p>
-            <a:pPr indent="0" marL="0">
-              <a:buNone/>
-            </a:pPr>
-            <a:r>
-              <a:rPr lang="en-US" sz="1400" b="1" dirty="0">
-                <a:solidFill>
-                  <a:srgbClr val="087F7A"/>
-                </a:solidFill>
-              </a:rPr>
-              <a:t>ENTREGA</a:t>
-            </a:r>
-            <a:endParaRPr lang="en-US" sz="1400" dirty="0"/>
-          </a:p>
-        </p:txBody>
-      </p:sp>
-      <p:sp>
-        <p:nvSpPr>
-          <p:cNvPr id="13" name="Text 11"/>
-          <p:cNvSpPr/>
-          <p:nvPr/>
-        </p:nvSpPr>
-        <p:spPr>
-          <a:xfrm>
-            <a:off x="8293608" y="2898648"/>
-            <a:ext cx="2999232" cy="1508760"/>
-          </a:xfrm>
-          <a:prstGeom prst="rect">
-            <a:avLst/>
-          </a:prstGeom>
-          <a:noFill/>
-          <a:ln/>
-        </p:spPr>
-        <p:txBody>
-          <a:bodyPr wrap="square" lIns="0" tIns="0" rIns="0" bIns="0" rtlCol="0" anchor="ctr">
-            <a:normAutofit/>
-          </a:bodyPr>
-          <a:lstStyle/>
-          <a:p>
-            <a:pPr indent="0" marL="0">
-              <a:buNone/>
-            </a:pPr>
-            <a:r>
-              <a:rPr lang="en-US" sz="1800" b="1" dirty="0">
-                <a:solidFill>
-                  <a:srgbClr val="172B4D"/>
-                </a:solidFill>
-              </a:rPr>
-              <a:t>Inventário + registro + reteste.</a:t>
-            </a:r>
-            <a:endParaRPr lang="en-US" sz="1800" dirty="0"/>
-          </a:p>
-        </p:txBody>
-      </p:sp>
-      <p:sp>
-        <p:nvSpPr>
-          <p:cNvPr id="14" name="Shape 12"/>
+            <a:pPr algn="ctr" indent="0" marL="0">
+              <a:buNone/>
+            </a:pPr>
+            <a:r>
+              <a:rPr lang="en-US" sz="2200" b="1" dirty="0">
+                <a:solidFill>
+                  <a:srgbClr val="FFFFFF"/>
+                </a:solidFill>
+              </a:rPr>
+              <a:t>4</a:t>
+            </a:r>
+            <a:endParaRPr lang="en-US" sz="2200" dirty="0"/>
+          </a:p>
+        </p:txBody>
+      </p:sp>
+      <p:sp>
+        <p:nvSpPr>
+          <p:cNvPr id="19" name="Text 17"/>
+          <p:cNvSpPr/>
+          <p:nvPr/>
+        </p:nvSpPr>
+        <p:spPr>
+          <a:xfrm>
+            <a:off x="9326880" y="3182112"/>
+            <a:ext cx="2221992" cy="274320"/>
+          </a:xfrm>
+          <a:prstGeom prst="rect">
+            <a:avLst/>
+          </a:prstGeom>
+          <a:noFill/>
+          <a:ln/>
+        </p:spPr>
+        <p:txBody>
+          <a:bodyPr wrap="square" lIns="0" tIns="0" rIns="0" bIns="0" rtlCol="0" anchor="ctr"/>
+          <a:lstStyle/>
+          <a:p>
+            <a:pPr algn="ctr" indent="0" marL="0">
+              <a:buNone/>
+            </a:pPr>
+            <a:r>
+              <a:rPr lang="en-US" sz="1500" b="1" dirty="0">
+                <a:solidFill>
+                  <a:srgbClr val="26734D"/>
+                </a:solidFill>
+              </a:rPr>
+              <a:t>VALIDAR</a:t>
+            </a:r>
+            <a:endParaRPr lang="en-US" sz="1500" dirty="0"/>
+          </a:p>
+        </p:txBody>
+      </p:sp>
+      <p:sp>
+        <p:nvSpPr>
+          <p:cNvPr id="20" name="Text 18"/>
+          <p:cNvSpPr/>
+          <p:nvPr/>
+        </p:nvSpPr>
+        <p:spPr>
+          <a:xfrm>
+            <a:off x="9418320" y="3730752"/>
+            <a:ext cx="2039112" cy="502920"/>
+          </a:xfrm>
+          <a:prstGeom prst="rect">
+            <a:avLst/>
+          </a:prstGeom>
+          <a:noFill/>
+          <a:ln/>
+        </p:spPr>
+        <p:txBody>
+          <a:bodyPr wrap="square" lIns="0" tIns="0" rIns="0" bIns="0" rtlCol="0" anchor="ctr"/>
+          <a:lstStyle/>
+          <a:p>
+            <a:pPr algn="ctr" indent="0" marL="0">
+              <a:buNone/>
+            </a:pPr>
+            <a:r>
+              <a:rPr lang="en-US" sz="1700" b="1" dirty="0">
+                <a:solidFill>
+                  <a:srgbClr val="12304A"/>
+                </a:solidFill>
+              </a:rPr>
+              <a:t>como provar que melhorou?</a:t>
+            </a:r>
+            <a:endParaRPr lang="en-US" sz="1700" dirty="0"/>
+          </a:p>
+        </p:txBody>
+      </p:sp>
+      <p:sp>
+        <p:nvSpPr>
+          <p:cNvPr id="21" name="Text 19"/>
+          <p:cNvSpPr/>
+          <p:nvPr/>
+        </p:nvSpPr>
+        <p:spPr>
+          <a:xfrm>
+            <a:off x="960120" y="5212080"/>
+            <a:ext cx="10241280" cy="566928"/>
+          </a:xfrm>
+          <a:prstGeom prst="rect">
+            <a:avLst/>
+          </a:prstGeom>
+          <a:noFill/>
+          <a:ln/>
+        </p:spPr>
+        <p:txBody>
+          <a:bodyPr wrap="square" lIns="0" tIns="0" rIns="0" bIns="0" rtlCol="0" anchor="ctr"/>
+          <a:lstStyle/>
+          <a:p>
+            <a:pPr algn="ctr" indent="0" marL="0">
+              <a:buNone/>
+            </a:pPr>
+            <a:r>
+              <a:rPr lang="en-US" sz="1900" b="1" dirty="0">
+                <a:solidFill>
+                  <a:srgbClr val="12304A"/>
+                </a:solidFill>
+              </a:rPr>
+              <a:t>Ao final, você conseguirá escrever: evidência → ativo → hipótese de fraqueza → vulnerabilidade → consequência → controle → reteste.</a:t>
+            </a:r>
+            <a:endParaRPr lang="en-US" sz="1900" dirty="0"/>
+          </a:p>
+        </p:txBody>
+      </p:sp>
+      <p:sp>
+        <p:nvSpPr>
+          <p:cNvPr id="22" name="Shape 20"/>
           <p:cNvSpPr/>
           <p:nvPr/>
         </p:nvSpPr>
@@ -2355,7 +3972,7 @@
       </p:sp>
       <p:sp>
         <p:nvSpPr>
-          <p:cNvPr id="15" name="Text 13"/>
+          <p:cNvPr id="23" name="Text 21"/>
           <p:cNvSpPr/>
           <p:nvPr/>
         </p:nvSpPr>
@@ -2391,7 +4008,7 @@
       </p:sp>
       <p:sp>
         <p:nvSpPr>
-          <p:cNvPr id="16" name="Text 14"/>
+          <p:cNvPr id="24" name="Text 22"/>
           <p:cNvSpPr/>
           <p:nvPr/>
         </p:nvSpPr>
@@ -2487,7 +4104,7 @@
                   <a:srgbClr val="087F7A"/>
                 </a:solidFill>
               </a:rPr>
-              <a:t>PREVISÃO</a:t>
+              <a:t>AMBIENTE</a:t>
             </a:r>
             <a:endParaRPr lang="en-US" sz="1300" dirty="0"/>
           </a:p>
@@ -2525,7 +4142,7 @@
                   <a:srgbClr val="12304A"/>
                 </a:solidFill>
               </a:rPr>
-              <a:t>O que o código 200 permite afirmar?</a:t>
+              <a:t>Cada estudante abre o Juice Shop no próprio computador</a:t>
             </a:r>
             <a:endParaRPr lang="en-US" sz="3000" dirty="0"/>
           </a:p>
@@ -2563,7 +4180,7 @@
                   <a:srgbClr val="4B5E71"/>
                 </a:solidFill>
               </a:rPr>
-              <a:t>Registre antes de conhecer a arquitetura.</a:t>
+              <a:t>127.0.0.1 significa esta máquina; não é um servidor fornecido pelo professor.</a:t>
             </a:r>
             <a:endParaRPr lang="en-US" sz="1700" dirty="0"/>
           </a:p>
@@ -2577,8 +4194,8 @@
         </p:nvSpPr>
         <p:spPr>
           <a:xfrm>
-            <a:off x="731520" y="2011680"/>
-            <a:ext cx="6583680" cy="3246120"/>
+            <a:off x="640080" y="1938528"/>
+            <a:ext cx="7040880" cy="3566160"/>
           </a:xfrm>
           <a:prstGeom prst="roundRect">
             <a:avLst/>
@@ -2602,24 +4219,26 @@
         </p:nvSpPr>
         <p:spPr>
           <a:xfrm>
-            <a:off x="1143000" y="2514600"/>
-            <a:ext cx="5760720" cy="2011680"/>
-          </a:xfrm>
-          <a:prstGeom prst="rect">
-            <a:avLst/>
-          </a:prstGeom>
-          <a:noFill/>
-          <a:ln/>
-        </p:spPr>
-        <p:txBody>
-          <a:bodyPr wrap="square" lIns="0" tIns="0" rIns="0" bIns="0" rtlCol="0" anchor="ctr"/>
+            <a:off x="960120" y="2331720"/>
+            <a:ext cx="6355080" cy="2606040"/>
+          </a:xfrm>
+          <a:prstGeom prst="rect">
+            <a:avLst/>
+          </a:prstGeom>
+          <a:noFill/>
+          <a:ln/>
+        </p:spPr>
+        <p:txBody>
+          <a:bodyPr wrap="square" lIns="0" tIns="0" rIns="0" bIns="0" rtlCol="0" anchor="ctr">
+            <a:normAutofit/>
+          </a:bodyPr>
           <a:lstStyle/>
           <a:p>
             <a:pPr indent="0" marL="0">
               <a:buNone/>
             </a:pPr>
             <a:r>
-              <a:rPr lang="en-US" sz="2000" dirty="0">
+              <a:rPr lang="en-US" sz="1600" dirty="0">
                 <a:solidFill>
                   <a:srgbClr val="D8F3EA"/>
                 </a:solidFill>
@@ -2627,22 +4246,22 @@
                 <a:ea typeface="Courier New" pitchFamily="34" charset="-122"/>
                 <a:cs typeface="Courier New" pitchFamily="34" charset="-120"/>
               </a:rPr>
-              <a:t>GET /ftp/acquisitions.md</a:t>
-            </a:r>
-            <a:endParaRPr lang="en-US" sz="2000" dirty="0"/>
+              <a:t>POWERSHELL OU TERMINAL LINUX</a:t>
+            </a:r>
+            <a:endParaRPr lang="en-US" sz="1600" dirty="0"/>
           </a:p>
           <a:p>
             <a:pPr indent="0" marL="0">
               <a:buNone/>
             </a:pPr>
-            <a:endParaRPr lang="en-US" sz="2000" dirty="0"/>
+            <a:endParaRPr lang="en-US" sz="1600" dirty="0"/>
           </a:p>
           <a:p>
             <a:pPr indent="0" marL="0">
               <a:buNone/>
             </a:pPr>
             <a:r>
-              <a:rPr lang="en-US" sz="2000" dirty="0">
+              <a:rPr lang="en-US" sz="1600" dirty="0">
                 <a:solidFill>
                   <a:srgbClr val="D8F3EA"/>
                 </a:solidFill>
@@ -2650,16 +4269,22 @@
                 <a:ea typeface="Courier New" pitchFamily="34" charset="-122"/>
                 <a:cs typeface="Courier New" pitchFamily="34" charset="-120"/>
               </a:rPr>
-              <a:t>HTTP/1.1 200 OK</a:t>
-            </a:r>
-            <a:endParaRPr lang="en-US" sz="2000" dirty="0"/>
+              <a:t>docker pull bkimminich/juice-shop</a:t>
+            </a:r>
+            <a:endParaRPr lang="en-US" sz="1600" dirty="0"/>
           </a:p>
           <a:p>
             <a:pPr indent="0" marL="0">
               <a:buNone/>
             </a:pPr>
-            <a:r>
-              <a:rPr lang="en-US" sz="2000" dirty="0">
+            <a:endParaRPr lang="en-US" sz="1600" dirty="0"/>
+          </a:p>
+          <a:p>
+            <a:pPr indent="0" marL="0">
+              <a:buNone/>
+            </a:pPr>
+            <a:r>
+              <a:rPr lang="en-US" sz="1600" dirty="0">
                 <a:solidFill>
                   <a:srgbClr val="D8F3EA"/>
                 </a:solidFill>
@@ -2667,9 +4292,26 @@
                 <a:ea typeface="Courier New" pitchFamily="34" charset="-122"/>
                 <a:cs typeface="Courier New" pitchFamily="34" charset="-120"/>
               </a:rPr>
-              <a:t>Content-Type: text/markdown</a:t>
-            </a:r>
-            <a:endParaRPr lang="en-US" sz="2000" dirty="0"/>
+              <a:t>docker run --rm -d --name juice-shop-a02</a:t>
+            </a:r>
+            <a:endParaRPr lang="en-US" sz="1600" dirty="0"/>
+          </a:p>
+          <a:p>
+            <a:pPr indent="0" marL="0">
+              <a:buNone/>
+            </a:pPr>
+            <a:r>
+              <a:rPr lang="en-US" sz="1600" dirty="0">
+                <a:solidFill>
+                  <a:srgbClr val="D8F3EA"/>
+                </a:solidFill>
+                <a:latin typeface="Courier New" pitchFamily="34" charset="0"/>
+                <a:ea typeface="Courier New" pitchFamily="34" charset="-122"/>
+                <a:cs typeface="Courier New" pitchFamily="34" charset="-120"/>
+              </a:rPr>
+              <a:t>-p 127.0.0.1:3000:3000 bkimminich/juice-shop</a:t>
+            </a:r>
+            <a:endParaRPr lang="en-US" sz="1600" dirty="0"/>
           </a:p>
         </p:txBody>
       </p:sp>
@@ -2681,8 +4323,8 @@
         </p:nvSpPr>
         <p:spPr>
           <a:xfrm>
-            <a:off x="8092440" y="2194560"/>
-            <a:ext cx="2286000" cy="274320"/>
+            <a:off x="8275320" y="2240280"/>
+            <a:ext cx="2560320" cy="274320"/>
           </a:xfrm>
           <a:prstGeom prst="rect">
             <a:avLst/>
@@ -2703,7 +4345,7 @@
                   <a:srgbClr val="0B65C2"/>
                 </a:solidFill>
               </a:rPr>
-              <a:t>REGISTRE</a:t>
+              <a:t>ABRA</a:t>
             </a:r>
             <a:endParaRPr lang="en-US" sz="1400" dirty="0"/>
           </a:p>
@@ -2717,8 +4359,46 @@
         </p:nvSpPr>
         <p:spPr>
           <a:xfrm>
-            <a:off x="8092440" y="2743200"/>
-            <a:ext cx="2743200" cy="1645920"/>
+            <a:off x="8275320" y="2697480"/>
+            <a:ext cx="2880360" cy="640080"/>
+          </a:xfrm>
+          <a:prstGeom prst="rect">
+            <a:avLst/>
+          </a:prstGeom>
+          <a:noFill/>
+          <a:ln/>
+        </p:spPr>
+        <p:txBody>
+          <a:bodyPr wrap="square" lIns="0" tIns="0" rIns="0" bIns="0" rtlCol="0" anchor="ctr">
+            <a:normAutofit/>
+          </a:bodyPr>
+          <a:lstStyle/>
+          <a:p>
+            <a:pPr indent="0" marL="0">
+              <a:buNone/>
+            </a:pPr>
+            <a:r>
+              <a:rPr lang="en-US" sz="2100" b="1" dirty="0">
+                <a:solidFill>
+                  <a:srgbClr val="12304A"/>
+                </a:solidFill>
+              </a:rPr>
+              <a:t>http://127.0.0.1:3000</a:t>
+            </a:r>
+            <a:endParaRPr lang="en-US" sz="2100" dirty="0"/>
+          </a:p>
+        </p:txBody>
+      </p:sp>
+      <p:sp>
+        <p:nvSpPr>
+          <p:cNvPr id="9" name="Text 7"/>
+          <p:cNvSpPr/>
+          <p:nvPr/>
+        </p:nvSpPr>
+        <p:spPr>
+          <a:xfrm>
+            <a:off x="8275320" y="3730752"/>
+            <a:ext cx="2560320" cy="274320"/>
           </a:xfrm>
           <a:prstGeom prst="rect">
             <a:avLst/>
@@ -2734,62 +4414,58 @@
               <a:buNone/>
             </a:pPr>
             <a:r>
-              <a:rPr lang="en-US" sz="2200" b="1" dirty="0">
+              <a:rPr lang="en-US" sz="1400" b="1" dirty="0">
+                <a:solidFill>
+                  <a:srgbClr val="087F7A"/>
+                </a:solidFill>
+              </a:rPr>
+              <a:t>POR QUE LOCAL?</a:t>
+            </a:r>
+            <a:endParaRPr lang="en-US" sz="1400" dirty="0"/>
+          </a:p>
+        </p:txBody>
+      </p:sp>
+      <p:sp>
+        <p:nvSpPr>
+          <p:cNvPr id="10" name="Text 8"/>
+          <p:cNvSpPr/>
+          <p:nvPr/>
+        </p:nvSpPr>
+        <p:spPr>
+          <a:xfrm>
+            <a:off x="8275320" y="4160520"/>
+            <a:ext cx="2926080" cy="960120"/>
+          </a:xfrm>
+          <a:prstGeom prst="rect">
+            <a:avLst/>
+          </a:prstGeom>
+          <a:noFill/>
+          <a:ln/>
+        </p:spPr>
+        <p:txBody>
+          <a:bodyPr wrap="square" lIns="0" tIns="0" rIns="0" bIns="0" rtlCol="0" anchor="ctr">
+            <a:normAutofit/>
+          </a:bodyPr>
+          <a:lstStyle/>
+          <a:p>
+            <a:pPr indent="0" marL="0">
+              <a:buNone/>
+            </a:pPr>
+            <a:r>
+              <a:rPr lang="en-US" sz="1650" b="1" dirty="0">
                 <a:solidFill>
                   <a:srgbClr val="12304A"/>
                 </a:solidFill>
               </a:rPr>
-              <a:t>2 observações</a:t>
-            </a:r>
-            <a:endParaRPr lang="en-US" sz="2200" dirty="0"/>
-          </a:p>
-          <a:p>
-            <a:pPr indent="0" marL="0">
-              <a:buNone/>
-            </a:pPr>
-            <a:r>
-              <a:rPr lang="en-US" sz="2200" b="1" dirty="0">
-                <a:solidFill>
-                  <a:srgbClr val="12304A"/>
-                </a:solidFill>
-              </a:rPr>
-              <a:t>1 ativo</a:t>
-            </a:r>
-            <a:endParaRPr lang="en-US" sz="2200" dirty="0"/>
-          </a:p>
-          <a:p>
-            <a:pPr indent="0" marL="0">
-              <a:buNone/>
-            </a:pPr>
-            <a:r>
-              <a:rPr lang="en-US" sz="2200" b="1" dirty="0">
-                <a:solidFill>
-                  <a:srgbClr val="12304A"/>
-                </a:solidFill>
-              </a:rPr>
-              <a:t>1 hipótese</a:t>
-            </a:r>
-            <a:endParaRPr lang="en-US" sz="2200" dirty="0"/>
-          </a:p>
-          <a:p>
-            <a:pPr indent="0" marL="0">
-              <a:buNone/>
-            </a:pPr>
-            <a:r>
-              <a:rPr lang="en-US" sz="2200" b="1" dirty="0">
-                <a:solidFill>
-                  <a:srgbClr val="12304A"/>
-                </a:solidFill>
-              </a:rPr>
-              <a:t>1 lacuna</a:t>
-            </a:r>
-            <a:endParaRPr lang="en-US" sz="2200" dirty="0"/>
-          </a:p>
-        </p:txBody>
-      </p:sp>
-      <p:sp>
-        <p:nvSpPr>
-          <p:cNvPr id="9" name="Shape 7"/>
+              <a:t>A aplicação é vulnerável de propósito. Mantê-la em 127.0.0.1 limita o acesso à própria máquina.</a:t>
+            </a:r>
+            <a:endParaRPr lang="en-US" sz="1650" dirty="0"/>
+          </a:p>
+        </p:txBody>
+      </p:sp>
+      <p:sp>
+        <p:nvSpPr>
+          <p:cNvPr id="11" name="Shape 9"/>
           <p:cNvSpPr/>
           <p:nvPr/>
         </p:nvSpPr>
@@ -2812,7 +4488,7 @@
       </p:sp>
       <p:sp>
         <p:nvSpPr>
-          <p:cNvPr id="10" name="Text 8"/>
+          <p:cNvPr id="12" name="Text 10"/>
           <p:cNvSpPr/>
           <p:nvPr/>
         </p:nvSpPr>
@@ -2848,7 +4524,7 @@
       </p:sp>
       <p:sp>
         <p:nvSpPr>
-          <p:cNvPr id="11" name="Text 9"/>
+          <p:cNvPr id="13" name="Text 11"/>
           <p:cNvSpPr/>
           <p:nvPr/>
         </p:nvSpPr>
@@ -2876,7 +4552,7 @@
                   <a:srgbClr val="4B5E71"/>
                 </a:solidFill>
               </a:rPr>
-              <a:t>Evidência fictícia preparada para a disciplina</a:t>
+              <a:t>OWASP Juice Shop — guia oficial de execução com Docker</a:t>
             </a:r>
             <a:endParaRPr lang="en-US" sz="900" dirty="0"/>
           </a:p>
@@ -2893,6 +4569,586 @@
 <file path=ppt/slides/slide4.xml><?xml version="1.0" encoding="utf-8"?>
 <p:sld xmlns:a="http://schemas.openxmlformats.org/drawingml/2006/main" xmlns:r="http://schemas.openxmlformats.org/officeDocument/2006/relationships" xmlns:p="http://schemas.openxmlformats.org/presentationml/2006/main">
   <p:cSld name="Slide 4">
+    <p:bg>
+      <p:bgPr>
+        <a:solidFill>
+          <a:srgbClr val="FFFFFF"/>
+        </a:solidFill>
+      </p:bgPr>
+    </p:bg>
+    <p:spTree>
+      <p:nvGrpSpPr>
+        <p:cNvPr id="1" name=""/>
+        <p:cNvGrpSpPr/>
+        <p:nvPr/>
+      </p:nvGrpSpPr>
+      <p:grpSpPr>
+        <a:xfrm>
+          <a:off x="0" y="0"/>
+          <a:ext cx="0" cy="0"/>
+          <a:chOff x="0" y="0"/>
+          <a:chExt cx="0" cy="0"/>
+        </a:xfrm>
+      </p:grpSpPr>
+      <p:sp>
+        <p:nvSpPr>
+          <p:cNvPr id="2" name="Text 0"/>
+          <p:cNvSpPr/>
+          <p:nvPr/>
+        </p:nvSpPr>
+        <p:spPr>
+          <a:xfrm>
+            <a:off x="640080" y="384048"/>
+            <a:ext cx="4389120" cy="256032"/>
+          </a:xfrm>
+          <a:prstGeom prst="rect">
+            <a:avLst/>
+          </a:prstGeom>
+          <a:noFill/>
+          <a:ln/>
+        </p:spPr>
+        <p:txBody>
+          <a:bodyPr wrap="square" lIns="0" tIns="0" rIns="0" bIns="0" rtlCol="0" anchor="ctr"/>
+          <a:lstStyle/>
+          <a:p>
+            <a:pPr indent="0" marL="0">
+              <a:buNone/>
+            </a:pPr>
+            <a:r>
+              <a:rPr lang="en-US" sz="1300" b="1" spc="100" kern="0" dirty="0">
+                <a:solidFill>
+                  <a:srgbClr val="087F7A"/>
+                </a:solidFill>
+              </a:rPr>
+              <a:t>OBSERVAÇÃO GUIADA</a:t>
+            </a:r>
+            <a:endParaRPr lang="en-US" sz="1300" dirty="0"/>
+          </a:p>
+        </p:txBody>
+      </p:sp>
+      <p:sp>
+        <p:nvSpPr>
+          <p:cNvPr id="3" name="Text 1"/>
+          <p:cNvSpPr/>
+          <p:nvPr/>
+        </p:nvSpPr>
+        <p:spPr>
+          <a:xfrm>
+            <a:off x="640080" y="768096"/>
+            <a:ext cx="10881360" cy="658368"/>
+          </a:xfrm>
+          <a:prstGeom prst="rect">
+            <a:avLst/>
+          </a:prstGeom>
+          <a:noFill/>
+          <a:ln/>
+        </p:spPr>
+        <p:txBody>
+          <a:bodyPr wrap="square" lIns="0" tIns="0" rIns="0" bIns="0" rtlCol="0" anchor="ctr">
+            <a:normAutofit/>
+          </a:bodyPr>
+          <a:lstStyle/>
+          <a:p>
+            <a:pPr indent="0" marL="0">
+              <a:buNone/>
+            </a:pPr>
+            <a:r>
+              <a:rPr lang="en-US" sz="3000" b="1" dirty="0">
+                <a:solidFill>
+                  <a:srgbClr val="12304A"/>
+                </a:solidFill>
+              </a:rPr>
+              <a:t>Uma URL, uma requisição e limites claros</a:t>
+            </a:r>
+            <a:endParaRPr lang="en-US" sz="3000" dirty="0"/>
+          </a:p>
+        </p:txBody>
+      </p:sp>
+      <p:sp>
+        <p:nvSpPr>
+          <p:cNvPr id="4" name="Text 2"/>
+          <p:cNvSpPr/>
+          <p:nvPr/>
+        </p:nvSpPr>
+        <p:spPr>
+          <a:xfrm>
+            <a:off x="658368" y="1508760"/>
+            <a:ext cx="10424160" cy="402336"/>
+          </a:xfrm>
+          <a:prstGeom prst="rect">
+            <a:avLst/>
+          </a:prstGeom>
+          <a:noFill/>
+          <a:ln/>
+        </p:spPr>
+        <p:txBody>
+          <a:bodyPr wrap="square" lIns="0" tIns="0" rIns="0" bIns="0" rtlCol="0" anchor="ctr">
+            <a:normAutofit/>
+          </a:bodyPr>
+          <a:lstStyle/>
+          <a:p>
+            <a:pPr indent="0" marL="0">
+              <a:buNone/>
+            </a:pPr>
+            <a:r>
+              <a:rPr lang="en-US" sz="1700" dirty="0">
+                <a:solidFill>
+                  <a:srgbClr val="4B5E71"/>
+                </a:solidFill>
+              </a:rPr>
+              <a:t>Professor e turma executam juntos; ninguém precisa descobrir uma rota.</a:t>
+            </a:r>
+            <a:endParaRPr lang="en-US" sz="1700" dirty="0"/>
+          </a:p>
+        </p:txBody>
+      </p:sp>
+      <p:sp>
+        <p:nvSpPr>
+          <p:cNvPr id="5" name="Shape 3"/>
+          <p:cNvSpPr/>
+          <p:nvPr/>
+        </p:nvSpPr>
+        <p:spPr>
+          <a:xfrm>
+            <a:off x="594360" y="1920240"/>
+            <a:ext cx="6903720" cy="3611880"/>
+          </a:xfrm>
+          <a:prstGeom prst="roundRect">
+            <a:avLst/>
+          </a:prstGeom>
+          <a:solidFill>
+            <a:srgbClr val="0D2235"/>
+          </a:solidFill>
+          <a:ln w="12700">
+            <a:solidFill>
+              <a:srgbClr val="31556D"/>
+            </a:solidFill>
+            <a:prstDash val="solid"/>
+          </a:ln>
+        </p:spPr>
+      </p:sp>
+      <p:sp>
+        <p:nvSpPr>
+          <p:cNvPr id="6" name="Text 4"/>
+          <p:cNvSpPr/>
+          <p:nvPr/>
+        </p:nvSpPr>
+        <p:spPr>
+          <a:xfrm>
+            <a:off x="932688" y="2240280"/>
+            <a:ext cx="6263640" cy="2697480"/>
+          </a:xfrm>
+          <a:prstGeom prst="rect">
+            <a:avLst/>
+          </a:prstGeom>
+          <a:noFill/>
+          <a:ln/>
+        </p:spPr>
+        <p:txBody>
+          <a:bodyPr wrap="square" lIns="0" tIns="0" rIns="0" bIns="0" rtlCol="0" anchor="ctr">
+            <a:normAutofit/>
+          </a:bodyPr>
+          <a:lstStyle/>
+          <a:p>
+            <a:pPr indent="0" marL="0">
+              <a:buNone/>
+            </a:pPr>
+            <a:r>
+              <a:rPr lang="en-US" sz="1550" dirty="0">
+                <a:solidFill>
+                  <a:srgbClr val="D8F3EA"/>
+                </a:solidFill>
+                <a:latin typeface="Courier New" pitchFamily="34" charset="0"/>
+                <a:ea typeface="Courier New" pitchFamily="34" charset="-122"/>
+                <a:cs typeface="Courier New" pitchFamily="34" charset="-120"/>
+              </a:rPr>
+              <a:t>ABRA NO NAVEGADOR</a:t>
+            </a:r>
+            <a:endParaRPr lang="en-US" sz="1550" dirty="0"/>
+          </a:p>
+          <a:p>
+            <a:pPr indent="0" marL="0">
+              <a:buNone/>
+            </a:pPr>
+            <a:r>
+              <a:rPr lang="en-US" sz="1550" dirty="0">
+                <a:solidFill>
+                  <a:srgbClr val="D8F3EA"/>
+                </a:solidFill>
+                <a:latin typeface="Courier New" pitchFamily="34" charset="0"/>
+                <a:ea typeface="Courier New" pitchFamily="34" charset="-122"/>
+                <a:cs typeface="Courier New" pitchFamily="34" charset="-120"/>
+              </a:rPr>
+              <a:t>http://127.0.0.1:3000/ftp/acquisitions.md</a:t>
+            </a:r>
+            <a:endParaRPr lang="en-US" sz="1550" dirty="0"/>
+          </a:p>
+          <a:p>
+            <a:pPr indent="0" marL="0">
+              <a:buNone/>
+            </a:pPr>
+            <a:endParaRPr lang="en-US" sz="1550" dirty="0"/>
+          </a:p>
+          <a:p>
+            <a:pPr indent="0" marL="0">
+              <a:buNone/>
+            </a:pPr>
+            <a:r>
+              <a:rPr lang="en-US" sz="1550" dirty="0">
+                <a:solidFill>
+                  <a:srgbClr val="D8F3EA"/>
+                </a:solidFill>
+                <a:latin typeface="Courier New" pitchFamily="34" charset="0"/>
+                <a:ea typeface="Courier New" pitchFamily="34" charset="-122"/>
+                <a:cs typeface="Courier New" pitchFamily="34" charset="-120"/>
+              </a:rPr>
+              <a:t>REQUISIÇÃO OBSERVADA</a:t>
+            </a:r>
+            <a:endParaRPr lang="en-US" sz="1550" dirty="0"/>
+          </a:p>
+          <a:p>
+            <a:pPr indent="0" marL="0">
+              <a:buNone/>
+            </a:pPr>
+            <a:r>
+              <a:rPr lang="en-US" sz="1550" dirty="0">
+                <a:solidFill>
+                  <a:srgbClr val="D8F3EA"/>
+                </a:solidFill>
+                <a:latin typeface="Courier New" pitchFamily="34" charset="0"/>
+                <a:ea typeface="Courier New" pitchFamily="34" charset="-122"/>
+                <a:cs typeface="Courier New" pitchFamily="34" charset="-120"/>
+              </a:rPr>
+              <a:t>GET /ftp/acquisitions.md HTTP/1.1</a:t>
+            </a:r>
+            <a:endParaRPr lang="en-US" sz="1550" dirty="0"/>
+          </a:p>
+          <a:p>
+            <a:pPr indent="0" marL="0">
+              <a:buNone/>
+            </a:pPr>
+            <a:r>
+              <a:rPr lang="en-US" sz="1550" dirty="0">
+                <a:solidFill>
+                  <a:srgbClr val="D8F3EA"/>
+                </a:solidFill>
+                <a:latin typeface="Courier New" pitchFamily="34" charset="0"/>
+                <a:ea typeface="Courier New" pitchFamily="34" charset="-122"/>
+                <a:cs typeface="Courier New" pitchFamily="34" charset="-120"/>
+              </a:rPr>
+              <a:t>Host: 127.0.0.1:3000</a:t>
+            </a:r>
+            <a:endParaRPr lang="en-US" sz="1550" dirty="0"/>
+          </a:p>
+          <a:p>
+            <a:pPr indent="0" marL="0">
+              <a:buNone/>
+            </a:pPr>
+            <a:endParaRPr lang="en-US" sz="1550" dirty="0"/>
+          </a:p>
+          <a:p>
+            <a:pPr indent="0" marL="0">
+              <a:buNone/>
+            </a:pPr>
+            <a:r>
+              <a:rPr lang="en-US" sz="1550" dirty="0">
+                <a:solidFill>
+                  <a:srgbClr val="D8F3EA"/>
+                </a:solidFill>
+                <a:latin typeface="Courier New" pitchFamily="34" charset="0"/>
+                <a:ea typeface="Courier New" pitchFamily="34" charset="-122"/>
+                <a:cs typeface="Courier New" pitchFamily="34" charset="-120"/>
+              </a:rPr>
+              <a:t>RESPOSTA ESPERADA</a:t>
+            </a:r>
+            <a:endParaRPr lang="en-US" sz="1550" dirty="0"/>
+          </a:p>
+          <a:p>
+            <a:pPr indent="0" marL="0">
+              <a:buNone/>
+            </a:pPr>
+            <a:r>
+              <a:rPr lang="en-US" sz="1550" dirty="0">
+                <a:solidFill>
+                  <a:srgbClr val="D8F3EA"/>
+                </a:solidFill>
+                <a:latin typeface="Courier New" pitchFamily="34" charset="0"/>
+                <a:ea typeface="Courier New" pitchFamily="34" charset="-122"/>
+                <a:cs typeface="Courier New" pitchFamily="34" charset="-120"/>
+              </a:rPr>
+              <a:t>HTTP/1.1 200 OK • text/markdown</a:t>
+            </a:r>
+            <a:endParaRPr lang="en-US" sz="1550" dirty="0"/>
+          </a:p>
+        </p:txBody>
+      </p:sp>
+      <p:sp>
+        <p:nvSpPr>
+          <p:cNvPr id="7" name="Text 5"/>
+          <p:cNvSpPr/>
+          <p:nvPr/>
+        </p:nvSpPr>
+        <p:spPr>
+          <a:xfrm>
+            <a:off x="8001000" y="2103120"/>
+            <a:ext cx="2971800" cy="274320"/>
+          </a:xfrm>
+          <a:prstGeom prst="rect">
+            <a:avLst/>
+          </a:prstGeom>
+          <a:noFill/>
+          <a:ln/>
+        </p:spPr>
+        <p:txBody>
+          <a:bodyPr wrap="square" lIns="0" tIns="0" rIns="0" bIns="0" rtlCol="0" anchor="ctr"/>
+          <a:lstStyle/>
+          <a:p>
+            <a:pPr indent="0" marL="0">
+              <a:buNone/>
+            </a:pPr>
+            <a:r>
+              <a:rPr lang="en-US" sz="1300" b="1" dirty="0">
+                <a:solidFill>
+                  <a:srgbClr val="0B65C2"/>
+                </a:solidFill>
+              </a:rPr>
+              <a:t>ANTES DE EXPLICAR</a:t>
+            </a:r>
+            <a:endParaRPr lang="en-US" sz="1300" dirty="0"/>
+          </a:p>
+        </p:txBody>
+      </p:sp>
+      <p:sp>
+        <p:nvSpPr>
+          <p:cNvPr id="8" name="Text 6"/>
+          <p:cNvSpPr/>
+          <p:nvPr/>
+        </p:nvSpPr>
+        <p:spPr>
+          <a:xfrm>
+            <a:off x="8001000" y="2587752"/>
+            <a:ext cx="3246120" cy="1325880"/>
+          </a:xfrm>
+          <a:prstGeom prst="rect">
+            <a:avLst/>
+          </a:prstGeom>
+          <a:noFill/>
+          <a:ln/>
+        </p:spPr>
+        <p:txBody>
+          <a:bodyPr wrap="square" lIns="0" tIns="0" rIns="0" bIns="0" rtlCol="0" anchor="ctr"/>
+          <a:lstStyle/>
+          <a:p>
+            <a:pPr indent="0" marL="0">
+              <a:buNone/>
+            </a:pPr>
+            <a:r>
+              <a:rPr lang="en-US" sz="1850" b="1" dirty="0">
+                <a:solidFill>
+                  <a:srgbClr val="12304A"/>
+                </a:solidFill>
+              </a:rPr>
+              <a:t>1. O que foi observado?</a:t>
+            </a:r>
+            <a:endParaRPr lang="en-US" sz="1850" dirty="0"/>
+          </a:p>
+          <a:p>
+            <a:pPr indent="0" marL="0">
+              <a:buNone/>
+            </a:pPr>
+            <a:r>
+              <a:rPr lang="en-US" sz="1850" b="1" dirty="0">
+                <a:solidFill>
+                  <a:srgbClr val="12304A"/>
+                </a:solidFill>
+              </a:rPr>
+              <a:t>2. Qual informação tem valor?</a:t>
+            </a:r>
+            <a:endParaRPr lang="en-US" sz="1850" dirty="0"/>
+          </a:p>
+          <a:p>
+            <a:pPr indent="0" marL="0">
+              <a:buNone/>
+            </a:pPr>
+            <a:r>
+              <a:rPr lang="en-US" sz="1850" b="1" dirty="0">
+                <a:solidFill>
+                  <a:srgbClr val="12304A"/>
+                </a:solidFill>
+              </a:rPr>
+              <a:t>3. O que ainda é hipótese?</a:t>
+            </a:r>
+            <a:endParaRPr lang="en-US" sz="1850" dirty="0"/>
+          </a:p>
+        </p:txBody>
+      </p:sp>
+      <p:sp>
+        <p:nvSpPr>
+          <p:cNvPr id="9" name="Shape 7"/>
+          <p:cNvSpPr/>
+          <p:nvPr/>
+        </p:nvSpPr>
+        <p:spPr>
+          <a:xfrm>
+            <a:off x="7973568" y="4251960"/>
+            <a:ext cx="3383280" cy="960120"/>
+          </a:xfrm>
+          <a:prstGeom prst="roundRect">
+            <a:avLst/>
+          </a:prstGeom>
+          <a:solidFill>
+            <a:srgbClr val="E7F0F8"/>
+          </a:solidFill>
+          <a:ln w="12700">
+            <a:solidFill>
+              <a:srgbClr val="C9D4DF"/>
+            </a:solidFill>
+            <a:prstDash val="solid"/>
+          </a:ln>
+        </p:spPr>
+      </p:sp>
+      <p:sp>
+        <p:nvSpPr>
+          <p:cNvPr id="10" name="Text 8"/>
+          <p:cNvSpPr/>
+          <p:nvPr/>
+        </p:nvSpPr>
+        <p:spPr>
+          <a:xfrm>
+            <a:off x="8229600" y="4480560"/>
+            <a:ext cx="2880360" cy="475488"/>
+          </a:xfrm>
+          <a:prstGeom prst="rect">
+            <a:avLst/>
+          </a:prstGeom>
+          <a:noFill/>
+          <a:ln/>
+        </p:spPr>
+        <p:txBody>
+          <a:bodyPr wrap="square" lIns="0" tIns="0" rIns="0" bIns="0" rtlCol="0" anchor="ctr"/>
+          <a:lstStyle/>
+          <a:p>
+            <a:pPr algn="ctr" indent="0" marL="0">
+              <a:buNone/>
+            </a:pPr>
+            <a:r>
+              <a:rPr lang="en-US" sz="1450" b="1" dirty="0">
+                <a:solidFill>
+                  <a:srgbClr val="12304A"/>
+                </a:solidFill>
+              </a:rPr>
+              <a:t>200 prova entrega naquela requisição — não prova causa, intenção ou alcance.</a:t>
+            </a:r>
+            <a:endParaRPr lang="en-US" sz="1450" dirty="0"/>
+          </a:p>
+        </p:txBody>
+      </p:sp>
+      <p:sp>
+        <p:nvSpPr>
+          <p:cNvPr id="11" name="Shape 9"/>
+          <p:cNvSpPr/>
+          <p:nvPr/>
+        </p:nvSpPr>
+        <p:spPr>
+          <a:xfrm>
+            <a:off x="548640" y="6473952"/>
+            <a:ext cx="11018520" cy="0"/>
+          </a:xfrm>
+          <a:prstGeom prst="line">
+            <a:avLst/>
+          </a:prstGeom>
+          <a:noFill/>
+          <a:ln w="12700">
+            <a:solidFill>
+              <a:srgbClr val="C9D4DF"/>
+            </a:solidFill>
+            <a:prstDash val="solid"/>
+          </a:ln>
+        </p:spPr>
+      </p:sp>
+      <p:sp>
+        <p:nvSpPr>
+          <p:cNvPr id="12" name="Text 10"/>
+          <p:cNvSpPr/>
+          <p:nvPr/>
+        </p:nvSpPr>
+        <p:spPr>
+          <a:xfrm>
+            <a:off x="594360" y="6528816"/>
+            <a:ext cx="3657600" cy="182880"/>
+          </a:xfrm>
+          <a:prstGeom prst="rect">
+            <a:avLst/>
+          </a:prstGeom>
+          <a:noFill/>
+          <a:ln/>
+        </p:spPr>
+        <p:txBody>
+          <a:bodyPr wrap="square" lIns="0" tIns="0" rIns="0" bIns="0" rtlCol="0" anchor="ctr"/>
+          <a:lstStyle/>
+          <a:p>
+            <a:pPr indent="0" marL="0">
+              <a:buNone/>
+            </a:pPr>
+            <a:r>
+              <a:rPr lang="en-US" sz="1000" dirty="0">
+                <a:solidFill>
+                  <a:srgbClr val="4B5E71"/>
+                </a:solidFill>
+              </a:rPr>
+              <a:t>A02  •  Segurança Digital</a:t>
+            </a:r>
+            <a:endParaRPr lang="en-US" sz="1000" dirty="0"/>
+          </a:p>
+        </p:txBody>
+      </p:sp>
+      <p:sp>
+        <p:nvSpPr>
+          <p:cNvPr id="13" name="Text 11"/>
+          <p:cNvSpPr/>
+          <p:nvPr/>
+        </p:nvSpPr>
+        <p:spPr>
+          <a:xfrm>
+            <a:off x="5943600" y="6528816"/>
+            <a:ext cx="5623560" cy="182880"/>
+          </a:xfrm>
+          <a:prstGeom prst="rect">
+            <a:avLst/>
+          </a:prstGeom>
+          <a:noFill/>
+          <a:ln/>
+        </p:spPr>
+        <p:txBody>
+          <a:bodyPr wrap="square" lIns="0" tIns="0" rIns="0" bIns="0" rtlCol="0" anchor="ctr"/>
+          <a:lstStyle/>
+          <a:p>
+            <a:pPr algn="r" indent="0" marL="0">
+              <a:buNone/>
+            </a:pPr>
+            <a:r>
+              <a:rPr lang="en-US" sz="900" dirty="0">
+                <a:solidFill>
+                  <a:srgbClr val="4B5E71"/>
+                </a:solidFill>
+              </a:rPr>
+              <a:t>Rota validada na imagem oficial do OWASP Juice Shop</a:t>
+            </a:r>
+            <a:endParaRPr lang="en-US" sz="900" dirty="0"/>
+          </a:p>
+        </p:txBody>
+      </p:sp>
+    </p:spTree>
+  </p:cSld>
+  <p:clrMapOvr>
+    <a:masterClrMapping/>
+  </p:clrMapOvr>
+</p:sld>
+</file>
+
+<file path=ppt/slides/slide5.xml><?xml version="1.0" encoding="utf-8"?>
+<p:sld xmlns:a="http://schemas.openxmlformats.org/drawingml/2006/main" xmlns:r="http://schemas.openxmlformats.org/officeDocument/2006/relationships" xmlns:p="http://schemas.openxmlformats.org/presentationml/2006/main">
+  <p:cSld name="Slide 5">
     <p:bg>
       <p:bgPr>
         <a:solidFill>
@@ -2944,7 +5200,7 @@
                   <a:srgbClr val="087F7A"/>
                 </a:solidFill>
               </a:rPr>
-              <a:t>ATIVOS</a:t>
+              <a:t>ATIVO</a:t>
             </a:r>
             <a:endParaRPr lang="en-US" sz="1300" dirty="0"/>
           </a:p>
@@ -2982,7 +5238,7 @@
                   <a:srgbClr val="12304A"/>
                 </a:solidFill>
               </a:rPr>
-              <a:t>Inventário começa pela consequência</a:t>
+              <a:t>O que tem valor nesta evidência?</a:t>
             </a:r>
             <a:endParaRPr lang="en-US" sz="3000" dirty="0"/>
           </a:p>
@@ -3020,7 +5276,7 @@
                   <a:srgbClr val="4B5E71"/>
                 </a:solidFill>
               </a:rPr>
-              <a:t>Um item sem função e proprietário conhecidos não pode ser priorizado com confiança.</a:t>
+              <a:t>Comece pelo que perderia valor — não pela técnica nem pelo equipamento.</a:t>
             </a:r>
             <a:endParaRPr lang="en-US" sz="1700" dirty="0"/>
           </a:p>
@@ -3028,7 +5284,7 @@
       </p:sp>
       <p:graphicFrame>
         <p:nvGraphicFramePr>
-          <p:cNvPr id="5" name="Table 0"/>
+          <p:cNvPr id="6" name="Table 0"/>
           <p:cNvGraphicFramePr>
             <a:graphicFrameLocks noGrp="1"/>
           </p:cNvGraphicFramePr>
@@ -3041,19 +5297,19 @@
           </p:nvPr>
         </p:nvGraphicFramePr>
         <p:xfrm>
-          <a:off x="685800" y="2011680"/>
-          <a:ext cx="10835640" cy="3154680"/>
+          <a:off x="594360" y="1901952"/>
+          <a:ext cx="11018520" cy="3310128"/>
         </p:xfrm>
         <a:graphic>
           <a:graphicData uri="http://schemas.openxmlformats.org/drawingml/2006/table">
             <a:tbl>
               <a:tblPr/>
               <a:tblGrid>
-                <a:gridCol w="3611880"/>
-                <a:gridCol w="3611880"/>
-                <a:gridCol w="3611880"/>
+                <a:gridCol w="3672840"/>
+                <a:gridCol w="3672840"/>
+                <a:gridCol w="3672840"/>
               </a:tblGrid>
-              <a:tr h="612648">
+              <a:tr h="640080">
                 <a:tc>
                   <a:txBody>
                     <a:bodyPr/>
@@ -3063,17 +5319,17 @@
                         <a:buNone/>
                       </a:pPr>
                       <a:r>
-                        <a:rPr lang="en-US" sz="1600" dirty="0">
+                        <a:rPr lang="en-US" sz="1500" dirty="0">
                           <a:solidFill>
                             <a:srgbClr val="172B4D"/>
                           </a:solidFill>
                         </a:rPr>
-                        <a:t>ATIVO</a:t>
+                        <a:t>CANDIDATO</a:t>
                       </a:r>
-                      <a:endParaRPr lang="en-US" sz="1600" dirty="0"/>
+                      <a:endParaRPr lang="en-US" sz="1500" dirty="0"/>
                     </a:p>
                   </a:txBody>
-                  <a:tcPr marL="109728" marR="109728" marT="109728" marB="109728" anchor="mid">
+                  <a:tcPr marL="91440" marR="91440" marT="91440" marB="91440" anchor="mid">
                     <a:lnL w="12700" cap="flat" cmpd="sng" algn="ctr">
                       <a:solidFill>
                         <a:srgbClr val="C9D4DF"/>
@@ -3124,17 +5380,17 @@
                         <a:buNone/>
                       </a:pPr>
                       <a:r>
-                        <a:rPr lang="en-US" sz="1600" dirty="0">
+                        <a:rPr lang="en-US" sz="1500" dirty="0">
                           <a:solidFill>
                             <a:srgbClr val="172B4D"/>
                           </a:solidFill>
                         </a:rPr>
-                        <a:t>FUNÇÃO</a:t>
+                        <a:t>POR QUE PODE SER ATIVO?</a:t>
                       </a:r>
-                      <a:endParaRPr lang="en-US" sz="1600" dirty="0"/>
+                      <a:endParaRPr lang="en-US" sz="1500" dirty="0"/>
                     </a:p>
                   </a:txBody>
-                  <a:tcPr marL="109728" marR="109728" marT="109728" marB="109728" anchor="mid">
+                  <a:tcPr marL="91440" marR="91440" marT="91440" marB="91440" anchor="mid">
                     <a:lnL w="12700" cap="flat" cmpd="sng" algn="ctr">
                       <a:solidFill>
                         <a:srgbClr val="C9D4DF"/>
@@ -3185,17 +5441,17 @@
                         <a:buNone/>
                       </a:pPr>
                       <a:r>
-                        <a:rPr lang="en-US" sz="1600" dirty="0">
+                        <a:rPr lang="en-US" sz="1500" dirty="0">
                           <a:solidFill>
                             <a:srgbClr val="172B4D"/>
                           </a:solidFill>
                         </a:rPr>
-                        <a:t>CONSEQUÊNCIA</a:t>
+                        <a:t>EVIDÊNCIA NO CASO</a:t>
                       </a:r>
-                      <a:endParaRPr lang="en-US" sz="1600" dirty="0"/>
+                      <a:endParaRPr lang="en-US" sz="1500" dirty="0"/>
                     </a:p>
                   </a:txBody>
-                  <a:tcPr marL="109728" marR="109728" marT="109728" marB="109728" anchor="mid">
+                  <a:tcPr marL="91440" marR="91440" marT="91440" marB="91440" anchor="mid">
                     <a:lnL w="12700" cap="flat" cmpd="sng" algn="ctr">
                       <a:solidFill>
                         <a:srgbClr val="C9D4DF"/>
@@ -3238,7 +5494,7 @@
                   </a:tcPr>
                 </a:tc>
               </a:tr>
-              <a:tr h="612648">
+              <a:tr h="640080">
                 <a:tc>
                   <a:txBody>
                     <a:bodyPr/>
@@ -3248,17 +5504,17 @@
                         <a:buNone/>
                       </a:pPr>
                       <a:r>
-                        <a:rPr lang="en-US" sz="1600" dirty="0">
+                        <a:rPr lang="en-US" sz="1500" dirty="0">
                           <a:solidFill>
                             <a:srgbClr val="172B4D"/>
                           </a:solidFill>
                         </a:rPr>
-                        <a:t>Catálogo/API</a:t>
+                        <a:t>informação de aquisição</a:t>
                       </a:r>
-                      <a:endParaRPr lang="en-US" sz="1600" dirty="0"/>
+                      <a:endParaRPr lang="en-US" sz="1500" dirty="0"/>
                     </a:p>
                   </a:txBody>
-                  <a:tcPr marL="109728" marR="109728" marT="109728" marB="109728" anchor="mid">
+                  <a:tcPr marL="91440" marR="91440" marT="91440" marB="91440" anchor="mid">
                     <a:lnL w="12700" cap="flat" cmpd="sng" algn="ctr">
                       <a:solidFill>
                         <a:srgbClr val="C9D4DF"/>
@@ -3309,17 +5565,17 @@
                         <a:buNone/>
                       </a:pPr>
                       <a:r>
-                        <a:rPr lang="en-US" sz="1600" dirty="0">
+                        <a:rPr lang="en-US" sz="1500" dirty="0">
                           <a:solidFill>
                             <a:srgbClr val="172B4D"/>
                           </a:solidFill>
                         </a:rPr>
-                        <a:t>vender e consultar</a:t>
+                        <a:t>apoia decisões e deveria permanecer restrita</a:t>
                       </a:r>
-                      <a:endParaRPr lang="en-US" sz="1600" dirty="0"/>
+                      <a:endParaRPr lang="en-US" sz="1500" dirty="0"/>
                     </a:p>
                   </a:txBody>
-                  <a:tcPr marL="109728" marR="109728" marT="109728" marB="109728" anchor="mid">
+                  <a:tcPr marL="91440" marR="91440" marT="91440" marB="91440" anchor="mid">
                     <a:lnL w="12700" cap="flat" cmpd="sng" algn="ctr">
                       <a:solidFill>
                         <a:srgbClr val="C9D4DF"/>
@@ -3370,17 +5626,17 @@
                         <a:buNone/>
                       </a:pPr>
                       <a:r>
-                        <a:rPr lang="en-US" sz="1600" dirty="0">
+                        <a:rPr lang="en-US" sz="1500" dirty="0">
                           <a:solidFill>
                             <a:srgbClr val="172B4D"/>
                           </a:solidFill>
                         </a:rPr>
-                        <a:t>fraude ou parada</a:t>
+                        <a:t>conteúdo declara confidencialidade</a:t>
                       </a:r>
-                      <a:endParaRPr lang="en-US" sz="1600" dirty="0"/>
+                      <a:endParaRPr lang="en-US" sz="1500" dirty="0"/>
                     </a:p>
                   </a:txBody>
-                  <a:tcPr marL="109728" marR="109728" marT="109728" marB="109728" anchor="mid">
+                  <a:tcPr marL="91440" marR="91440" marT="91440" marB="91440" anchor="mid">
                     <a:lnL w="12700" cap="flat" cmpd="sng" algn="ctr">
                       <a:solidFill>
                         <a:srgbClr val="C9D4DF"/>
@@ -3423,7 +5679,7 @@
                   </a:tcPr>
                 </a:tc>
               </a:tr>
-              <a:tr h="612648">
+              <a:tr h="640080">
                 <a:tc>
                   <a:txBody>
                     <a:bodyPr/>
@@ -3433,17 +5689,17 @@
                         <a:buNone/>
                       </a:pPr>
                       <a:r>
-                        <a:rPr lang="en-US" sz="1600" dirty="0">
+                        <a:rPr lang="en-US" sz="1500" dirty="0">
                           <a:solidFill>
                             <a:srgbClr val="172B4D"/>
                           </a:solidFill>
                         </a:rPr>
-                        <a:t>Dados fictícios</a:t>
+                        <a:t>arquivo acquisitions.md</a:t>
                       </a:r>
-                      <a:endParaRPr lang="en-US" sz="1600" dirty="0"/>
+                      <a:endParaRPr lang="en-US" sz="1500" dirty="0"/>
                     </a:p>
                   </a:txBody>
-                  <a:tcPr marL="109728" marR="109728" marT="109728" marB="109728" anchor="mid">
+                  <a:tcPr marL="91440" marR="91440" marT="91440" marB="91440" anchor="mid">
                     <a:lnL w="12700" cap="flat" cmpd="sng" algn="ctr">
                       <a:solidFill>
                         <a:srgbClr val="C9D4DF"/>
@@ -3494,17 +5750,17 @@
                         <a:buNone/>
                       </a:pPr>
                       <a:r>
-                        <a:rPr lang="en-US" sz="1600" dirty="0">
+                        <a:rPr lang="en-US" sz="1500" dirty="0">
                           <a:solidFill>
                             <a:srgbClr val="172B4D"/>
                           </a:solidFill>
                         </a:rPr>
-                        <a:t>sustentar pedidos</a:t>
+                        <a:t>armazena e transporta a informação</a:t>
                       </a:r>
-                      <a:endParaRPr lang="en-US" sz="1600" dirty="0"/>
+                      <a:endParaRPr lang="en-US" sz="1500" dirty="0"/>
                     </a:p>
                   </a:txBody>
-                  <a:tcPr marL="109728" marR="109728" marT="109728" marB="109728" anchor="mid">
+                  <a:tcPr marL="91440" marR="91440" marT="91440" marB="91440" anchor="mid">
                     <a:lnL w="12700" cap="flat" cmpd="sng" algn="ctr">
                       <a:solidFill>
                         <a:srgbClr val="C9D4DF"/>
@@ -3555,17 +5811,17 @@
                         <a:buNone/>
                       </a:pPr>
                       <a:r>
-                        <a:rPr lang="en-US" sz="1600" dirty="0">
+                        <a:rPr lang="en-US" sz="1500" dirty="0">
                           <a:solidFill>
                             <a:srgbClr val="172B4D"/>
                           </a:solidFill>
                         </a:rPr>
-                        <a:t>exposição e confiança</a:t>
+                        <a:t>nome, caminho e tipo markdown</a:t>
                       </a:r>
-                      <a:endParaRPr lang="en-US" sz="1600" dirty="0"/>
+                      <a:endParaRPr lang="en-US" sz="1500" dirty="0"/>
                     </a:p>
                   </a:txBody>
-                  <a:tcPr marL="109728" marR="109728" marT="109728" marB="109728" anchor="mid">
+                  <a:tcPr marL="91440" marR="91440" marT="91440" marB="91440" anchor="mid">
                     <a:lnL w="12700" cap="flat" cmpd="sng" algn="ctr">
                       <a:solidFill>
                         <a:srgbClr val="C9D4DF"/>
@@ -3608,7 +5864,7 @@
                   </a:tcPr>
                 </a:tc>
               </a:tr>
-              <a:tr h="612648">
+              <a:tr h="640080">
                 <a:tc>
                   <a:txBody>
                     <a:bodyPr/>
@@ -3618,17 +5874,17 @@
                         <a:buNone/>
                       </a:pPr>
                       <a:r>
-                        <a:rPr lang="en-US" sz="1600" dirty="0">
+                        <a:rPr lang="en-US" sz="1500" dirty="0">
                           <a:solidFill>
                             <a:srgbClr val="172B4D"/>
                           </a:solidFill>
                         </a:rPr>
-                        <a:t>Container</a:t>
+                        <a:t>rota/serviço web</a:t>
                       </a:r>
-                      <a:endParaRPr lang="en-US" sz="1600" dirty="0"/>
+                      <a:endParaRPr lang="en-US" sz="1500" dirty="0"/>
                     </a:p>
                   </a:txBody>
-                  <a:tcPr marL="109728" marR="109728" marT="109728" marB="109728" anchor="mid">
+                  <a:tcPr marL="91440" marR="91440" marT="91440" marB="91440" anchor="mid">
                     <a:lnL w="12700" cap="flat" cmpd="sng" algn="ctr">
                       <a:solidFill>
                         <a:srgbClr val="C9D4DF"/>
@@ -3679,17 +5935,17 @@
                         <a:buNone/>
                       </a:pPr>
                       <a:r>
-                        <a:rPr lang="en-US" sz="1600" dirty="0">
+                        <a:rPr lang="en-US" sz="1500" dirty="0">
                           <a:solidFill>
                             <a:srgbClr val="172B4D"/>
                           </a:solidFill>
                         </a:rPr>
-                        <a:t>executar a loja</a:t>
+                        <a:t>torna o recurso acessível</a:t>
                       </a:r>
-                      <a:endParaRPr lang="en-US" sz="1600" dirty="0"/>
+                      <a:endParaRPr lang="en-US" sz="1500" dirty="0"/>
                     </a:p>
                   </a:txBody>
-                  <a:tcPr marL="109728" marR="109728" marT="109728" marB="109728" anchor="mid">
+                  <a:tcPr marL="91440" marR="91440" marT="91440" marB="91440" anchor="mid">
                     <a:lnL w="12700" cap="flat" cmpd="sng" algn="ctr">
                       <a:solidFill>
                         <a:srgbClr val="C9D4DF"/>
@@ -3740,17 +5996,17 @@
                         <a:buNone/>
                       </a:pPr>
                       <a:r>
-                        <a:rPr lang="en-US" sz="1600" dirty="0">
+                        <a:rPr lang="en-US" sz="1500" dirty="0">
                           <a:solidFill>
                             <a:srgbClr val="172B4D"/>
                           </a:solidFill>
                         </a:rPr>
-                        <a:t>ampliação ou indisponibilidade</a:t>
+                        <a:t>GET recebeu resposta 200</a:t>
                       </a:r>
-                      <a:endParaRPr lang="en-US" sz="1600" dirty="0"/>
+                      <a:endParaRPr lang="en-US" sz="1500" dirty="0"/>
                     </a:p>
                   </a:txBody>
-                  <a:tcPr marL="109728" marR="109728" marT="109728" marB="109728" anchor="mid">
+                  <a:tcPr marL="91440" marR="91440" marT="91440" marB="91440" anchor="mid">
                     <a:lnL w="12700" cap="flat" cmpd="sng" algn="ctr">
                       <a:solidFill>
                         <a:srgbClr val="C9D4DF"/>
@@ -3793,7 +6049,7 @@
                   </a:tcPr>
                 </a:tc>
               </a:tr>
-              <a:tr h="612648">
+              <a:tr h="640080">
                 <a:tc>
                   <a:txBody>
                     <a:bodyPr/>
@@ -3803,17 +6059,17 @@
                         <a:buNone/>
                       </a:pPr>
                       <a:r>
-                        <a:rPr lang="en-US" sz="1600" dirty="0">
+                        <a:rPr lang="en-US" sz="1500" dirty="0">
                           <a:solidFill>
                             <a:srgbClr val="172B4D"/>
                           </a:solidFill>
                         </a:rPr>
-                        <a:t>Controlador OT</a:t>
+                        <a:t>container Juice Shop</a:t>
                       </a:r>
-                      <a:endParaRPr lang="en-US" sz="1600" dirty="0"/>
+                      <a:endParaRPr lang="en-US" sz="1500" dirty="0"/>
                     </a:p>
                   </a:txBody>
-                  <a:tcPr marL="109728" marR="109728" marT="109728" marB="109728" anchor="mid">
+                  <a:tcPr marL="91440" marR="91440" marT="91440" marB="91440" anchor="mid">
                     <a:lnL w="12700" cap="flat" cmpd="sng" algn="ctr">
                       <a:solidFill>
                         <a:srgbClr val="C9D4DF"/>
@@ -3864,17 +6120,17 @@
                         <a:buNone/>
                       </a:pPr>
                       <a:r>
-                        <a:rPr lang="en-US" sz="1600" dirty="0">
+                        <a:rPr lang="en-US" sz="1500" dirty="0">
                           <a:solidFill>
                             <a:srgbClr val="172B4D"/>
                           </a:solidFill>
                         </a:rPr>
-                        <a:t>comandar processo</a:t>
+                        <a:t>executa a aplicação do laboratório</a:t>
                       </a:r>
-                      <a:endParaRPr lang="en-US" sz="1600" dirty="0"/>
+                      <a:endParaRPr lang="en-US" sz="1500" dirty="0"/>
                     </a:p>
                   </a:txBody>
-                  <a:tcPr marL="109728" marR="109728" marT="109728" marB="109728" anchor="mid">
+                  <a:tcPr marL="91440" marR="91440" marT="91440" marB="91440" anchor="mid">
                     <a:lnL w="12700" cap="flat" cmpd="sng" algn="ctr">
                       <a:solidFill>
                         <a:srgbClr val="C9D4DF"/>
@@ -3925,17 +6181,17 @@
                         <a:buNone/>
                       </a:pPr>
                       <a:r>
-                        <a:rPr lang="en-US" sz="1600" dirty="0">
+                        <a:rPr lang="en-US" sz="1500" dirty="0">
                           <a:solidFill>
                             <a:srgbClr val="172B4D"/>
                           </a:solidFill>
                         </a:rPr>
-                        <a:t>produção e safety</a:t>
+                        <a:t>docker ps + endereço local</a:t>
                       </a:r>
-                      <a:endParaRPr lang="en-US" sz="1600" dirty="0"/>
+                      <a:endParaRPr lang="en-US" sz="1500" dirty="0"/>
                     </a:p>
                   </a:txBody>
-                  <a:tcPr marL="109728" marR="109728" marT="109728" marB="109728" anchor="mid">
+                  <a:tcPr marL="91440" marR="91440" marT="91440" marB="91440" anchor="mid">
                     <a:lnL w="12700" cap="flat" cmpd="sng" algn="ctr">
                       <a:solidFill>
                         <a:srgbClr val="C9D4DF"/>
@@ -3984,55 +6240,21 @@
       </p:graphicFrame>
       <p:sp>
         <p:nvSpPr>
-          <p:cNvPr id="6" name="Text 3"/>
-          <p:cNvSpPr/>
-          <p:nvPr/>
-        </p:nvSpPr>
-        <p:spPr>
-          <a:xfrm>
-            <a:off x="914400" y="5440680"/>
-            <a:ext cx="10241280" cy="411480"/>
-          </a:xfrm>
-          <a:prstGeom prst="rect">
-            <a:avLst/>
-          </a:prstGeom>
-          <a:noFill/>
-          <a:ln/>
-        </p:spPr>
-        <p:txBody>
-          <a:bodyPr wrap="square" lIns="0" tIns="0" rIns="0" bIns="0" rtlCol="0" anchor="ctr"/>
-          <a:lstStyle/>
-          <a:p>
-            <a:pPr algn="ctr" indent="0" marL="0">
-              <a:buNone/>
-            </a:pPr>
-            <a:r>
-              <a:rPr lang="en-US" sz="1900" b="1" dirty="0">
-                <a:solidFill>
-                  <a:srgbClr val="12304A"/>
-                </a:solidFill>
-              </a:rPr>
-              <a:t>ID.AM: inventariar, manter e priorizar ativos conforme missão e impacto.</a:t>
-            </a:r>
-            <a:endParaRPr lang="en-US" sz="1900" dirty="0"/>
-          </a:p>
-        </p:txBody>
-      </p:sp>
-      <p:sp>
-        <p:nvSpPr>
-          <p:cNvPr id="7" name="Shape 4"/>
-          <p:cNvSpPr/>
-          <p:nvPr/>
-        </p:nvSpPr>
-        <p:spPr>
-          <a:xfrm>
-            <a:off x="548640" y="6473952"/>
-            <a:ext cx="11018520" cy="0"/>
-          </a:xfrm>
-          <a:prstGeom prst="line">
-            <a:avLst/>
-          </a:prstGeom>
-          <a:noFill/>
+          <p:cNvPr id="6" name="Shape 3"/>
+          <p:cNvSpPr/>
+          <p:nvPr/>
+        </p:nvSpPr>
+        <p:spPr>
+          <a:xfrm>
+            <a:off x="960120" y="5413248"/>
+            <a:ext cx="10195560" cy="502920"/>
+          </a:xfrm>
+          <a:prstGeom prst="roundRect">
+            <a:avLst/>
+          </a:prstGeom>
+          <a:solidFill>
+            <a:srgbClr val="E7F0F8"/>
+          </a:solidFill>
           <a:ln w="12700">
             <a:solidFill>
               <a:srgbClr val="C9D4DF"/>
@@ -4043,7 +6265,66 @@
       </p:sp>
       <p:sp>
         <p:nvSpPr>
-          <p:cNvPr id="8" name="Text 5"/>
+          <p:cNvPr id="7" name="Text 4"/>
+          <p:cNvSpPr/>
+          <p:nvPr/>
+        </p:nvSpPr>
+        <p:spPr>
+          <a:xfrm>
+            <a:off x="1188720" y="5559552"/>
+            <a:ext cx="9738360" cy="228600"/>
+          </a:xfrm>
+          <a:prstGeom prst="rect">
+            <a:avLst/>
+          </a:prstGeom>
+          <a:noFill/>
+          <a:ln/>
+        </p:spPr>
+        <p:txBody>
+          <a:bodyPr wrap="square" lIns="0" tIns="0" rIns="0" bIns="0" rtlCol="0" anchor="ctr"/>
+          <a:lstStyle/>
+          <a:p>
+            <a:pPr algn="ctr" indent="0" marL="0">
+              <a:buNone/>
+            </a:pPr>
+            <a:r>
+              <a:rPr lang="en-US" sz="1550" b="1" dirty="0">
+                <a:solidFill>
+                  <a:srgbClr val="12304A"/>
+                </a:solidFill>
+              </a:rPr>
+              <a:t>Ativo não é sinônimo de servidor: informação, arquivo, serviço e plataforma sustentam funções diferentes.</a:t>
+            </a:r>
+            <a:endParaRPr lang="en-US" sz="1550" dirty="0"/>
+          </a:p>
+        </p:txBody>
+      </p:sp>
+      <p:sp>
+        <p:nvSpPr>
+          <p:cNvPr id="8" name="Shape 5"/>
+          <p:cNvSpPr/>
+          <p:nvPr/>
+        </p:nvSpPr>
+        <p:spPr>
+          <a:xfrm>
+            <a:off x="548640" y="6473952"/>
+            <a:ext cx="11018520" cy="0"/>
+          </a:xfrm>
+          <a:prstGeom prst="line">
+            <a:avLst/>
+          </a:prstGeom>
+          <a:noFill/>
+          <a:ln w="12700">
+            <a:solidFill>
+              <a:srgbClr val="C9D4DF"/>
+            </a:solidFill>
+            <a:prstDash val="solid"/>
+          </a:ln>
+        </p:spPr>
+      </p:sp>
+      <p:sp>
+        <p:nvSpPr>
+          <p:cNvPr id="9" name="Text 6"/>
           <p:cNvSpPr/>
           <p:nvPr/>
         </p:nvSpPr>
@@ -4079,7 +6360,7 @@
       </p:sp>
       <p:sp>
         <p:nvSpPr>
-          <p:cNvPr id="9" name="Text 6"/>
+          <p:cNvPr id="10" name="Text 7"/>
           <p:cNvSpPr/>
           <p:nvPr/>
         </p:nvSpPr>
@@ -4121,9 +6402,9 @@
 </p:sld>
 </file>
 
-<file path=ppt/slides/slide5.xml><?xml version="1.0" encoding="utf-8"?>
+<file path=ppt/slides/slide6.xml><?xml version="1.0" encoding="utf-8"?>
 <p:sld xmlns:a="http://schemas.openxmlformats.org/drawingml/2006/main" xmlns:r="http://schemas.openxmlformats.org/officeDocument/2006/relationships" xmlns:p="http://schemas.openxmlformats.org/presentationml/2006/main">
-  <p:cSld name="Slide 5">
+  <p:cSld name="Slide 6">
     <p:bg>
       <p:bgPr>
         <a:solidFill>
@@ -4175,7 +6456,7 @@
                   <a:srgbClr val="087F7A"/>
                 </a:solidFill>
               </a:rPr>
-              <a:t>CONCEITOS</a:t>
+              <a:t>EXEMPLO CONSTRUÍDO</a:t>
             </a:r>
             <a:endParaRPr lang="en-US" sz="1300" dirty="0"/>
           </a:p>
@@ -4213,7 +6494,7 @@
                   <a:srgbClr val="12304A"/>
                 </a:solidFill>
               </a:rPr>
-              <a:t>Uma cadeia, seis perguntas</a:t>
+              <a:t>Da evidência aos conceitos necessários</a:t>
             </a:r>
             <a:endParaRPr lang="en-US" sz="3000" dirty="0"/>
           </a:p>
@@ -4251,7 +6532,7 @@
                   <a:srgbClr val="4B5E71"/>
                 </a:solidFill>
               </a:rPr>
-              <a:t>Os termos ganham precisão quando ligados à mesma evidência.</a:t>
+              <a:t>Primeiro modele a frase; depois peça que as duplas a critiquem e completem.</a:t>
             </a:r>
             <a:endParaRPr lang="en-US" sz="1700" dirty="0"/>
           </a:p>
@@ -4265,8 +6546,8 @@
         </p:nvSpPr>
         <p:spPr>
           <a:xfrm>
-            <a:off x="594360" y="1993392"/>
-            <a:ext cx="3520440" cy="1298448"/>
+            <a:off x="640080" y="1810512"/>
+            <a:ext cx="5230368" cy="1261872"/>
           </a:xfrm>
           <a:prstGeom prst="roundRect">
             <a:avLst/>
@@ -4290,8 +6571,8 @@
         </p:nvSpPr>
         <p:spPr>
           <a:xfrm>
-            <a:off x="795528" y="2221992"/>
-            <a:ext cx="3118104" cy="274320"/>
+            <a:off x="841248" y="2039112"/>
+            <a:ext cx="4828032" cy="274320"/>
           </a:xfrm>
           <a:prstGeom prst="rect">
             <a:avLst/>
@@ -4312,7 +6593,7 @@
                   <a:srgbClr val="0B65C2"/>
                 </a:solidFill>
               </a:rPr>
-              <a:t>ATIVO</a:t>
+              <a:t>1 • ATIVO</a:t>
             </a:r>
             <a:endParaRPr lang="en-US" sz="1400" dirty="0"/>
           </a:p>
@@ -4326,8 +6607,8 @@
         </p:nvSpPr>
         <p:spPr>
           <a:xfrm>
-            <a:off x="795528" y="2743200"/>
-            <a:ext cx="3118104" cy="338328"/>
+            <a:off x="841248" y="2560320"/>
+            <a:ext cx="4828032" cy="301752"/>
           </a:xfrm>
           <a:prstGeom prst="rect">
             <a:avLst/>
@@ -4350,7 +6631,7 @@
                   <a:srgbClr val="172B4D"/>
                 </a:solidFill>
               </a:rPr>
-              <a:t>o que tem valor?</a:t>
+              <a:t>informação do arquivo acquisitions.md</a:t>
             </a:r>
             <a:endParaRPr lang="en-US" sz="1800" dirty="0"/>
           </a:p>
@@ -4364,8 +6645,305 @@
         </p:nvSpPr>
         <p:spPr>
           <a:xfrm>
-            <a:off x="4453128" y="1993392"/>
-            <a:ext cx="3520440" cy="1298448"/>
+            <a:off x="6263640" y="1810512"/>
+            <a:ext cx="5230368" cy="1261872"/>
+          </a:xfrm>
+          <a:prstGeom prst="roundRect">
+            <a:avLst/>
+          </a:prstGeom>
+          <a:solidFill>
+            <a:srgbClr val="FFFFFF"/>
+          </a:solidFill>
+          <a:ln w="25400">
+            <a:solidFill>
+              <a:srgbClr val="26734D"/>
+            </a:solidFill>
+            <a:prstDash val="solid"/>
+          </a:ln>
+        </p:spPr>
+      </p:sp>
+      <p:sp>
+        <p:nvSpPr>
+          <p:cNvPr id="9" name="Text 7"/>
+          <p:cNvSpPr/>
+          <p:nvPr/>
+        </p:nvSpPr>
+        <p:spPr>
+          <a:xfrm>
+            <a:off x="6464808" y="2039112"/>
+            <a:ext cx="4828032" cy="274320"/>
+          </a:xfrm>
+          <a:prstGeom prst="rect">
+            <a:avLst/>
+          </a:prstGeom>
+          <a:noFill/>
+          <a:ln/>
+        </p:spPr>
+        <p:txBody>
+          <a:bodyPr wrap="square" lIns="0" tIns="0" rIns="0" bIns="0" rtlCol="0" anchor="ctr"/>
+          <a:lstStyle/>
+          <a:p>
+            <a:pPr indent="0" marL="0">
+              <a:buNone/>
+            </a:pPr>
+            <a:r>
+              <a:rPr lang="en-US" sz="1400" b="1" dirty="0">
+                <a:solidFill>
+                  <a:srgbClr val="26734D"/>
+                </a:solidFill>
+              </a:rPr>
+              <a:t>2 • OBSERVAÇÃO</a:t>
+            </a:r>
+            <a:endParaRPr lang="en-US" sz="1400" dirty="0"/>
+          </a:p>
+        </p:txBody>
+      </p:sp>
+      <p:sp>
+        <p:nvSpPr>
+          <p:cNvPr id="10" name="Text 8"/>
+          <p:cNvSpPr/>
+          <p:nvPr/>
+        </p:nvSpPr>
+        <p:spPr>
+          <a:xfrm>
+            <a:off x="6464808" y="2560320"/>
+            <a:ext cx="4828032" cy="301752"/>
+          </a:xfrm>
+          <a:prstGeom prst="rect">
+            <a:avLst/>
+          </a:prstGeom>
+          <a:noFill/>
+          <a:ln/>
+        </p:spPr>
+        <p:txBody>
+          <a:bodyPr wrap="square" lIns="0" tIns="0" rIns="0" bIns="0" rtlCol="0" anchor="ctr">
+            <a:normAutofit/>
+          </a:bodyPr>
+          <a:lstStyle/>
+          <a:p>
+            <a:pPr indent="0" marL="0">
+              <a:buNone/>
+            </a:pPr>
+            <a:r>
+              <a:rPr lang="en-US" sz="1800" b="1" dirty="0">
+                <a:solidFill>
+                  <a:srgbClr val="172B4D"/>
+                </a:solidFill>
+              </a:rPr>
+              <a:t>GET sem login recebeu 200 + markdown</a:t>
+            </a:r>
+            <a:endParaRPr lang="en-US" sz="1800" dirty="0"/>
+          </a:p>
+        </p:txBody>
+      </p:sp>
+      <p:sp>
+        <p:nvSpPr>
+          <p:cNvPr id="11" name="Shape 9"/>
+          <p:cNvSpPr/>
+          <p:nvPr/>
+        </p:nvSpPr>
+        <p:spPr>
+          <a:xfrm>
+            <a:off x="640080" y="3163824"/>
+            <a:ext cx="5230368" cy="1261872"/>
+          </a:xfrm>
+          <a:prstGeom prst="roundRect">
+            <a:avLst/>
+          </a:prstGeom>
+          <a:solidFill>
+            <a:srgbClr val="FFFFFF"/>
+          </a:solidFill>
+          <a:ln w="25400">
+            <a:solidFill>
+              <a:srgbClr val="B75D00"/>
+            </a:solidFill>
+            <a:prstDash val="solid"/>
+          </a:ln>
+        </p:spPr>
+      </p:sp>
+      <p:sp>
+        <p:nvSpPr>
+          <p:cNvPr id="12" name="Text 10"/>
+          <p:cNvSpPr/>
+          <p:nvPr/>
+        </p:nvSpPr>
+        <p:spPr>
+          <a:xfrm>
+            <a:off x="841248" y="3392424"/>
+            <a:ext cx="4828032" cy="274320"/>
+          </a:xfrm>
+          <a:prstGeom prst="rect">
+            <a:avLst/>
+          </a:prstGeom>
+          <a:noFill/>
+          <a:ln/>
+        </p:spPr>
+        <p:txBody>
+          <a:bodyPr wrap="square" lIns="0" tIns="0" rIns="0" bIns="0" rtlCol="0" anchor="ctr"/>
+          <a:lstStyle/>
+          <a:p>
+            <a:pPr indent="0" marL="0">
+              <a:buNone/>
+            </a:pPr>
+            <a:r>
+              <a:rPr lang="en-US" sz="1400" b="1" dirty="0">
+                <a:solidFill>
+                  <a:srgbClr val="B75D00"/>
+                </a:solidFill>
+              </a:rPr>
+              <a:t>3 • FRAQUEZA — HIPÓTESE</a:t>
+            </a:r>
+            <a:endParaRPr lang="en-US" sz="1400" dirty="0"/>
+          </a:p>
+        </p:txBody>
+      </p:sp>
+      <p:sp>
+        <p:nvSpPr>
+          <p:cNvPr id="13" name="Text 11"/>
+          <p:cNvSpPr/>
+          <p:nvPr/>
+        </p:nvSpPr>
+        <p:spPr>
+          <a:xfrm>
+            <a:off x="841248" y="3913632"/>
+            <a:ext cx="4828032" cy="301752"/>
+          </a:xfrm>
+          <a:prstGeom prst="rect">
+            <a:avLst/>
+          </a:prstGeom>
+          <a:noFill/>
+          <a:ln/>
+        </p:spPr>
+        <p:txBody>
+          <a:bodyPr wrap="square" lIns="0" tIns="0" rIns="0" bIns="0" rtlCol="0" anchor="ctr">
+            <a:normAutofit/>
+          </a:bodyPr>
+          <a:lstStyle/>
+          <a:p>
+            <a:pPr indent="0" marL="0">
+              <a:buNone/>
+            </a:pPr>
+            <a:r>
+              <a:rPr lang="en-US" sz="1800" b="1" dirty="0">
+                <a:solidFill>
+                  <a:srgbClr val="172B4D"/>
+                </a:solidFill>
+              </a:rPr>
+              <a:t>arquivo em área servida ou autorização ausente</a:t>
+            </a:r>
+            <a:endParaRPr lang="en-US" sz="1800" dirty="0"/>
+          </a:p>
+        </p:txBody>
+      </p:sp>
+      <p:sp>
+        <p:nvSpPr>
+          <p:cNvPr id="14" name="Shape 12"/>
+          <p:cNvSpPr/>
+          <p:nvPr/>
+        </p:nvSpPr>
+        <p:spPr>
+          <a:xfrm>
+            <a:off x="6263640" y="3163824"/>
+            <a:ext cx="5230368" cy="1261872"/>
+          </a:xfrm>
+          <a:prstGeom prst="roundRect">
+            <a:avLst/>
+          </a:prstGeom>
+          <a:solidFill>
+            <a:srgbClr val="FFFFFF"/>
+          </a:solidFill>
+          <a:ln w="25400">
+            <a:solidFill>
+              <a:srgbClr val="087F7A"/>
+            </a:solidFill>
+            <a:prstDash val="solid"/>
+          </a:ln>
+        </p:spPr>
+      </p:sp>
+      <p:sp>
+        <p:nvSpPr>
+          <p:cNvPr id="15" name="Text 13"/>
+          <p:cNvSpPr/>
+          <p:nvPr/>
+        </p:nvSpPr>
+        <p:spPr>
+          <a:xfrm>
+            <a:off x="6464808" y="3392424"/>
+            <a:ext cx="4828032" cy="274320"/>
+          </a:xfrm>
+          <a:prstGeom prst="rect">
+            <a:avLst/>
+          </a:prstGeom>
+          <a:noFill/>
+          <a:ln/>
+        </p:spPr>
+        <p:txBody>
+          <a:bodyPr wrap="square" lIns="0" tIns="0" rIns="0" bIns="0" rtlCol="0" anchor="ctr"/>
+          <a:lstStyle/>
+          <a:p>
+            <a:pPr indent="0" marL="0">
+              <a:buNone/>
+            </a:pPr>
+            <a:r>
+              <a:rPr lang="en-US" sz="1400" b="1" dirty="0">
+                <a:solidFill>
+                  <a:srgbClr val="087F7A"/>
+                </a:solidFill>
+              </a:rPr>
+              <a:t>4 • VULNERABILIDADE</a:t>
+            </a:r>
+            <a:endParaRPr lang="en-US" sz="1400" dirty="0"/>
+          </a:p>
+        </p:txBody>
+      </p:sp>
+      <p:sp>
+        <p:nvSpPr>
+          <p:cNvPr id="16" name="Text 14"/>
+          <p:cNvSpPr/>
+          <p:nvPr/>
+        </p:nvSpPr>
+        <p:spPr>
+          <a:xfrm>
+            <a:off x="6464808" y="3913632"/>
+            <a:ext cx="4828032" cy="301752"/>
+          </a:xfrm>
+          <a:prstGeom prst="rect">
+            <a:avLst/>
+          </a:prstGeom>
+          <a:noFill/>
+          <a:ln/>
+        </p:spPr>
+        <p:txBody>
+          <a:bodyPr wrap="square" lIns="0" tIns="0" rIns="0" bIns="0" rtlCol="0" anchor="ctr">
+            <a:normAutofit/>
+          </a:bodyPr>
+          <a:lstStyle/>
+          <a:p>
+            <a:pPr indent="0" marL="0">
+              <a:buNone/>
+            </a:pPr>
+            <a:r>
+              <a:rPr lang="en-US" sz="1800" b="1" dirty="0">
+                <a:solidFill>
+                  <a:srgbClr val="172B4D"/>
+                </a:solidFill>
+              </a:rPr>
+              <a:t>esta implantação permite acesso não autenticado</a:t>
+            </a:r>
+            <a:endParaRPr lang="en-US" sz="1800" dirty="0"/>
+          </a:p>
+        </p:txBody>
+      </p:sp>
+      <p:sp>
+        <p:nvSpPr>
+          <p:cNvPr id="17" name="Shape 15"/>
+          <p:cNvSpPr/>
+          <p:nvPr/>
+        </p:nvSpPr>
+        <p:spPr>
+          <a:xfrm>
+            <a:off x="640080" y="4517136"/>
+            <a:ext cx="5230368" cy="1261872"/>
           </a:xfrm>
           <a:prstGeom prst="roundRect">
             <a:avLst/>
@@ -4383,14 +6961,14 @@
       </p:sp>
       <p:sp>
         <p:nvSpPr>
-          <p:cNvPr id="9" name="Text 7"/>
-          <p:cNvSpPr/>
-          <p:nvPr/>
-        </p:nvSpPr>
-        <p:spPr>
-          <a:xfrm>
-            <a:off x="4654296" y="2221992"/>
-            <a:ext cx="3118104" cy="274320"/>
+          <p:cNvPr id="18" name="Text 16"/>
+          <p:cNvSpPr/>
+          <p:nvPr/>
+        </p:nvSpPr>
+        <p:spPr>
+          <a:xfrm>
+            <a:off x="841248" y="4745736"/>
+            <a:ext cx="4828032" cy="274320"/>
           </a:xfrm>
           <a:prstGeom prst="rect">
             <a:avLst/>
@@ -4411,7 +6989,7 @@
                   <a:srgbClr val="B42318"/>
                 </a:solidFill>
               </a:rPr>
-              <a:t>AMEAÇA</a:t>
+              <a:t>5 • AMEAÇA</a:t>
             </a:r>
             <a:endParaRPr lang="en-US" sz="1400" dirty="0"/>
           </a:p>
@@ -4419,14 +6997,14 @@
       </p:sp>
       <p:sp>
         <p:nvSpPr>
-          <p:cNvPr id="10" name="Text 8"/>
-          <p:cNvSpPr/>
-          <p:nvPr/>
-        </p:nvSpPr>
-        <p:spPr>
-          <a:xfrm>
-            <a:off x="4654296" y="2743200"/>
-            <a:ext cx="3118104" cy="338328"/>
+          <p:cNvPr id="19" name="Text 17"/>
+          <p:cNvSpPr/>
+          <p:nvPr/>
+        </p:nvSpPr>
+        <p:spPr>
+          <a:xfrm>
+            <a:off x="841248" y="5266944"/>
+            <a:ext cx="4828032" cy="301752"/>
           </a:xfrm>
           <a:prstGeom prst="rect">
             <a:avLst/>
@@ -4449,7 +7027,7 @@
                   <a:srgbClr val="172B4D"/>
                 </a:solidFill>
               </a:rPr>
-              <a:t>quem ou o que causa dano?</a:t>
+              <a:t>usuário não autorizado obtém a informação</a:t>
             </a:r>
             <a:endParaRPr lang="en-US" sz="1800" dirty="0"/>
           </a:p>
@@ -4457,311 +7035,14 @@
       </p:sp>
       <p:sp>
         <p:nvSpPr>
-          <p:cNvPr id="11" name="Shape 9"/>
-          <p:cNvSpPr/>
-          <p:nvPr/>
-        </p:nvSpPr>
-        <p:spPr>
-          <a:xfrm>
-            <a:off x="8311896" y="1993392"/>
-            <a:ext cx="3520440" cy="1298448"/>
-          </a:xfrm>
-          <a:prstGeom prst="roundRect">
-            <a:avLst/>
-          </a:prstGeom>
-          <a:solidFill>
-            <a:srgbClr val="FFFFFF"/>
-          </a:solidFill>
-          <a:ln w="25400">
-            <a:solidFill>
-              <a:srgbClr val="B75D00"/>
-            </a:solidFill>
-            <a:prstDash val="solid"/>
-          </a:ln>
-        </p:spPr>
-      </p:sp>
-      <p:sp>
-        <p:nvSpPr>
-          <p:cNvPr id="12" name="Text 10"/>
-          <p:cNvSpPr/>
-          <p:nvPr/>
-        </p:nvSpPr>
-        <p:spPr>
-          <a:xfrm>
-            <a:off x="8513064" y="2221992"/>
-            <a:ext cx="3118104" cy="274320"/>
-          </a:xfrm>
-          <a:prstGeom prst="rect">
-            <a:avLst/>
-          </a:prstGeom>
-          <a:noFill/>
-          <a:ln/>
-        </p:spPr>
-        <p:txBody>
-          <a:bodyPr wrap="square" lIns="0" tIns="0" rIns="0" bIns="0" rtlCol="0" anchor="ctr"/>
-          <a:lstStyle/>
-          <a:p>
-            <a:pPr indent="0" marL="0">
-              <a:buNone/>
-            </a:pPr>
-            <a:r>
-              <a:rPr lang="en-US" sz="1400" b="1" dirty="0">
-                <a:solidFill>
-                  <a:srgbClr val="B75D00"/>
-                </a:solidFill>
-              </a:rPr>
-              <a:t>FRAQUEZA</a:t>
-            </a:r>
-            <a:endParaRPr lang="en-US" sz="1400" dirty="0"/>
-          </a:p>
-        </p:txBody>
-      </p:sp>
-      <p:sp>
-        <p:nvSpPr>
-          <p:cNvPr id="13" name="Text 11"/>
-          <p:cNvSpPr/>
-          <p:nvPr/>
-        </p:nvSpPr>
-        <p:spPr>
-          <a:xfrm>
-            <a:off x="8513064" y="2743200"/>
-            <a:ext cx="3118104" cy="338328"/>
-          </a:xfrm>
-          <a:prstGeom prst="rect">
-            <a:avLst/>
-          </a:prstGeom>
-          <a:noFill/>
-          <a:ln/>
-        </p:spPr>
-        <p:txBody>
-          <a:bodyPr wrap="square" lIns="0" tIns="0" rIns="0" bIns="0" rtlCol="0" anchor="ctr">
-            <a:normAutofit/>
-          </a:bodyPr>
-          <a:lstStyle/>
-          <a:p>
-            <a:pPr indent="0" marL="0">
-              <a:buNone/>
-            </a:pPr>
-            <a:r>
-              <a:rPr lang="en-US" sz="1800" b="1" dirty="0">
-                <a:solidFill>
-                  <a:srgbClr val="172B4D"/>
-                </a:solidFill>
-              </a:rPr>
-              <a:t>que condição pode originar falhas?</a:t>
-            </a:r>
-            <a:endParaRPr lang="en-US" sz="1800" dirty="0"/>
-          </a:p>
-        </p:txBody>
-      </p:sp>
-      <p:sp>
-        <p:nvSpPr>
-          <p:cNvPr id="14" name="Shape 12"/>
-          <p:cNvSpPr/>
-          <p:nvPr/>
-        </p:nvSpPr>
-        <p:spPr>
-          <a:xfrm>
-            <a:off x="594360" y="3593592"/>
-            <a:ext cx="3520440" cy="1298448"/>
-          </a:xfrm>
-          <a:prstGeom prst="roundRect">
-            <a:avLst/>
-          </a:prstGeom>
-          <a:solidFill>
-            <a:srgbClr val="FFFFFF"/>
-          </a:solidFill>
-          <a:ln w="25400">
-            <a:solidFill>
-              <a:srgbClr val="087F7A"/>
-            </a:solidFill>
-            <a:prstDash val="solid"/>
-          </a:ln>
-        </p:spPr>
-      </p:sp>
-      <p:sp>
-        <p:nvSpPr>
-          <p:cNvPr id="15" name="Text 13"/>
-          <p:cNvSpPr/>
-          <p:nvPr/>
-        </p:nvSpPr>
-        <p:spPr>
-          <a:xfrm>
-            <a:off x="795528" y="3822192"/>
-            <a:ext cx="3118104" cy="274320"/>
-          </a:xfrm>
-          <a:prstGeom prst="rect">
-            <a:avLst/>
-          </a:prstGeom>
-          <a:noFill/>
-          <a:ln/>
-        </p:spPr>
-        <p:txBody>
-          <a:bodyPr wrap="square" lIns="0" tIns="0" rIns="0" bIns="0" rtlCol="0" anchor="ctr"/>
-          <a:lstStyle/>
-          <a:p>
-            <a:pPr indent="0" marL="0">
-              <a:buNone/>
-            </a:pPr>
-            <a:r>
-              <a:rPr lang="en-US" sz="1400" b="1" dirty="0">
-                <a:solidFill>
-                  <a:srgbClr val="087F7A"/>
-                </a:solidFill>
-              </a:rPr>
-              <a:t>VULNERABILIDADE</a:t>
-            </a:r>
-            <a:endParaRPr lang="en-US" sz="1400" dirty="0"/>
-          </a:p>
-        </p:txBody>
-      </p:sp>
-      <p:sp>
-        <p:nvSpPr>
-          <p:cNvPr id="16" name="Text 14"/>
-          <p:cNvSpPr/>
-          <p:nvPr/>
-        </p:nvSpPr>
-        <p:spPr>
-          <a:xfrm>
-            <a:off x="795528" y="4343400"/>
-            <a:ext cx="3118104" cy="338328"/>
-          </a:xfrm>
-          <a:prstGeom prst="rect">
-            <a:avLst/>
-          </a:prstGeom>
-          <a:noFill/>
-          <a:ln/>
-        </p:spPr>
-        <p:txBody>
-          <a:bodyPr wrap="square" lIns="0" tIns="0" rIns="0" bIns="0" rtlCol="0" anchor="ctr">
-            <a:normAutofit/>
-          </a:bodyPr>
-          <a:lstStyle/>
-          <a:p>
-            <a:pPr indent="0" marL="0">
-              <a:buNone/>
-            </a:pPr>
-            <a:r>
-              <a:rPr lang="en-US" sz="1800" b="1" dirty="0">
-                <a:solidFill>
-                  <a:srgbClr val="172B4D"/>
-                </a:solidFill>
-              </a:rPr>
-              <a:t>qual instância é explorável?</a:t>
-            </a:r>
-            <a:endParaRPr lang="en-US" sz="1800" dirty="0"/>
-          </a:p>
-        </p:txBody>
-      </p:sp>
-      <p:sp>
-        <p:nvSpPr>
-          <p:cNvPr id="17" name="Shape 15"/>
-          <p:cNvSpPr/>
-          <p:nvPr/>
-        </p:nvSpPr>
-        <p:spPr>
-          <a:xfrm>
-            <a:off x="4453128" y="3593592"/>
-            <a:ext cx="3520440" cy="1298448"/>
-          </a:xfrm>
-          <a:prstGeom prst="roundRect">
-            <a:avLst/>
-          </a:prstGeom>
-          <a:solidFill>
-            <a:srgbClr val="FFFFFF"/>
-          </a:solidFill>
-          <a:ln w="25400">
-            <a:solidFill>
-              <a:srgbClr val="26734D"/>
-            </a:solidFill>
-            <a:prstDash val="solid"/>
-          </a:ln>
-        </p:spPr>
-      </p:sp>
-      <p:sp>
-        <p:nvSpPr>
-          <p:cNvPr id="18" name="Text 16"/>
-          <p:cNvSpPr/>
-          <p:nvPr/>
-        </p:nvSpPr>
-        <p:spPr>
-          <a:xfrm>
-            <a:off x="4654296" y="3822192"/>
-            <a:ext cx="3118104" cy="274320"/>
-          </a:xfrm>
-          <a:prstGeom prst="rect">
-            <a:avLst/>
-          </a:prstGeom>
-          <a:noFill/>
-          <a:ln/>
-        </p:spPr>
-        <p:txBody>
-          <a:bodyPr wrap="square" lIns="0" tIns="0" rIns="0" bIns="0" rtlCol="0" anchor="ctr"/>
-          <a:lstStyle/>
-          <a:p>
-            <a:pPr indent="0" marL="0">
-              <a:buNone/>
-            </a:pPr>
-            <a:r>
-              <a:rPr lang="en-US" sz="1400" b="1" dirty="0">
-                <a:solidFill>
-                  <a:srgbClr val="26734D"/>
-                </a:solidFill>
-              </a:rPr>
-              <a:t>EXPOSIÇÃO</a:t>
-            </a:r>
-            <a:endParaRPr lang="en-US" sz="1400" dirty="0"/>
-          </a:p>
-        </p:txBody>
-      </p:sp>
-      <p:sp>
-        <p:nvSpPr>
-          <p:cNvPr id="19" name="Text 17"/>
-          <p:cNvSpPr/>
-          <p:nvPr/>
-        </p:nvSpPr>
-        <p:spPr>
-          <a:xfrm>
-            <a:off x="4654296" y="4343400"/>
-            <a:ext cx="3118104" cy="338328"/>
-          </a:xfrm>
-          <a:prstGeom prst="rect">
-            <a:avLst/>
-          </a:prstGeom>
-          <a:noFill/>
-          <a:ln/>
-        </p:spPr>
-        <p:txBody>
-          <a:bodyPr wrap="square" lIns="0" tIns="0" rIns="0" bIns="0" rtlCol="0" anchor="ctr">
-            <a:normAutofit/>
-          </a:bodyPr>
-          <a:lstStyle/>
-          <a:p>
-            <a:pPr indent="0" marL="0">
-              <a:buNone/>
-            </a:pPr>
-            <a:r>
-              <a:rPr lang="en-US" sz="1800" b="1" dirty="0">
-                <a:solidFill>
-                  <a:srgbClr val="172B4D"/>
-                </a:solidFill>
-              </a:rPr>
-              <a:t>por qual caminho é alcançável?</a:t>
-            </a:r>
-            <a:endParaRPr lang="en-US" sz="1800" dirty="0"/>
-          </a:p>
-        </p:txBody>
-      </p:sp>
-      <p:sp>
-        <p:nvSpPr>
           <p:cNvPr id="20" name="Shape 18"/>
           <p:cNvSpPr/>
           <p:nvPr/>
         </p:nvSpPr>
         <p:spPr>
           <a:xfrm>
-            <a:off x="8311896" y="3593592"/>
-            <a:ext cx="3520440" cy="1298448"/>
+            <a:off x="6263640" y="4517136"/>
+            <a:ext cx="5230368" cy="1261872"/>
           </a:xfrm>
           <a:prstGeom prst="roundRect">
             <a:avLst/>
@@ -4785,8 +7066,8 @@
         </p:nvSpPr>
         <p:spPr>
           <a:xfrm>
-            <a:off x="8513064" y="3822192"/>
-            <a:ext cx="3118104" cy="274320"/>
+            <a:off x="6464808" y="4745736"/>
+            <a:ext cx="4828032" cy="274320"/>
           </a:xfrm>
           <a:prstGeom prst="rect">
             <a:avLst/>
@@ -4807,7 +7088,7 @@
                   <a:srgbClr val="12304A"/>
                 </a:solidFill>
               </a:rPr>
-              <a:t>EXPLOIT</a:t>
+              <a:t>6 • CONSEQUÊNCIA</a:t>
             </a:r>
             <a:endParaRPr lang="en-US" sz="1400" dirty="0"/>
           </a:p>
@@ -4821,8 +7102,8 @@
         </p:nvSpPr>
         <p:spPr>
           <a:xfrm>
-            <a:off x="8513064" y="4343400"/>
-            <a:ext cx="3118104" cy="338328"/>
+            <a:off x="6464808" y="5266944"/>
+            <a:ext cx="4828032" cy="301752"/>
           </a:xfrm>
           <a:prstGeom prst="rect">
             <a:avLst/>
@@ -4845,7 +7126,7 @@
                   <a:srgbClr val="172B4D"/>
                 </a:solidFill>
               </a:rPr>
-              <a:t>que técnica usa a falha?</a:t>
+              <a:t>divulgação de planos fictícios de aquisição</a:t>
             </a:r>
             <a:endParaRPr lang="en-US" sz="1800" dirty="0"/>
           </a:p>
@@ -4940,440 +7221,9 @@
                   <a:srgbClr val="4B5E71"/>
                 </a:solidFill>
               </a:rPr>
-              <a:t>CWE — glossary and FAQ; CVE Program</a:t>
+              <a:t>CWE — classes de fraqueza; não atribuir CVE sem fonte</a:t>
             </a:r>
             <a:endParaRPr lang="en-US" sz="900" dirty="0"/>
-          </a:p>
-        </p:txBody>
-      </p:sp>
-    </p:spTree>
-  </p:cSld>
-  <p:clrMapOvr>
-    <a:masterClrMapping/>
-  </p:clrMapOvr>
-</p:sld>
-</file>
-
-<file path=ppt/slides/slide6.xml><?xml version="1.0" encoding="utf-8"?>
-<p:sld xmlns:a="http://schemas.openxmlformats.org/drawingml/2006/main" xmlns:r="http://schemas.openxmlformats.org/officeDocument/2006/relationships" xmlns:p="http://schemas.openxmlformats.org/presentationml/2006/main">
-  <p:cSld name="Slide 6">
-    <p:bg>
-      <p:bgPr>
-        <a:solidFill>
-          <a:srgbClr val="12304A"/>
-        </a:solidFill>
-      </p:bgPr>
-    </p:bg>
-    <p:spTree>
-      <p:nvGrpSpPr>
-        <p:cNvPr id="1" name=""/>
-        <p:cNvGrpSpPr/>
-        <p:nvPr/>
-      </p:nvGrpSpPr>
-      <p:grpSpPr>
-        <a:xfrm>
-          <a:off x="0" y="0"/>
-          <a:ext cx="0" cy="0"/>
-          <a:chOff x="0" y="0"/>
-          <a:chExt cx="0" cy="0"/>
-        </a:xfrm>
-      </p:grpSpPr>
-      <p:sp>
-        <p:nvSpPr>
-          <p:cNvPr id="2" name="Text 0"/>
-          <p:cNvSpPr/>
-          <p:nvPr/>
-        </p:nvSpPr>
-        <p:spPr>
-          <a:xfrm>
-            <a:off x="731520" y="640080"/>
-            <a:ext cx="3657600" cy="274320"/>
-          </a:xfrm>
-          <a:prstGeom prst="rect">
-            <a:avLst/>
-          </a:prstGeom>
-          <a:noFill/>
-          <a:ln/>
-        </p:spPr>
-        <p:txBody>
-          <a:bodyPr wrap="square" lIns="0" tIns="0" rIns="0" bIns="0" rtlCol="0" anchor="ctr"/>
-          <a:lstStyle/>
-          <a:p>
-            <a:pPr indent="0" marL="0">
-              <a:buNone/>
-            </a:pPr>
-            <a:r>
-              <a:rPr lang="en-US" sz="1400" b="1" spc="120" kern="0" dirty="0">
-                <a:solidFill>
-                  <a:srgbClr val="7DE0D8"/>
-                </a:solidFill>
-              </a:rPr>
-              <a:t>CHECKPOINT 2</a:t>
-            </a:r>
-            <a:endParaRPr lang="en-US" sz="1400" dirty="0"/>
-          </a:p>
-        </p:txBody>
-      </p:sp>
-      <p:sp>
-        <p:nvSpPr>
-          <p:cNvPr id="3" name="Text 1"/>
-          <p:cNvSpPr/>
-          <p:nvPr/>
-        </p:nvSpPr>
-        <p:spPr>
-          <a:xfrm>
-            <a:off x="731520" y="1325880"/>
-            <a:ext cx="9875520" cy="822960"/>
-          </a:xfrm>
-          <a:prstGeom prst="rect">
-            <a:avLst/>
-          </a:prstGeom>
-          <a:noFill/>
-          <a:ln/>
-        </p:spPr>
-        <p:txBody>
-          <a:bodyPr wrap="square" lIns="0" tIns="0" rIns="0" bIns="0" rtlCol="0" anchor="ctr"/>
-          <a:lstStyle/>
-          <a:p>
-            <a:pPr indent="0" marL="0">
-              <a:buNone/>
-            </a:pPr>
-            <a:r>
-              <a:rPr lang="en-US" sz="3800" b="1" dirty="0">
-                <a:solidFill>
-                  <a:srgbClr val="FFFFFF"/>
-                </a:solidFill>
-              </a:rPr>
-              <a:t>Qual controle você defenderia?</a:t>
-            </a:r>
-            <a:endParaRPr lang="en-US" sz="3800" dirty="0"/>
-          </a:p>
-        </p:txBody>
-      </p:sp>
-      <p:sp>
-        <p:nvSpPr>
-          <p:cNvPr id="4" name="Shape 2"/>
-          <p:cNvSpPr/>
-          <p:nvPr/>
-        </p:nvSpPr>
-        <p:spPr>
-          <a:xfrm>
-            <a:off x="731520" y="2743200"/>
-            <a:ext cx="3246120" cy="1828800"/>
-          </a:xfrm>
-          <a:prstGeom prst="roundRect">
-            <a:avLst/>
-          </a:prstGeom>
-          <a:solidFill>
-            <a:srgbClr val="174C76"/>
-          </a:solidFill>
-          <a:ln w="12700">
-            <a:solidFill>
-              <a:srgbClr val="FFFFFF"/>
-            </a:solidFill>
-            <a:prstDash val="solid"/>
-          </a:ln>
-        </p:spPr>
-      </p:sp>
-      <p:sp>
-        <p:nvSpPr>
-          <p:cNvPr id="5" name="Text 3"/>
-          <p:cNvSpPr/>
-          <p:nvPr/>
-        </p:nvSpPr>
-        <p:spPr>
-          <a:xfrm>
-            <a:off x="960120" y="3063240"/>
-            <a:ext cx="2788920" cy="320040"/>
-          </a:xfrm>
-          <a:prstGeom prst="rect">
-            <a:avLst/>
-          </a:prstGeom>
-          <a:noFill/>
-          <a:ln/>
-        </p:spPr>
-        <p:txBody>
-          <a:bodyPr wrap="square" lIns="0" tIns="0" rIns="0" bIns="0" rtlCol="0" anchor="ctr"/>
-          <a:lstStyle/>
-          <a:p>
-            <a:pPr algn="ctr" indent="0" marL="0">
-              <a:buNone/>
-            </a:pPr>
-            <a:r>
-              <a:rPr lang="en-US" sz="1700" b="1" dirty="0">
-                <a:solidFill>
-                  <a:srgbClr val="FFFFFF"/>
-                </a:solidFill>
-              </a:rPr>
-              <a:t>REMOVER</a:t>
-            </a:r>
-            <a:endParaRPr lang="en-US" sz="1700" dirty="0"/>
-          </a:p>
-        </p:txBody>
-      </p:sp>
-      <p:sp>
-        <p:nvSpPr>
-          <p:cNvPr id="6" name="Text 4"/>
-          <p:cNvSpPr/>
-          <p:nvPr/>
-        </p:nvSpPr>
-        <p:spPr>
-          <a:xfrm>
-            <a:off x="1005840" y="3657600"/>
-            <a:ext cx="2697480" cy="566928"/>
-          </a:xfrm>
-          <a:prstGeom prst="rect">
-            <a:avLst/>
-          </a:prstGeom>
-          <a:noFill/>
-          <a:ln/>
-        </p:spPr>
-        <p:txBody>
-          <a:bodyPr wrap="square" lIns="0" tIns="0" rIns="0" bIns="0" rtlCol="0" anchor="ctr"/>
-          <a:lstStyle/>
-          <a:p>
-            <a:pPr algn="ctr" indent="0" marL="0">
-              <a:buNone/>
-            </a:pPr>
-            <a:r>
-              <a:rPr lang="en-US" sz="1700" dirty="0">
-                <a:solidFill>
-                  <a:srgbClr val="FFFFFF"/>
-                </a:solidFill>
-              </a:rPr>
-              <a:t>recurso não deveria ser servido</a:t>
-            </a:r>
-            <a:endParaRPr lang="en-US" sz="1700" dirty="0"/>
-          </a:p>
-        </p:txBody>
-      </p:sp>
-      <p:sp>
-        <p:nvSpPr>
-          <p:cNvPr id="7" name="Shape 5"/>
-          <p:cNvSpPr/>
-          <p:nvPr/>
-        </p:nvSpPr>
-        <p:spPr>
-          <a:xfrm>
-            <a:off x="4434840" y="2743200"/>
-            <a:ext cx="3246120" cy="1828800"/>
-          </a:xfrm>
-          <a:prstGeom prst="roundRect">
-            <a:avLst/>
-          </a:prstGeom>
-          <a:solidFill>
-            <a:srgbClr val="12635F"/>
-          </a:solidFill>
-          <a:ln w="12700">
-            <a:solidFill>
-              <a:srgbClr val="FFFFFF"/>
-            </a:solidFill>
-            <a:prstDash val="solid"/>
-          </a:ln>
-        </p:spPr>
-      </p:sp>
-      <p:sp>
-        <p:nvSpPr>
-          <p:cNvPr id="8" name="Text 6"/>
-          <p:cNvSpPr/>
-          <p:nvPr/>
-        </p:nvSpPr>
-        <p:spPr>
-          <a:xfrm>
-            <a:off x="4663440" y="3063240"/>
-            <a:ext cx="2788920" cy="320040"/>
-          </a:xfrm>
-          <a:prstGeom prst="rect">
-            <a:avLst/>
-          </a:prstGeom>
-          <a:noFill/>
-          <a:ln/>
-        </p:spPr>
-        <p:txBody>
-          <a:bodyPr wrap="square" lIns="0" tIns="0" rIns="0" bIns="0" rtlCol="0" anchor="ctr"/>
-          <a:lstStyle/>
-          <a:p>
-            <a:pPr algn="ctr" indent="0" marL="0">
-              <a:buNone/>
-            </a:pPr>
-            <a:r>
-              <a:rPr lang="en-US" sz="1700" b="1" dirty="0">
-                <a:solidFill>
-                  <a:srgbClr val="FFFFFF"/>
-                </a:solidFill>
-              </a:rPr>
-              <a:t>AUTORIZAR</a:t>
-            </a:r>
-            <a:endParaRPr lang="en-US" sz="1700" dirty="0"/>
-          </a:p>
-        </p:txBody>
-      </p:sp>
-      <p:sp>
-        <p:nvSpPr>
-          <p:cNvPr id="9" name="Text 7"/>
-          <p:cNvSpPr/>
-          <p:nvPr/>
-        </p:nvSpPr>
-        <p:spPr>
-          <a:xfrm>
-            <a:off x="4709160" y="3657600"/>
-            <a:ext cx="2697480" cy="566928"/>
-          </a:xfrm>
-          <a:prstGeom prst="rect">
-            <a:avLst/>
-          </a:prstGeom>
-          <a:noFill/>
-          <a:ln/>
-        </p:spPr>
-        <p:txBody>
-          <a:bodyPr wrap="square" lIns="0" tIns="0" rIns="0" bIns="0" rtlCol="0" anchor="ctr"/>
-          <a:lstStyle/>
-          <a:p>
-            <a:pPr algn="ctr" indent="0" marL="0">
-              <a:buNone/>
-            </a:pPr>
-            <a:r>
-              <a:rPr lang="en-US" sz="1700" dirty="0">
-                <a:solidFill>
-                  <a:srgbClr val="FFFFFF"/>
-                </a:solidFill>
-              </a:rPr>
-              <a:t>papel específico precisa acessar</a:t>
-            </a:r>
-            <a:endParaRPr lang="en-US" sz="1700" dirty="0"/>
-          </a:p>
-        </p:txBody>
-      </p:sp>
-      <p:sp>
-        <p:nvSpPr>
-          <p:cNvPr id="10" name="Shape 8"/>
-          <p:cNvSpPr/>
-          <p:nvPr/>
-        </p:nvSpPr>
-        <p:spPr>
-          <a:xfrm>
-            <a:off x="8138160" y="2743200"/>
-            <a:ext cx="3246120" cy="1828800"/>
-          </a:xfrm>
-          <a:prstGeom prst="roundRect">
-            <a:avLst/>
-          </a:prstGeom>
-          <a:solidFill>
-            <a:srgbClr val="70461B"/>
-          </a:solidFill>
-          <a:ln w="12700">
-            <a:solidFill>
-              <a:srgbClr val="FFFFFF"/>
-            </a:solidFill>
-            <a:prstDash val="solid"/>
-          </a:ln>
-        </p:spPr>
-      </p:sp>
-      <p:sp>
-        <p:nvSpPr>
-          <p:cNvPr id="11" name="Text 9"/>
-          <p:cNvSpPr/>
-          <p:nvPr/>
-        </p:nvSpPr>
-        <p:spPr>
-          <a:xfrm>
-            <a:off x="8366760" y="3063240"/>
-            <a:ext cx="2788920" cy="320040"/>
-          </a:xfrm>
-          <a:prstGeom prst="rect">
-            <a:avLst/>
-          </a:prstGeom>
-          <a:noFill/>
-          <a:ln/>
-        </p:spPr>
-        <p:txBody>
-          <a:bodyPr wrap="square" lIns="0" tIns="0" rIns="0" bIns="0" rtlCol="0" anchor="ctr"/>
-          <a:lstStyle/>
-          <a:p>
-            <a:pPr algn="ctr" indent="0" marL="0">
-              <a:buNone/>
-            </a:pPr>
-            <a:r>
-              <a:rPr lang="en-US" sz="1700" b="1" dirty="0">
-                <a:solidFill>
-                  <a:srgbClr val="FFFFFF"/>
-                </a:solidFill>
-              </a:rPr>
-              <a:t>MONITORAR</a:t>
-            </a:r>
-            <a:endParaRPr lang="en-US" sz="1700" dirty="0"/>
-          </a:p>
-        </p:txBody>
-      </p:sp>
-      <p:sp>
-        <p:nvSpPr>
-          <p:cNvPr id="12" name="Text 10"/>
-          <p:cNvSpPr/>
-          <p:nvPr/>
-        </p:nvSpPr>
-        <p:spPr>
-          <a:xfrm>
-            <a:off x="8412480" y="3657600"/>
-            <a:ext cx="2697480" cy="566928"/>
-          </a:xfrm>
-          <a:prstGeom prst="rect">
-            <a:avLst/>
-          </a:prstGeom>
-          <a:noFill/>
-          <a:ln/>
-        </p:spPr>
-        <p:txBody>
-          <a:bodyPr wrap="square" lIns="0" tIns="0" rIns="0" bIns="0" rtlCol="0" anchor="ctr"/>
-          <a:lstStyle/>
-          <a:p>
-            <a:pPr algn="ctr" indent="0" marL="0">
-              <a:buNone/>
-            </a:pPr>
-            <a:r>
-              <a:rPr lang="en-US" sz="1700" dirty="0">
-                <a:solidFill>
-                  <a:srgbClr val="FFFFFF"/>
-                </a:solidFill>
-              </a:rPr>
-              <a:t>correção imediata é inviável</a:t>
-            </a:r>
-            <a:endParaRPr lang="en-US" sz="1700" dirty="0"/>
-          </a:p>
-        </p:txBody>
-      </p:sp>
-      <p:sp>
-        <p:nvSpPr>
-          <p:cNvPr id="13" name="Text 11"/>
-          <p:cNvSpPr/>
-          <p:nvPr/>
-        </p:nvSpPr>
-        <p:spPr>
-          <a:xfrm>
-            <a:off x="822960" y="5806440"/>
-            <a:ext cx="10332720" cy="365760"/>
-          </a:xfrm>
-          <a:prstGeom prst="rect">
-            <a:avLst/>
-          </a:prstGeom>
-          <a:noFill/>
-          <a:ln/>
-        </p:spPr>
-        <p:txBody>
-          <a:bodyPr wrap="square" lIns="0" tIns="0" rIns="0" bIns="0" rtlCol="0" anchor="ctr"/>
-          <a:lstStyle/>
-          <a:p>
-            <a:pPr algn="ctr" indent="0" marL="0">
-              <a:buNone/>
-            </a:pPr>
-            <a:r>
-              <a:rPr lang="en-US" sz="1800" dirty="0">
-                <a:solidFill>
-                  <a:srgbClr val="D6E5F0"/>
-                </a:solidFill>
-              </a:rPr>
-              <a:t>Declare a premissa e a evidência de reteste.</a:t>
-            </a:r>
-            <a:endParaRPr lang="en-US" sz="1800" dirty="0"/>
           </a:p>
         </p:txBody>
       </p:sp>
@@ -5439,7 +7289,7 @@
                   <a:srgbClr val="087F7A"/>
                 </a:solidFill>
               </a:rPr>
-              <a:t>DEMONSTRAÇÃO</a:t>
+              <a:t>CONTROLE</a:t>
             </a:r>
             <a:endParaRPr lang="en-US" sz="1300" dirty="0"/>
           </a:p>
@@ -5477,7 +7327,7 @@
                   <a:srgbClr val="12304A"/>
                 </a:solidFill>
               </a:rPr>
-              <a:t>Preveja antes de abrir a rota</a:t>
+              <a:t>Uma medida que modifica o risco</a:t>
             </a:r>
             <a:endParaRPr lang="en-US" sz="3000" dirty="0"/>
           </a:p>
@@ -5515,7 +7365,7 @@
                   <a:srgbClr val="4B5E71"/>
                 </a:solidFill>
               </a:rPr>
-              <a:t>A exploração termina em tratamento e validação.</a:t>
+              <a:t>O controle entra depois que entendemos ativo, exposição e consequência.</a:t>
             </a:r>
             <a:endParaRPr lang="en-US" sz="1700" dirty="0"/>
           </a:p>
@@ -5529,8 +7379,8 @@
         </p:nvSpPr>
         <p:spPr>
           <a:xfrm>
-            <a:off x="393192" y="2240280"/>
-            <a:ext cx="2103120" cy="2331720"/>
+            <a:off x="502920" y="1965960"/>
+            <a:ext cx="2633472" cy="3063240"/>
           </a:xfrm>
           <a:prstGeom prst="roundRect">
             <a:avLst/>
@@ -5538,6 +7388,101 @@
           <a:solidFill>
             <a:srgbClr val="FFFFFF"/>
           </a:solidFill>
+          <a:ln w="25400">
+            <a:solidFill>
+              <a:srgbClr val="0B65C2"/>
+            </a:solidFill>
+            <a:prstDash val="solid"/>
+          </a:ln>
+        </p:spPr>
+      </p:sp>
+      <p:sp>
+        <p:nvSpPr>
+          <p:cNvPr id="6" name="Text 4"/>
+          <p:cNvSpPr/>
+          <p:nvPr/>
+        </p:nvSpPr>
+        <p:spPr>
+          <a:xfrm>
+            <a:off x="685800" y="2267712"/>
+            <a:ext cx="2267712" cy="274320"/>
+          </a:xfrm>
+          <a:prstGeom prst="rect">
+            <a:avLst/>
+          </a:prstGeom>
+          <a:noFill/>
+          <a:ln/>
+        </p:spPr>
+        <p:txBody>
+          <a:bodyPr wrap="square" lIns="0" tIns="0" rIns="0" bIns="0" rtlCol="0" anchor="ctr"/>
+          <a:lstStyle/>
+          <a:p>
+            <a:pPr algn="ctr" indent="0" marL="0">
+              <a:buNone/>
+            </a:pPr>
+            <a:r>
+              <a:rPr lang="en-US" sz="1400" b="1" dirty="0">
+                <a:solidFill>
+                  <a:srgbClr val="0B65C2"/>
+                </a:solidFill>
+              </a:rPr>
+              <a:t>PREVENTIVO</a:t>
+            </a:r>
+            <a:endParaRPr lang="en-US" sz="1400" dirty="0"/>
+          </a:p>
+        </p:txBody>
+      </p:sp>
+      <p:sp>
+        <p:nvSpPr>
+          <p:cNvPr id="7" name="Text 5"/>
+          <p:cNvSpPr/>
+          <p:nvPr/>
+        </p:nvSpPr>
+        <p:spPr>
+          <a:xfrm>
+            <a:off x="758952" y="2834640"/>
+            <a:ext cx="2121408" cy="530352"/>
+          </a:xfrm>
+          <a:prstGeom prst="rect">
+            <a:avLst/>
+          </a:prstGeom>
+          <a:noFill/>
+          <a:ln/>
+        </p:spPr>
+        <p:txBody>
+          <a:bodyPr wrap="square" lIns="0" tIns="0" rIns="0" bIns="0" rtlCol="0" anchor="ctr"/>
+          <a:lstStyle/>
+          <a:p>
+            <a:pPr algn="ctr" indent="0" marL="0">
+              <a:buNone/>
+            </a:pPr>
+            <a:r>
+              <a:rPr lang="en-US" sz="1700" b="1" dirty="0">
+                <a:solidFill>
+                  <a:srgbClr val="12304A"/>
+                </a:solidFill>
+              </a:rPr>
+              <a:t>evita ou dificulta</a:t>
+            </a:r>
+            <a:endParaRPr lang="en-US" sz="1700" dirty="0"/>
+          </a:p>
+        </p:txBody>
+      </p:sp>
+      <p:sp>
+        <p:nvSpPr>
+          <p:cNvPr id="8" name="Shape 6"/>
+          <p:cNvSpPr/>
+          <p:nvPr/>
+        </p:nvSpPr>
+        <p:spPr>
+          <a:xfrm>
+            <a:off x="914400" y="3566160"/>
+            <a:ext cx="1810512" cy="0"/>
+          </a:xfrm>
+          <a:prstGeom prst="line">
+            <a:avLst/>
+          </a:prstGeom>
+          <a:noFill/>
           <a:ln w="12700">
             <a:solidFill>
               <a:srgbClr val="C9D4DF"/>
@@ -5548,124 +7493,52 @@
       </p:sp>
       <p:sp>
         <p:nvSpPr>
-          <p:cNvPr id="6" name="Text 4"/>
-          <p:cNvSpPr/>
-          <p:nvPr/>
-        </p:nvSpPr>
-        <p:spPr>
-          <a:xfrm>
-            <a:off x="1106424" y="2468880"/>
-            <a:ext cx="658368" cy="502920"/>
-          </a:xfrm>
-          <a:prstGeom prst="rect">
-            <a:avLst/>
-          </a:prstGeom>
-          <a:solidFill>
-            <a:srgbClr val="0B65C2"/>
-          </a:solidFill>
-          <a:ln/>
-        </p:spPr>
-        <p:txBody>
-          <a:bodyPr wrap="square" lIns="0" tIns="0" rIns="0" bIns="0" rtlCol="0" anchor="ctr"/>
+          <p:cNvPr id="9" name="Text 7"/>
+          <p:cNvSpPr/>
+          <p:nvPr/>
+        </p:nvSpPr>
+        <p:spPr>
+          <a:xfrm>
+            <a:off x="758952" y="3858768"/>
+            <a:ext cx="2121408" cy="713232"/>
+          </a:xfrm>
+          <a:prstGeom prst="rect">
+            <a:avLst/>
+          </a:prstGeom>
+          <a:noFill/>
+          <a:ln/>
+        </p:spPr>
+        <p:txBody>
+          <a:bodyPr wrap="square" lIns="0" tIns="0" rIns="0" bIns="0" rtlCol="0" anchor="ctr">
+            <a:normAutofit/>
+          </a:bodyPr>
           <a:lstStyle/>
           <a:p>
             <a:pPr algn="ctr" indent="0" marL="0">
               <a:buNone/>
             </a:pPr>
             <a:r>
-              <a:rPr lang="en-US" sz="2200" b="1" dirty="0">
-                <a:solidFill>
-                  <a:srgbClr val="FFFFFF"/>
-                </a:solidFill>
-              </a:rPr>
-              <a:t>1</a:t>
-            </a:r>
-            <a:endParaRPr lang="en-US" sz="2200" dirty="0"/>
-          </a:p>
-        </p:txBody>
-      </p:sp>
-      <p:sp>
-        <p:nvSpPr>
-          <p:cNvPr id="7" name="Text 5"/>
-          <p:cNvSpPr/>
-          <p:nvPr/>
-        </p:nvSpPr>
-        <p:spPr>
-          <a:xfrm>
-            <a:off x="530352" y="3182112"/>
-            <a:ext cx="1828800" cy="292608"/>
-          </a:xfrm>
-          <a:prstGeom prst="rect">
-            <a:avLst/>
-          </a:prstGeom>
-          <a:noFill/>
-          <a:ln/>
-        </p:spPr>
-        <p:txBody>
-          <a:bodyPr wrap="square" lIns="0" tIns="0" rIns="0" bIns="0" rtlCol="0" anchor="ctr"/>
-          <a:lstStyle/>
-          <a:p>
-            <a:pPr algn="ctr" indent="0" marL="0">
-              <a:buNone/>
-            </a:pPr>
-            <a:r>
-              <a:rPr lang="en-US" sz="1400" b="1" dirty="0">
-                <a:solidFill>
-                  <a:srgbClr val="12304A"/>
-                </a:solidFill>
-              </a:rPr>
-              <a:t>CONFIRMAR</a:t>
-            </a:r>
-            <a:endParaRPr lang="en-US" sz="1400" dirty="0"/>
-          </a:p>
-        </p:txBody>
-      </p:sp>
-      <p:sp>
-        <p:nvSpPr>
-          <p:cNvPr id="8" name="Text 6"/>
-          <p:cNvSpPr/>
-          <p:nvPr/>
-        </p:nvSpPr>
-        <p:spPr>
-          <a:xfrm>
-            <a:off x="557784" y="3703320"/>
-            <a:ext cx="1773936" cy="502920"/>
-          </a:xfrm>
-          <a:prstGeom prst="rect">
-            <a:avLst/>
-          </a:prstGeom>
-          <a:noFill/>
-          <a:ln/>
-        </p:spPr>
-        <p:txBody>
-          <a:bodyPr wrap="square" lIns="0" tIns="0" rIns="0" bIns="0" rtlCol="0" anchor="ctr"/>
-          <a:lstStyle/>
-          <a:p>
-            <a:pPr algn="ctr" indent="0" marL="0">
-              <a:buNone/>
-            </a:pPr>
-            <a:r>
-              <a:rPr lang="en-US" sz="1600" dirty="0">
+              <a:rPr lang="en-US" sz="1550" dirty="0">
                 <a:solidFill>
                   <a:srgbClr val="172B4D"/>
                 </a:solidFill>
               </a:rPr>
-              <a:t>alvo e estado</a:t>
-            </a:r>
-            <a:endParaRPr lang="en-US" sz="1600" dirty="0"/>
-          </a:p>
-        </p:txBody>
-      </p:sp>
-      <p:sp>
-        <p:nvSpPr>
-          <p:cNvPr id="9" name="Shape 7"/>
-          <p:cNvSpPr/>
-          <p:nvPr/>
-        </p:nvSpPr>
-        <p:spPr>
-          <a:xfrm>
-            <a:off x="2752344" y="2240280"/>
-            <a:ext cx="2103120" cy="2331720"/>
+              <a:t>retirar o arquivo da área pública</a:t>
+            </a:r>
+            <a:endParaRPr lang="en-US" sz="1550" dirty="0"/>
+          </a:p>
+        </p:txBody>
+      </p:sp>
+      <p:sp>
+        <p:nvSpPr>
+          <p:cNvPr id="10" name="Shape 8"/>
+          <p:cNvSpPr/>
+          <p:nvPr/>
+        </p:nvSpPr>
+        <p:spPr>
+          <a:xfrm>
+            <a:off x="3392424" y="1965960"/>
+            <a:ext cx="2633472" cy="3063240"/>
           </a:xfrm>
           <a:prstGeom prst="roundRect">
             <a:avLst/>
@@ -5673,6 +7546,101 @@
           <a:solidFill>
             <a:srgbClr val="FFFFFF"/>
           </a:solidFill>
+          <a:ln w="25400">
+            <a:solidFill>
+              <a:srgbClr val="B75D00"/>
+            </a:solidFill>
+            <a:prstDash val="solid"/>
+          </a:ln>
+        </p:spPr>
+      </p:sp>
+      <p:sp>
+        <p:nvSpPr>
+          <p:cNvPr id="11" name="Text 9"/>
+          <p:cNvSpPr/>
+          <p:nvPr/>
+        </p:nvSpPr>
+        <p:spPr>
+          <a:xfrm>
+            <a:off x="3575304" y="2267712"/>
+            <a:ext cx="2267712" cy="274320"/>
+          </a:xfrm>
+          <a:prstGeom prst="rect">
+            <a:avLst/>
+          </a:prstGeom>
+          <a:noFill/>
+          <a:ln/>
+        </p:spPr>
+        <p:txBody>
+          <a:bodyPr wrap="square" lIns="0" tIns="0" rIns="0" bIns="0" rtlCol="0" anchor="ctr"/>
+          <a:lstStyle/>
+          <a:p>
+            <a:pPr algn="ctr" indent="0" marL="0">
+              <a:buNone/>
+            </a:pPr>
+            <a:r>
+              <a:rPr lang="en-US" sz="1400" b="1" dirty="0">
+                <a:solidFill>
+                  <a:srgbClr val="B75D00"/>
+                </a:solidFill>
+              </a:rPr>
+              <a:t>DETECTIVO</a:t>
+            </a:r>
+            <a:endParaRPr lang="en-US" sz="1400" dirty="0"/>
+          </a:p>
+        </p:txBody>
+      </p:sp>
+      <p:sp>
+        <p:nvSpPr>
+          <p:cNvPr id="12" name="Text 10"/>
+          <p:cNvSpPr/>
+          <p:nvPr/>
+        </p:nvSpPr>
+        <p:spPr>
+          <a:xfrm>
+            <a:off x="3648456" y="2834640"/>
+            <a:ext cx="2121408" cy="530352"/>
+          </a:xfrm>
+          <a:prstGeom prst="rect">
+            <a:avLst/>
+          </a:prstGeom>
+          <a:noFill/>
+          <a:ln/>
+        </p:spPr>
+        <p:txBody>
+          <a:bodyPr wrap="square" lIns="0" tIns="0" rIns="0" bIns="0" rtlCol="0" anchor="ctr"/>
+          <a:lstStyle/>
+          <a:p>
+            <a:pPr algn="ctr" indent="0" marL="0">
+              <a:buNone/>
+            </a:pPr>
+            <a:r>
+              <a:rPr lang="en-US" sz="1700" b="1" dirty="0">
+                <a:solidFill>
+                  <a:srgbClr val="12304A"/>
+                </a:solidFill>
+              </a:rPr>
+              <a:t>torna o evento observável</a:t>
+            </a:r>
+            <a:endParaRPr lang="en-US" sz="1700" dirty="0"/>
+          </a:p>
+        </p:txBody>
+      </p:sp>
+      <p:sp>
+        <p:nvSpPr>
+          <p:cNvPr id="13" name="Shape 11"/>
+          <p:cNvSpPr/>
+          <p:nvPr/>
+        </p:nvSpPr>
+        <p:spPr>
+          <a:xfrm>
+            <a:off x="3803904" y="3566160"/>
+            <a:ext cx="1810512" cy="0"/>
+          </a:xfrm>
+          <a:prstGeom prst="line">
+            <a:avLst/>
+          </a:prstGeom>
+          <a:noFill/>
           <a:ln w="12700">
             <a:solidFill>
               <a:srgbClr val="C9D4DF"/>
@@ -5683,124 +7651,52 @@
       </p:sp>
       <p:sp>
         <p:nvSpPr>
-          <p:cNvPr id="10" name="Text 8"/>
-          <p:cNvSpPr/>
-          <p:nvPr/>
-        </p:nvSpPr>
-        <p:spPr>
-          <a:xfrm>
-            <a:off x="3465576" y="2468880"/>
-            <a:ext cx="658368" cy="502920"/>
-          </a:xfrm>
-          <a:prstGeom prst="rect">
-            <a:avLst/>
-          </a:prstGeom>
-          <a:solidFill>
-            <a:srgbClr val="0B65C2"/>
-          </a:solidFill>
-          <a:ln/>
-        </p:spPr>
-        <p:txBody>
-          <a:bodyPr wrap="square" lIns="0" tIns="0" rIns="0" bIns="0" rtlCol="0" anchor="ctr"/>
+          <p:cNvPr id="14" name="Text 12"/>
+          <p:cNvSpPr/>
+          <p:nvPr/>
+        </p:nvSpPr>
+        <p:spPr>
+          <a:xfrm>
+            <a:off x="3648456" y="3858768"/>
+            <a:ext cx="2121408" cy="713232"/>
+          </a:xfrm>
+          <a:prstGeom prst="rect">
+            <a:avLst/>
+          </a:prstGeom>
+          <a:noFill/>
+          <a:ln/>
+        </p:spPr>
+        <p:txBody>
+          <a:bodyPr wrap="square" lIns="0" tIns="0" rIns="0" bIns="0" rtlCol="0" anchor="ctr">
+            <a:normAutofit/>
+          </a:bodyPr>
           <a:lstStyle/>
           <a:p>
             <a:pPr algn="ctr" indent="0" marL="0">
               <a:buNone/>
             </a:pPr>
             <a:r>
-              <a:rPr lang="en-US" sz="2200" b="1" dirty="0">
-                <a:solidFill>
-                  <a:srgbClr val="FFFFFF"/>
-                </a:solidFill>
-              </a:rPr>
-              <a:t>2</a:t>
-            </a:r>
-            <a:endParaRPr lang="en-US" sz="2200" dirty="0"/>
-          </a:p>
-        </p:txBody>
-      </p:sp>
-      <p:sp>
-        <p:nvSpPr>
-          <p:cNvPr id="11" name="Text 9"/>
-          <p:cNvSpPr/>
-          <p:nvPr/>
-        </p:nvSpPr>
-        <p:spPr>
-          <a:xfrm>
-            <a:off x="2889504" y="3182112"/>
-            <a:ext cx="1828800" cy="292608"/>
-          </a:xfrm>
-          <a:prstGeom prst="rect">
-            <a:avLst/>
-          </a:prstGeom>
-          <a:noFill/>
-          <a:ln/>
-        </p:spPr>
-        <p:txBody>
-          <a:bodyPr wrap="square" lIns="0" tIns="0" rIns="0" bIns="0" rtlCol="0" anchor="ctr"/>
-          <a:lstStyle/>
-          <a:p>
-            <a:pPr algn="ctr" indent="0" marL="0">
-              <a:buNone/>
-            </a:pPr>
-            <a:r>
-              <a:rPr lang="en-US" sz="1400" b="1" dirty="0">
-                <a:solidFill>
-                  <a:srgbClr val="12304A"/>
-                </a:solidFill>
-              </a:rPr>
-              <a:t>PREVER</a:t>
-            </a:r>
-            <a:endParaRPr lang="en-US" sz="1400" dirty="0"/>
-          </a:p>
-        </p:txBody>
-      </p:sp>
-      <p:sp>
-        <p:nvSpPr>
-          <p:cNvPr id="12" name="Text 10"/>
-          <p:cNvSpPr/>
-          <p:nvPr/>
-        </p:nvSpPr>
-        <p:spPr>
-          <a:xfrm>
-            <a:off x="2916936" y="3703320"/>
-            <a:ext cx="1773936" cy="502920"/>
-          </a:xfrm>
-          <a:prstGeom prst="rect">
-            <a:avLst/>
-          </a:prstGeom>
-          <a:noFill/>
-          <a:ln/>
-        </p:spPr>
-        <p:txBody>
-          <a:bodyPr wrap="square" lIns="0" tIns="0" rIns="0" bIns="0" rtlCol="0" anchor="ctr"/>
-          <a:lstStyle/>
-          <a:p>
-            <a:pPr algn="ctr" indent="0" marL="0">
-              <a:buNone/>
-            </a:pPr>
-            <a:r>
-              <a:rPr lang="en-US" sz="1600" dirty="0">
+              <a:rPr lang="en-US" sz="1550" dirty="0">
                 <a:solidFill>
                   <a:srgbClr val="172B4D"/>
                 </a:solidFill>
               </a:rPr>
-              <a:t>recurso e resposta</a:t>
-            </a:r>
-            <a:endParaRPr lang="en-US" sz="1600" dirty="0"/>
-          </a:p>
-        </p:txBody>
-      </p:sp>
-      <p:sp>
-        <p:nvSpPr>
-          <p:cNvPr id="13" name="Shape 11"/>
-          <p:cNvSpPr/>
-          <p:nvPr/>
-        </p:nvSpPr>
-        <p:spPr>
-          <a:xfrm>
-            <a:off x="5111496" y="2240280"/>
-            <a:ext cx="2103120" cy="2331720"/>
+              <a:t>registrar e alertar acesso à rota</a:t>
+            </a:r>
+            <a:endParaRPr lang="en-US" sz="1550" dirty="0"/>
+          </a:p>
+        </p:txBody>
+      </p:sp>
+      <p:sp>
+        <p:nvSpPr>
+          <p:cNvPr id="15" name="Shape 13"/>
+          <p:cNvSpPr/>
+          <p:nvPr/>
+        </p:nvSpPr>
+        <p:spPr>
+          <a:xfrm>
+            <a:off x="6281928" y="1965960"/>
+            <a:ext cx="2633472" cy="3063240"/>
           </a:xfrm>
           <a:prstGeom prst="roundRect">
             <a:avLst/>
@@ -5808,6 +7704,101 @@
           <a:solidFill>
             <a:srgbClr val="FFFFFF"/>
           </a:solidFill>
+          <a:ln w="25400">
+            <a:solidFill>
+              <a:srgbClr val="B42318"/>
+            </a:solidFill>
+            <a:prstDash val="solid"/>
+          </a:ln>
+        </p:spPr>
+      </p:sp>
+      <p:sp>
+        <p:nvSpPr>
+          <p:cNvPr id="16" name="Text 14"/>
+          <p:cNvSpPr/>
+          <p:nvPr/>
+        </p:nvSpPr>
+        <p:spPr>
+          <a:xfrm>
+            <a:off x="6464808" y="2267712"/>
+            <a:ext cx="2267712" cy="274320"/>
+          </a:xfrm>
+          <a:prstGeom prst="rect">
+            <a:avLst/>
+          </a:prstGeom>
+          <a:noFill/>
+          <a:ln/>
+        </p:spPr>
+        <p:txBody>
+          <a:bodyPr wrap="square" lIns="0" tIns="0" rIns="0" bIns="0" rtlCol="0" anchor="ctr"/>
+          <a:lstStyle/>
+          <a:p>
+            <a:pPr algn="ctr" indent="0" marL="0">
+              <a:buNone/>
+            </a:pPr>
+            <a:r>
+              <a:rPr lang="en-US" sz="1400" b="1" dirty="0">
+                <a:solidFill>
+                  <a:srgbClr val="B42318"/>
+                </a:solidFill>
+              </a:rPr>
+              <a:t>CORRETIVO</a:t>
+            </a:r>
+            <a:endParaRPr lang="en-US" sz="1400" dirty="0"/>
+          </a:p>
+        </p:txBody>
+      </p:sp>
+      <p:sp>
+        <p:nvSpPr>
+          <p:cNvPr id="17" name="Text 15"/>
+          <p:cNvSpPr/>
+          <p:nvPr/>
+        </p:nvSpPr>
+        <p:spPr>
+          <a:xfrm>
+            <a:off x="6537960" y="2834640"/>
+            <a:ext cx="2121408" cy="530352"/>
+          </a:xfrm>
+          <a:prstGeom prst="rect">
+            <a:avLst/>
+          </a:prstGeom>
+          <a:noFill/>
+          <a:ln/>
+        </p:spPr>
+        <p:txBody>
+          <a:bodyPr wrap="square" lIns="0" tIns="0" rIns="0" bIns="0" rtlCol="0" anchor="ctr"/>
+          <a:lstStyle/>
+          <a:p>
+            <a:pPr algn="ctr" indent="0" marL="0">
+              <a:buNone/>
+            </a:pPr>
+            <a:r>
+              <a:rPr lang="en-US" sz="1700" b="1" dirty="0">
+                <a:solidFill>
+                  <a:srgbClr val="12304A"/>
+                </a:solidFill>
+              </a:rPr>
+              <a:t>remove a causa ou restaura condição esperada</a:t>
+            </a:r>
+            <a:endParaRPr lang="en-US" sz="1700" dirty="0"/>
+          </a:p>
+        </p:txBody>
+      </p:sp>
+      <p:sp>
+        <p:nvSpPr>
+          <p:cNvPr id="18" name="Shape 16"/>
+          <p:cNvSpPr/>
+          <p:nvPr/>
+        </p:nvSpPr>
+        <p:spPr>
+          <a:xfrm>
+            <a:off x="6693408" y="3566160"/>
+            <a:ext cx="1810512" cy="0"/>
+          </a:xfrm>
+          <a:prstGeom prst="line">
+            <a:avLst/>
+          </a:prstGeom>
+          <a:noFill/>
           <a:ln w="12700">
             <a:solidFill>
               <a:srgbClr val="C9D4DF"/>
@@ -5818,259 +7809,52 @@
       </p:sp>
       <p:sp>
         <p:nvSpPr>
-          <p:cNvPr id="14" name="Text 12"/>
-          <p:cNvSpPr/>
-          <p:nvPr/>
-        </p:nvSpPr>
-        <p:spPr>
-          <a:xfrm>
-            <a:off x="5824728" y="2468880"/>
-            <a:ext cx="658368" cy="502920"/>
-          </a:xfrm>
-          <a:prstGeom prst="rect">
-            <a:avLst/>
-          </a:prstGeom>
-          <a:solidFill>
-            <a:srgbClr val="0B65C2"/>
-          </a:solidFill>
-          <a:ln/>
-        </p:spPr>
-        <p:txBody>
-          <a:bodyPr wrap="square" lIns="0" tIns="0" rIns="0" bIns="0" rtlCol="0" anchor="ctr"/>
+          <p:cNvPr id="19" name="Text 17"/>
+          <p:cNvSpPr/>
+          <p:nvPr/>
+        </p:nvSpPr>
+        <p:spPr>
+          <a:xfrm>
+            <a:off x="6537960" y="3858768"/>
+            <a:ext cx="2121408" cy="713232"/>
+          </a:xfrm>
+          <a:prstGeom prst="rect">
+            <a:avLst/>
+          </a:prstGeom>
+          <a:noFill/>
+          <a:ln/>
+        </p:spPr>
+        <p:txBody>
+          <a:bodyPr wrap="square" lIns="0" tIns="0" rIns="0" bIns="0" rtlCol="0" anchor="ctr">
+            <a:normAutofit/>
+          </a:bodyPr>
           <a:lstStyle/>
           <a:p>
             <a:pPr algn="ctr" indent="0" marL="0">
               <a:buNone/>
             </a:pPr>
             <a:r>
-              <a:rPr lang="en-US" sz="2200" b="1" dirty="0">
-                <a:solidFill>
-                  <a:srgbClr val="FFFFFF"/>
-                </a:solidFill>
-              </a:rPr>
-              <a:t>3</a:t>
-            </a:r>
-            <a:endParaRPr lang="en-US" sz="2200" dirty="0"/>
-          </a:p>
-        </p:txBody>
-      </p:sp>
-      <p:sp>
-        <p:nvSpPr>
-          <p:cNvPr id="15" name="Text 13"/>
-          <p:cNvSpPr/>
-          <p:nvPr/>
-        </p:nvSpPr>
-        <p:spPr>
-          <a:xfrm>
-            <a:off x="5248656" y="3182112"/>
-            <a:ext cx="1828800" cy="292608"/>
-          </a:xfrm>
-          <a:prstGeom prst="rect">
-            <a:avLst/>
-          </a:prstGeom>
-          <a:noFill/>
-          <a:ln/>
-        </p:spPr>
-        <p:txBody>
-          <a:bodyPr wrap="square" lIns="0" tIns="0" rIns="0" bIns="0" rtlCol="0" anchor="ctr"/>
-          <a:lstStyle/>
-          <a:p>
-            <a:pPr algn="ctr" indent="0" marL="0">
-              <a:buNone/>
-            </a:pPr>
-            <a:r>
-              <a:rPr lang="en-US" sz="1400" b="1" dirty="0">
-                <a:solidFill>
-                  <a:srgbClr val="12304A"/>
-                </a:solidFill>
-              </a:rPr>
-              <a:t>OBSERVAR</a:t>
-            </a:r>
-            <a:endParaRPr lang="en-US" sz="1400" dirty="0"/>
-          </a:p>
-        </p:txBody>
-      </p:sp>
-      <p:sp>
-        <p:nvSpPr>
-          <p:cNvPr id="16" name="Text 14"/>
-          <p:cNvSpPr/>
-          <p:nvPr/>
-        </p:nvSpPr>
-        <p:spPr>
-          <a:xfrm>
-            <a:off x="5276088" y="3703320"/>
-            <a:ext cx="1773936" cy="502920"/>
-          </a:xfrm>
-          <a:prstGeom prst="rect">
-            <a:avLst/>
-          </a:prstGeom>
-          <a:noFill/>
-          <a:ln/>
-        </p:spPr>
-        <p:txBody>
-          <a:bodyPr wrap="square" lIns="0" tIns="0" rIns="0" bIns="0" rtlCol="0" anchor="ctr"/>
-          <a:lstStyle/>
-          <a:p>
-            <a:pPr algn="ctr" indent="0" marL="0">
-              <a:buNone/>
-            </a:pPr>
-            <a:r>
-              <a:rPr lang="en-US" sz="1600" dirty="0">
+              <a:rPr lang="en-US" sz="1550" dirty="0">
                 <a:solidFill>
                   <a:srgbClr val="172B4D"/>
                 </a:solidFill>
               </a:rPr>
-              <a:t>requisição única</a:t>
-            </a:r>
-            <a:endParaRPr lang="en-US" sz="1600" dirty="0"/>
-          </a:p>
-        </p:txBody>
-      </p:sp>
-      <p:sp>
-        <p:nvSpPr>
-          <p:cNvPr id="17" name="Shape 15"/>
-          <p:cNvSpPr/>
-          <p:nvPr/>
-        </p:nvSpPr>
-        <p:spPr>
-          <a:xfrm>
-            <a:off x="7470648" y="2240280"/>
-            <a:ext cx="2103120" cy="2331720"/>
-          </a:xfrm>
-          <a:prstGeom prst="roundRect">
-            <a:avLst/>
-          </a:prstGeom>
-          <a:solidFill>
-            <a:srgbClr val="FFFFFF"/>
-          </a:solidFill>
-          <a:ln w="12700">
-            <a:solidFill>
-              <a:srgbClr val="C9D4DF"/>
-            </a:solidFill>
-            <a:prstDash val="solid"/>
-          </a:ln>
-        </p:spPr>
-      </p:sp>
-      <p:sp>
-        <p:nvSpPr>
-          <p:cNvPr id="18" name="Text 16"/>
-          <p:cNvSpPr/>
-          <p:nvPr/>
-        </p:nvSpPr>
-        <p:spPr>
-          <a:xfrm>
-            <a:off x="8183880" y="2468880"/>
-            <a:ext cx="658368" cy="502920"/>
-          </a:xfrm>
-          <a:prstGeom prst="rect">
-            <a:avLst/>
-          </a:prstGeom>
-          <a:solidFill>
-            <a:srgbClr val="0B65C2"/>
-          </a:solidFill>
-          <a:ln/>
-        </p:spPr>
-        <p:txBody>
-          <a:bodyPr wrap="square" lIns="0" tIns="0" rIns="0" bIns="0" rtlCol="0" anchor="ctr"/>
-          <a:lstStyle/>
-          <a:p>
-            <a:pPr algn="ctr" indent="0" marL="0">
-              <a:buNone/>
-            </a:pPr>
-            <a:r>
-              <a:rPr lang="en-US" sz="2200" b="1" dirty="0">
-                <a:solidFill>
-                  <a:srgbClr val="FFFFFF"/>
-                </a:solidFill>
-              </a:rPr>
-              <a:t>4</a:t>
-            </a:r>
-            <a:endParaRPr lang="en-US" sz="2200" dirty="0"/>
-          </a:p>
-        </p:txBody>
-      </p:sp>
-      <p:sp>
-        <p:nvSpPr>
-          <p:cNvPr id="19" name="Text 17"/>
-          <p:cNvSpPr/>
-          <p:nvPr/>
-        </p:nvSpPr>
-        <p:spPr>
-          <a:xfrm>
-            <a:off x="7607808" y="3182112"/>
-            <a:ext cx="1828800" cy="292608"/>
-          </a:xfrm>
-          <a:prstGeom prst="rect">
-            <a:avLst/>
-          </a:prstGeom>
-          <a:noFill/>
-          <a:ln/>
-        </p:spPr>
-        <p:txBody>
-          <a:bodyPr wrap="square" lIns="0" tIns="0" rIns="0" bIns="0" rtlCol="0" anchor="ctr"/>
-          <a:lstStyle/>
-          <a:p>
-            <a:pPr algn="ctr" indent="0" marL="0">
-              <a:buNone/>
-            </a:pPr>
-            <a:r>
-              <a:rPr lang="en-US" sz="1400" b="1" dirty="0">
-                <a:solidFill>
-                  <a:srgbClr val="12304A"/>
-                </a:solidFill>
-              </a:rPr>
-              <a:t>REGISTRAR</a:t>
-            </a:r>
-            <a:endParaRPr lang="en-US" sz="1400" dirty="0"/>
-          </a:p>
-        </p:txBody>
-      </p:sp>
-      <p:sp>
-        <p:nvSpPr>
-          <p:cNvPr id="20" name="Text 18"/>
-          <p:cNvSpPr/>
-          <p:nvPr/>
-        </p:nvSpPr>
-        <p:spPr>
-          <a:xfrm>
-            <a:off x="7635240" y="3703320"/>
-            <a:ext cx="1773936" cy="502920"/>
-          </a:xfrm>
-          <a:prstGeom prst="rect">
-            <a:avLst/>
-          </a:prstGeom>
-          <a:noFill/>
-          <a:ln/>
-        </p:spPr>
-        <p:txBody>
-          <a:bodyPr wrap="square" lIns="0" tIns="0" rIns="0" bIns="0" rtlCol="0" anchor="ctr"/>
-          <a:lstStyle/>
-          <a:p>
-            <a:pPr algn="ctr" indent="0" marL="0">
-              <a:buNone/>
-            </a:pPr>
-            <a:r>
-              <a:rPr lang="en-US" sz="1600" dirty="0">
-                <a:solidFill>
-                  <a:srgbClr val="172B4D"/>
-                </a:solidFill>
-              </a:rPr>
-              <a:t>causa e impacto</a:t>
-            </a:r>
-            <a:endParaRPr lang="en-US" sz="1600" dirty="0"/>
-          </a:p>
-        </p:txBody>
-      </p:sp>
-      <p:sp>
-        <p:nvSpPr>
-          <p:cNvPr id="21" name="Shape 19"/>
-          <p:cNvSpPr/>
-          <p:nvPr/>
-        </p:nvSpPr>
-        <p:spPr>
-          <a:xfrm>
-            <a:off x="9829800" y="2240280"/>
-            <a:ext cx="2103120" cy="2331720"/>
+              <a:t>corrigir publicação ou autorização</a:t>
+            </a:r>
+            <a:endParaRPr lang="en-US" sz="1550" dirty="0"/>
+          </a:p>
+        </p:txBody>
+      </p:sp>
+      <p:sp>
+        <p:nvSpPr>
+          <p:cNvPr id="20" name="Shape 18"/>
+          <p:cNvSpPr/>
+          <p:nvPr/>
+        </p:nvSpPr>
+        <p:spPr>
+          <a:xfrm>
+            <a:off x="9171432" y="1965960"/>
+            <a:ext cx="2633472" cy="3063240"/>
           </a:xfrm>
           <a:prstGeom prst="roundRect">
             <a:avLst/>
@@ -6088,21 +7872,55 @@
       </p:sp>
       <p:sp>
         <p:nvSpPr>
+          <p:cNvPr id="21" name="Text 19"/>
+          <p:cNvSpPr/>
+          <p:nvPr/>
+        </p:nvSpPr>
+        <p:spPr>
+          <a:xfrm>
+            <a:off x="9354312" y="2267712"/>
+            <a:ext cx="2267712" cy="274320"/>
+          </a:xfrm>
+          <a:prstGeom prst="rect">
+            <a:avLst/>
+          </a:prstGeom>
+          <a:noFill/>
+          <a:ln/>
+        </p:spPr>
+        <p:txBody>
+          <a:bodyPr wrap="square" lIns="0" tIns="0" rIns="0" bIns="0" rtlCol="0" anchor="ctr"/>
+          <a:lstStyle/>
+          <a:p>
+            <a:pPr algn="ctr" indent="0" marL="0">
+              <a:buNone/>
+            </a:pPr>
+            <a:r>
+              <a:rPr lang="en-US" sz="1400" b="1" dirty="0">
+                <a:solidFill>
+                  <a:srgbClr val="26734D"/>
+                </a:solidFill>
+              </a:rPr>
+              <a:t>RECUPERAÇÃO</a:t>
+            </a:r>
+            <a:endParaRPr lang="en-US" sz="1400" dirty="0"/>
+          </a:p>
+        </p:txBody>
+      </p:sp>
+      <p:sp>
+        <p:nvSpPr>
           <p:cNvPr id="22" name="Text 20"/>
           <p:cNvSpPr/>
           <p:nvPr/>
         </p:nvSpPr>
         <p:spPr>
           <a:xfrm>
-            <a:off x="10543032" y="2468880"/>
-            <a:ext cx="658368" cy="502920"/>
-          </a:xfrm>
-          <a:prstGeom prst="rect">
-            <a:avLst/>
-          </a:prstGeom>
-          <a:solidFill>
-            <a:srgbClr val="26734D"/>
-          </a:solidFill>
+            <a:off x="9427464" y="2834640"/>
+            <a:ext cx="2121408" cy="530352"/>
+          </a:xfrm>
+          <a:prstGeom prst="rect">
+            <a:avLst/>
+          </a:prstGeom>
+          <a:noFill/>
           <a:ln/>
         </p:spPr>
         <p:txBody>
@@ -6113,99 +7931,27 @@
               <a:buNone/>
             </a:pPr>
             <a:r>
-              <a:rPr lang="en-US" sz="2200" b="1" dirty="0">
-                <a:solidFill>
-                  <a:srgbClr val="FFFFFF"/>
-                </a:solidFill>
-              </a:rPr>
-              <a:t>5</a:t>
-            </a:r>
-            <a:endParaRPr lang="en-US" sz="2200" dirty="0"/>
-          </a:p>
-        </p:txBody>
-      </p:sp>
-      <p:sp>
-        <p:nvSpPr>
-          <p:cNvPr id="23" name="Text 21"/>
-          <p:cNvSpPr/>
-          <p:nvPr/>
-        </p:nvSpPr>
-        <p:spPr>
-          <a:xfrm>
-            <a:off x="9966960" y="3182112"/>
-            <a:ext cx="1828800" cy="292608"/>
-          </a:xfrm>
-          <a:prstGeom prst="rect">
-            <a:avLst/>
-          </a:prstGeom>
-          <a:noFill/>
-          <a:ln/>
-        </p:spPr>
-        <p:txBody>
-          <a:bodyPr wrap="square" lIns="0" tIns="0" rIns="0" bIns="0" rtlCol="0" anchor="ctr"/>
-          <a:lstStyle/>
-          <a:p>
-            <a:pPr algn="ctr" indent="0" marL="0">
-              <a:buNone/>
-            </a:pPr>
-            <a:r>
-              <a:rPr lang="en-US" sz="1400" b="1" dirty="0">
+              <a:rPr lang="en-US" sz="1700" b="1" dirty="0">
                 <a:solidFill>
                   <a:srgbClr val="12304A"/>
                 </a:solidFill>
               </a:rPr>
-              <a:t>VALIDAR</a:t>
-            </a:r>
-            <a:endParaRPr lang="en-US" sz="1400" dirty="0"/>
-          </a:p>
-        </p:txBody>
-      </p:sp>
-      <p:sp>
-        <p:nvSpPr>
-          <p:cNvPr id="24" name="Text 22"/>
-          <p:cNvSpPr/>
-          <p:nvPr/>
-        </p:nvSpPr>
-        <p:spPr>
-          <a:xfrm>
-            <a:off x="9994392" y="3703320"/>
-            <a:ext cx="1773936" cy="502920"/>
-          </a:xfrm>
-          <a:prstGeom prst="rect">
-            <a:avLst/>
-          </a:prstGeom>
-          <a:noFill/>
-          <a:ln/>
-        </p:spPr>
-        <p:txBody>
-          <a:bodyPr wrap="square" lIns="0" tIns="0" rIns="0" bIns="0" rtlCol="0" anchor="ctr"/>
-          <a:lstStyle/>
-          <a:p>
-            <a:pPr algn="ctr" indent="0" marL="0">
-              <a:buNone/>
-            </a:pPr>
-            <a:r>
-              <a:rPr lang="en-US" sz="1600" dirty="0">
-                <a:solidFill>
-                  <a:srgbClr val="172B4D"/>
-                </a:solidFill>
-              </a:rPr>
-              <a:t>controle e reteste</a:t>
-            </a:r>
-            <a:endParaRPr lang="en-US" sz="1600" dirty="0"/>
-          </a:p>
-        </p:txBody>
-      </p:sp>
-      <p:sp>
-        <p:nvSpPr>
-          <p:cNvPr id="25" name="Shape 23"/>
-          <p:cNvSpPr/>
-          <p:nvPr/>
-        </p:nvSpPr>
-        <p:spPr>
-          <a:xfrm>
-            <a:off x="548640" y="6473952"/>
-            <a:ext cx="11018520" cy="0"/>
+              <a:t>restabelece serviço/dados após impacto</a:t>
+            </a:r>
+            <a:endParaRPr lang="en-US" sz="1700" dirty="0"/>
+          </a:p>
+        </p:txBody>
+      </p:sp>
+      <p:sp>
+        <p:nvSpPr>
+          <p:cNvPr id="23" name="Shape 21"/>
+          <p:cNvSpPr/>
+          <p:nvPr/>
+        </p:nvSpPr>
+        <p:spPr>
+          <a:xfrm>
+            <a:off x="9582912" y="3566160"/>
+            <a:ext cx="1810512" cy="0"/>
           </a:xfrm>
           <a:prstGeom prst="line">
             <a:avLst/>
@@ -6221,7 +7967,104 @@
       </p:sp>
       <p:sp>
         <p:nvSpPr>
-          <p:cNvPr id="26" name="Text 24"/>
+          <p:cNvPr id="24" name="Text 22"/>
+          <p:cNvSpPr/>
+          <p:nvPr/>
+        </p:nvSpPr>
+        <p:spPr>
+          <a:xfrm>
+            <a:off x="9427464" y="3858768"/>
+            <a:ext cx="2121408" cy="713232"/>
+          </a:xfrm>
+          <a:prstGeom prst="rect">
+            <a:avLst/>
+          </a:prstGeom>
+          <a:noFill/>
+          <a:ln/>
+        </p:spPr>
+        <p:txBody>
+          <a:bodyPr wrap="square" lIns="0" tIns="0" rIns="0" bIns="0" rtlCol="0" anchor="ctr">
+            <a:normAutofit/>
+          </a:bodyPr>
+          <a:lstStyle/>
+          <a:p>
+            <a:pPr algn="ctr" indent="0" marL="0">
+              <a:buNone/>
+            </a:pPr>
+            <a:r>
+              <a:rPr lang="en-US" sz="1550" dirty="0">
+                <a:solidFill>
+                  <a:srgbClr val="172B4D"/>
+                </a:solidFill>
+              </a:rPr>
+              <a:t>restaurar versão íntegra e configuração</a:t>
+            </a:r>
+            <a:endParaRPr lang="en-US" sz="1550" dirty="0"/>
+          </a:p>
+        </p:txBody>
+      </p:sp>
+      <p:sp>
+        <p:nvSpPr>
+          <p:cNvPr id="25" name="Text 23"/>
+          <p:cNvSpPr/>
+          <p:nvPr/>
+        </p:nvSpPr>
+        <p:spPr>
+          <a:xfrm>
+            <a:off x="960120" y="5394960"/>
+            <a:ext cx="10241280" cy="475488"/>
+          </a:xfrm>
+          <a:prstGeom prst="rect">
+            <a:avLst/>
+          </a:prstGeom>
+          <a:noFill/>
+          <a:ln/>
+        </p:spPr>
+        <p:txBody>
+          <a:bodyPr wrap="square" lIns="0" tIns="0" rIns="0" bIns="0" rtlCol="0" anchor="ctr"/>
+          <a:lstStyle/>
+          <a:p>
+            <a:pPr algn="ctr" indent="0" marL="0">
+              <a:buNone/>
+            </a:pPr>
+            <a:r>
+              <a:rPr lang="en-US" sz="1800" b="1" dirty="0">
+                <a:solidFill>
+                  <a:srgbClr val="12304A"/>
+                </a:solidFill>
+              </a:rPr>
+              <a:t>Controles podem atuar em camadas. Detectar não substitui prevenir ou corrigir quando a exposição permanece.</a:t>
+            </a:r>
+            <a:endParaRPr lang="en-US" sz="1800" dirty="0"/>
+          </a:p>
+        </p:txBody>
+      </p:sp>
+      <p:sp>
+        <p:nvSpPr>
+          <p:cNvPr id="26" name="Shape 24"/>
+          <p:cNvSpPr/>
+          <p:nvPr/>
+        </p:nvSpPr>
+        <p:spPr>
+          <a:xfrm>
+            <a:off x="548640" y="6473952"/>
+            <a:ext cx="11018520" cy="0"/>
+          </a:xfrm>
+          <a:prstGeom prst="line">
+            <a:avLst/>
+          </a:prstGeom>
+          <a:noFill/>
+          <a:ln w="12700">
+            <a:solidFill>
+              <a:srgbClr val="C9D4DF"/>
+            </a:solidFill>
+            <a:prstDash val="solid"/>
+          </a:ln>
+        </p:spPr>
+      </p:sp>
+      <p:sp>
+        <p:nvSpPr>
+          <p:cNvPr id="27" name="Text 25"/>
           <p:cNvSpPr/>
           <p:nvPr/>
         </p:nvSpPr>
@@ -6257,7 +8100,7 @@
       </p:sp>
       <p:sp>
         <p:nvSpPr>
-          <p:cNvPr id="27" name="Text 25"/>
+          <p:cNvPr id="28" name="Text 26"/>
           <p:cNvSpPr/>
           <p:nvPr/>
         </p:nvSpPr>
@@ -6285,7 +8128,7 @@
                   <a:srgbClr val="4B5E71"/>
                 </a:solidFill>
               </a:rPr>
-              <a:t>OWASP Juice Shop — ambiente local autorizado</a:t>
+              <a:t>NIST CSF 2.0 — Protect, Detect, Respond e Recover</a:t>
             </a:r>
             <a:endParaRPr lang="en-US" sz="900" dirty="0"/>
           </a:p>
@@ -6305,7 +8148,7 @@
     <p:bg>
       <p:bgPr>
         <a:solidFill>
-          <a:srgbClr val="FFFFFF"/>
+          <a:srgbClr val="12304A"/>
         </a:solidFill>
       </p:bgPr>
     </p:bg>
@@ -6331,8 +8174,8 @@
         </p:nvSpPr>
         <p:spPr>
           <a:xfrm>
-            <a:off x="640080" y="384048"/>
-            <a:ext cx="4389120" cy="256032"/>
+            <a:off x="731520" y="640080"/>
+            <a:ext cx="3657600" cy="274320"/>
           </a:xfrm>
           <a:prstGeom prst="rect">
             <a:avLst/>
@@ -6348,14 +8191,14 @@
               <a:buNone/>
             </a:pPr>
             <a:r>
-              <a:rPr lang="en-US" sz="1300" b="1" spc="100" kern="0" dirty="0">
-                <a:solidFill>
-                  <a:srgbClr val="087F7A"/>
-                </a:solidFill>
-              </a:rPr>
-              <a:t>PRÁTICA</a:t>
-            </a:r>
-            <a:endParaRPr lang="en-US" sz="1300" dirty="0"/>
+              <a:rPr lang="en-US" sz="1400" b="1" spc="120" kern="0" dirty="0">
+                <a:solidFill>
+                  <a:srgbClr val="7DE0D8"/>
+                </a:solidFill>
+              </a:rPr>
+              <a:t>CHECKPOINT 2</a:t>
+            </a:r>
+            <a:endParaRPr lang="en-US" sz="1400" dirty="0"/>
           </a:p>
         </p:txBody>
       </p:sp>
@@ -6367,94 +8210,54 @@
         </p:nvSpPr>
         <p:spPr>
           <a:xfrm>
-            <a:off x="640080" y="768096"/>
-            <a:ext cx="10881360" cy="658368"/>
-          </a:xfrm>
-          <a:prstGeom prst="rect">
-            <a:avLst/>
-          </a:prstGeom>
-          <a:noFill/>
-          <a:ln/>
-        </p:spPr>
-        <p:txBody>
-          <a:bodyPr wrap="square" lIns="0" tIns="0" rIns="0" bIns="0" rtlCol="0" anchor="ctr">
-            <a:normAutofit/>
-          </a:bodyPr>
+            <a:off x="731520" y="1325880"/>
+            <a:ext cx="9875520" cy="822960"/>
+          </a:xfrm>
+          <a:prstGeom prst="rect">
+            <a:avLst/>
+          </a:prstGeom>
+          <a:noFill/>
+          <a:ln/>
+        </p:spPr>
+        <p:txBody>
+          <a:bodyPr wrap="square" lIns="0" tIns="0" rIns="0" bIns="0" rtlCol="0" anchor="ctr"/>
           <a:lstStyle/>
           <a:p>
             <a:pPr indent="0" marL="0">
               <a:buNone/>
             </a:pPr>
             <a:r>
-              <a:rPr lang="en-US" sz="3000" b="1" dirty="0">
-                <a:solidFill>
-                  <a:srgbClr val="12304A"/>
-                </a:solidFill>
-              </a:rPr>
-              <a:t>Suba localmente, investigue e encerre com segurança</a:t>
-            </a:r>
-            <a:endParaRPr lang="en-US" sz="3000" dirty="0"/>
-          </a:p>
-        </p:txBody>
-      </p:sp>
-      <p:sp>
-        <p:nvSpPr>
-          <p:cNvPr id="4" name="Text 2"/>
-          <p:cNvSpPr/>
-          <p:nvPr/>
-        </p:nvSpPr>
-        <p:spPr>
-          <a:xfrm>
-            <a:off x="658368" y="1508760"/>
-            <a:ext cx="10424160" cy="402336"/>
-          </a:xfrm>
-          <a:prstGeom prst="rect">
-            <a:avLst/>
-          </a:prstGeom>
-          <a:noFill/>
-          <a:ln/>
-        </p:spPr>
-        <p:txBody>
-          <a:bodyPr wrap="square" lIns="0" tIns="0" rIns="0" bIns="0" rtlCol="0" anchor="ctr">
-            <a:normAutofit/>
-          </a:bodyPr>
-          <a:lstStyle/>
-          <a:p>
-            <a:pPr indent="0" marL="0">
-              <a:buNone/>
-            </a:pPr>
-            <a:r>
-              <a:rPr lang="en-US" sz="1700" dirty="0">
-                <a:solidFill>
-                  <a:srgbClr val="4B5E71"/>
-                </a:solidFill>
-              </a:rPr>
-              <a:t>Cada estudante acessa seu próprio container em http://127.0.0.1:3000.</a:t>
-            </a:r>
-            <a:endParaRPr lang="en-US" sz="1700" dirty="0"/>
-          </a:p>
-        </p:txBody>
-      </p:sp>
-      <p:sp>
-        <p:nvSpPr>
-          <p:cNvPr id="5" name="Shape 3"/>
-          <p:cNvSpPr/>
-          <p:nvPr/>
-        </p:nvSpPr>
-        <p:spPr>
-          <a:xfrm>
-            <a:off x="594360" y="1965960"/>
-            <a:ext cx="7178040" cy="3520440"/>
+              <a:rPr lang="en-US" sz="3800" b="1" dirty="0">
+                <a:solidFill>
+                  <a:srgbClr val="FFFFFF"/>
+                </a:solidFill>
+              </a:rPr>
+              <a:t>Qual controle você defenderia?</a:t>
+            </a:r>
+            <a:endParaRPr lang="en-US" sz="3800" dirty="0"/>
+          </a:p>
+        </p:txBody>
+      </p:sp>
+      <p:sp>
+        <p:nvSpPr>
+          <p:cNvPr id="4" name="Shape 2"/>
+          <p:cNvSpPr/>
+          <p:nvPr/>
+        </p:nvSpPr>
+        <p:spPr>
+          <a:xfrm>
+            <a:off x="731520" y="2743200"/>
+            <a:ext cx="3246120" cy="1828800"/>
           </a:xfrm>
           <a:prstGeom prst="roundRect">
             <a:avLst/>
           </a:prstGeom>
           <a:solidFill>
-            <a:srgbClr val="E7F5F3"/>
+            <a:srgbClr val="174C76"/>
           </a:solidFill>
-          <a:ln w="25400">
+          <a:ln w="12700">
             <a:solidFill>
-              <a:srgbClr val="087F7A"/>
+              <a:srgbClr val="FFFFFF"/>
             </a:solidFill>
             <a:prstDash val="solid"/>
           </a:ln>
@@ -6462,14 +8265,50 @@
       </p:sp>
       <p:sp>
         <p:nvSpPr>
+          <p:cNvPr id="5" name="Text 3"/>
+          <p:cNvSpPr/>
+          <p:nvPr/>
+        </p:nvSpPr>
+        <p:spPr>
+          <a:xfrm>
+            <a:off x="960120" y="3063240"/>
+            <a:ext cx="2788920" cy="320040"/>
+          </a:xfrm>
+          <a:prstGeom prst="rect">
+            <a:avLst/>
+          </a:prstGeom>
+          <a:noFill/>
+          <a:ln/>
+        </p:spPr>
+        <p:txBody>
+          <a:bodyPr wrap="square" lIns="0" tIns="0" rIns="0" bIns="0" rtlCol="0" anchor="ctr"/>
+          <a:lstStyle/>
+          <a:p>
+            <a:pPr algn="ctr" indent="0" marL="0">
+              <a:buNone/>
+            </a:pPr>
+            <a:r>
+              <a:rPr lang="en-US" sz="1700" b="1" dirty="0">
+                <a:solidFill>
+                  <a:srgbClr val="FFFFFF"/>
+                </a:solidFill>
+              </a:rPr>
+              <a:t>REMOVER</a:t>
+            </a:r>
+            <a:endParaRPr lang="en-US" sz="1700" dirty="0"/>
+          </a:p>
+        </p:txBody>
+      </p:sp>
+      <p:sp>
+        <p:nvSpPr>
           <p:cNvPr id="6" name="Text 4"/>
           <p:cNvSpPr/>
           <p:nvPr/>
         </p:nvSpPr>
         <p:spPr>
           <a:xfrm>
-            <a:off x="932688" y="2286000"/>
-            <a:ext cx="6217920" cy="274320"/>
+            <a:off x="1005840" y="3657600"/>
+            <a:ext cx="2697480" cy="566928"/>
           </a:xfrm>
           <a:prstGeom prst="rect">
             <a:avLst/>
@@ -6481,319 +8320,41 @@
           <a:bodyPr wrap="square" lIns="0" tIns="0" rIns="0" bIns="0" rtlCol="0" anchor="ctr"/>
           <a:lstStyle/>
           <a:p>
-            <a:pPr indent="0" marL="0">
-              <a:buNone/>
-            </a:pPr>
-            <a:r>
-              <a:rPr lang="en-US" sz="1300" b="1" dirty="0">
-                <a:solidFill>
-                  <a:srgbClr val="087F7A"/>
-                </a:solidFill>
-              </a:rPr>
-              <a:t>PREPARAÇÃO — POWERSHELL OU TERMINAL LINUX</a:t>
-            </a:r>
-            <a:endParaRPr lang="en-US" sz="1300" dirty="0"/>
-          </a:p>
-        </p:txBody>
-      </p:sp>
-      <p:sp>
-        <p:nvSpPr>
-          <p:cNvPr id="7" name="Text 5"/>
-          <p:cNvSpPr/>
-          <p:nvPr/>
-        </p:nvSpPr>
-        <p:spPr>
-          <a:xfrm>
-            <a:off x="932688" y="2761488"/>
-            <a:ext cx="6217920" cy="1143000"/>
-          </a:xfrm>
-          <a:prstGeom prst="rect">
-            <a:avLst/>
-          </a:prstGeom>
-          <a:noFill/>
-          <a:ln/>
-        </p:spPr>
-        <p:txBody>
-          <a:bodyPr wrap="square" lIns="0" tIns="0" rIns="0" bIns="0" rtlCol="0" anchor="ctr">
-            <a:normAutofit/>
-          </a:bodyPr>
-          <a:lstStyle/>
-          <a:p>
-            <a:pPr indent="0" marL="0">
-              <a:buNone/>
-            </a:pPr>
-            <a:r>
-              <a:rPr lang="en-US" sz="1550" dirty="0">
-                <a:solidFill>
-                  <a:srgbClr val="12304A"/>
-                </a:solidFill>
-                <a:latin typeface="Courier New" pitchFamily="34" charset="0"/>
-                <a:ea typeface="Courier New" pitchFamily="34" charset="-122"/>
-                <a:cs typeface="Courier New" pitchFamily="34" charset="-120"/>
-              </a:rPr>
-              <a:t>docker pull bkimminich/juice-shop</a:t>
-            </a:r>
-            <a:endParaRPr lang="en-US" sz="1550" dirty="0"/>
-          </a:p>
-          <a:p>
-            <a:pPr indent="0" marL="0">
-              <a:buNone/>
-            </a:pPr>
-            <a:r>
-              <a:rPr lang="en-US" sz="1550" dirty="0">
-                <a:solidFill>
-                  <a:srgbClr val="12304A"/>
-                </a:solidFill>
-                <a:latin typeface="Courier New" pitchFamily="34" charset="0"/>
-                <a:ea typeface="Courier New" pitchFamily="34" charset="-122"/>
-                <a:cs typeface="Courier New" pitchFamily="34" charset="-120"/>
-              </a:rPr>
-              <a:t>docker run --rm -d --name juice-shop-a02 -p 127.0.0.1:3000:3000 bkimminich/juice-shop</a:t>
-            </a:r>
-            <a:endParaRPr lang="en-US" sz="1550" dirty="0"/>
-          </a:p>
-        </p:txBody>
-      </p:sp>
-      <p:sp>
-        <p:nvSpPr>
-          <p:cNvPr id="8" name="Text 6"/>
-          <p:cNvSpPr/>
-          <p:nvPr/>
-        </p:nvSpPr>
-        <p:spPr>
-          <a:xfrm>
-            <a:off x="932688" y="4261104"/>
-            <a:ext cx="6035040" cy="384048"/>
-          </a:xfrm>
-          <a:prstGeom prst="rect">
-            <a:avLst/>
-          </a:prstGeom>
-          <a:noFill/>
-          <a:ln/>
-        </p:spPr>
-        <p:txBody>
-          <a:bodyPr wrap="square" lIns="0" tIns="0" rIns="0" bIns="0" rtlCol="0" anchor="ctr"/>
-          <a:lstStyle/>
-          <a:p>
-            <a:pPr indent="0" marL="0">
-              <a:buNone/>
-            </a:pPr>
-            <a:r>
-              <a:rPr lang="en-US" sz="1900" b="1" dirty="0">
-                <a:solidFill>
-                  <a:srgbClr val="0B65C2"/>
-                </a:solidFill>
-              </a:rPr>
-              <a:t>ABRA  http://127.0.0.1:3000</a:t>
-            </a:r>
-            <a:endParaRPr lang="en-US" sz="1900" dirty="0"/>
-          </a:p>
-        </p:txBody>
-      </p:sp>
-      <p:sp>
-        <p:nvSpPr>
-          <p:cNvPr id="9" name="Text 7"/>
-          <p:cNvSpPr/>
-          <p:nvPr/>
-        </p:nvSpPr>
-        <p:spPr>
-          <a:xfrm>
-            <a:off x="932688" y="4846320"/>
-            <a:ext cx="6035040" cy="310896"/>
-          </a:xfrm>
-          <a:prstGeom prst="rect">
-            <a:avLst/>
-          </a:prstGeom>
-          <a:noFill/>
-          <a:ln/>
-        </p:spPr>
-        <p:txBody>
-          <a:bodyPr wrap="square" lIns="0" tIns="0" rIns="0" bIns="0" rtlCol="0" anchor="ctr"/>
-          <a:lstStyle/>
-          <a:p>
-            <a:pPr indent="0" marL="0">
-              <a:buNone/>
-            </a:pPr>
-            <a:r>
-              <a:rPr lang="en-US" sz="1500" b="1" dirty="0">
-                <a:solidFill>
-                  <a:srgbClr val="B42318"/>
-                </a:solidFill>
-              </a:rPr>
-              <a:t>ENCERRE  docker stop juice-shop-a02</a:t>
-            </a:r>
-            <a:endParaRPr lang="en-US" sz="1500" dirty="0"/>
-          </a:p>
-        </p:txBody>
-      </p:sp>
-      <p:sp>
-        <p:nvSpPr>
-          <p:cNvPr id="10" name="Text 8"/>
-          <p:cNvSpPr/>
-          <p:nvPr/>
-        </p:nvSpPr>
-        <p:spPr>
-          <a:xfrm>
-            <a:off x="8275320" y="2240280"/>
-            <a:ext cx="2377440" cy="274320"/>
-          </a:xfrm>
-          <a:prstGeom prst="rect">
-            <a:avLst/>
-          </a:prstGeom>
-          <a:noFill/>
-          <a:ln/>
-        </p:spPr>
-        <p:txBody>
-          <a:bodyPr wrap="square" lIns="0" tIns="0" rIns="0" bIns="0" rtlCol="0" anchor="ctr"/>
-          <a:lstStyle/>
-          <a:p>
-            <a:pPr indent="0" marL="0">
-              <a:buNone/>
-            </a:pPr>
-            <a:r>
-              <a:rPr lang="en-US" sz="1500" b="1" dirty="0">
-                <a:solidFill>
-                  <a:srgbClr val="0B65C2"/>
-                </a:solidFill>
-              </a:rPr>
-              <a:t>ENTREGA</a:t>
-            </a:r>
-            <a:endParaRPr lang="en-US" sz="1500" dirty="0"/>
-          </a:p>
-        </p:txBody>
-      </p:sp>
-      <p:sp>
-        <p:nvSpPr>
-          <p:cNvPr id="11" name="Text 9"/>
-          <p:cNvSpPr/>
-          <p:nvPr/>
-        </p:nvSpPr>
-        <p:spPr>
-          <a:xfrm>
-            <a:off x="8275320" y="2761488"/>
-            <a:ext cx="2926080" cy="1600200"/>
-          </a:xfrm>
-          <a:prstGeom prst="rect">
-            <a:avLst/>
-          </a:prstGeom>
-          <a:noFill/>
-          <a:ln/>
-        </p:spPr>
-        <p:txBody>
-          <a:bodyPr wrap="square" lIns="0" tIns="0" rIns="0" bIns="0" rtlCol="0" anchor="ctr"/>
-          <a:lstStyle/>
-          <a:p>
-            <a:pPr indent="0" marL="0">
-              <a:buNone/>
-            </a:pPr>
-            <a:r>
-              <a:rPr lang="en-US" sz="1850" b="1" dirty="0">
-                <a:solidFill>
-                  <a:srgbClr val="12304A"/>
-                </a:solidFill>
-              </a:rPr>
-              <a:t>Inventário do Juice Shop</a:t>
-            </a:r>
-            <a:endParaRPr lang="en-US" sz="1850" dirty="0"/>
-          </a:p>
-          <a:p>
-            <a:pPr indent="0" marL="0">
-              <a:buNone/>
-            </a:pPr>
-            <a:r>
-              <a:rPr lang="en-US" sz="1850" b="1" dirty="0">
-                <a:solidFill>
-                  <a:srgbClr val="12304A"/>
-                </a:solidFill>
-              </a:rPr>
-              <a:t>Evidência interpretada</a:t>
-            </a:r>
-            <a:endParaRPr lang="en-US" sz="1850" dirty="0"/>
-          </a:p>
-          <a:p>
-            <a:pPr indent="0" marL="0">
-              <a:buNone/>
-            </a:pPr>
-            <a:r>
-              <a:rPr lang="en-US" sz="1850" b="1" dirty="0">
-                <a:solidFill>
-                  <a:srgbClr val="12304A"/>
-                </a:solidFill>
-              </a:rPr>
-              <a:t>Controle justificado</a:t>
-            </a:r>
-            <a:endParaRPr lang="en-US" sz="1850" dirty="0"/>
-          </a:p>
-          <a:p>
-            <a:pPr indent="0" marL="0">
-              <a:buNone/>
-            </a:pPr>
-            <a:r>
-              <a:rPr lang="en-US" sz="1850" b="1" dirty="0">
-                <a:solidFill>
-                  <a:srgbClr val="12304A"/>
-                </a:solidFill>
-              </a:rPr>
-              <a:t>Reteste definido</a:t>
-            </a:r>
-            <a:endParaRPr lang="en-US" sz="1850" dirty="0"/>
-          </a:p>
-        </p:txBody>
-      </p:sp>
-      <p:sp>
-        <p:nvSpPr>
-          <p:cNvPr id="12" name="Text 10"/>
-          <p:cNvSpPr/>
-          <p:nvPr/>
-        </p:nvSpPr>
-        <p:spPr>
-          <a:xfrm>
-            <a:off x="8275320" y="4754880"/>
-            <a:ext cx="2926080" cy="457200"/>
-          </a:xfrm>
-          <a:prstGeom prst="rect">
-            <a:avLst/>
-          </a:prstGeom>
-          <a:noFill/>
-          <a:ln/>
-        </p:spPr>
-        <p:txBody>
-          <a:bodyPr wrap="square" lIns="0" tIns="0" rIns="0" bIns="0" rtlCol="0" anchor="ctr"/>
-          <a:lstStyle/>
-          <a:p>
-            <a:pPr indent="0" marL="0">
-              <a:buNone/>
-            </a:pPr>
-            <a:r>
-              <a:rPr lang="en-US" sz="1400" dirty="0">
-                <a:solidFill>
-                  <a:srgbClr val="B42318"/>
-                </a:solidFill>
-              </a:rPr>
-              <a:t>Sem credenciais ou dados reais</a:t>
-            </a:r>
-            <a:endParaRPr lang="en-US" sz="1400" dirty="0"/>
-          </a:p>
-        </p:txBody>
-      </p:sp>
-      <p:sp>
-        <p:nvSpPr>
-          <p:cNvPr id="13" name="Shape 11"/>
-          <p:cNvSpPr/>
-          <p:nvPr/>
-        </p:nvSpPr>
-        <p:spPr>
-          <a:xfrm>
-            <a:off x="548640" y="6473952"/>
-            <a:ext cx="11018520" cy="0"/>
-          </a:xfrm>
-          <a:prstGeom prst="line">
-            <a:avLst/>
-          </a:prstGeom>
-          <a:noFill/>
+            <a:pPr algn="ctr" indent="0" marL="0">
+              <a:buNone/>
+            </a:pPr>
+            <a:r>
+              <a:rPr lang="en-US" sz="1700" dirty="0">
+                <a:solidFill>
+                  <a:srgbClr val="FFFFFF"/>
+                </a:solidFill>
+              </a:rPr>
+              <a:t>recurso não deveria ser servido</a:t>
+            </a:r>
+            <a:endParaRPr lang="en-US" sz="1700" dirty="0"/>
+          </a:p>
+        </p:txBody>
+      </p:sp>
+      <p:sp>
+        <p:nvSpPr>
+          <p:cNvPr id="7" name="Shape 5"/>
+          <p:cNvSpPr/>
+          <p:nvPr/>
+        </p:nvSpPr>
+        <p:spPr>
+          <a:xfrm>
+            <a:off x="4434840" y="2743200"/>
+            <a:ext cx="3246120" cy="1828800"/>
+          </a:xfrm>
+          <a:prstGeom prst="roundRect">
+            <a:avLst/>
+          </a:prstGeom>
+          <a:solidFill>
+            <a:srgbClr val="12635F"/>
+          </a:solidFill>
           <a:ln w="12700">
             <a:solidFill>
-              <a:srgbClr val="C9D4DF"/>
+              <a:srgbClr val="FFFFFF"/>
             </a:solidFill>
             <a:prstDash val="solid"/>
           </a:ln>
@@ -6801,14 +8362,14 @@
       </p:sp>
       <p:sp>
         <p:nvSpPr>
-          <p:cNvPr id="14" name="Text 12"/>
-          <p:cNvSpPr/>
-          <p:nvPr/>
-        </p:nvSpPr>
-        <p:spPr>
-          <a:xfrm>
-            <a:off x="594360" y="6528816"/>
-            <a:ext cx="3657600" cy="182880"/>
+          <p:cNvPr id="8" name="Text 6"/>
+          <p:cNvSpPr/>
+          <p:nvPr/>
+        </p:nvSpPr>
+        <p:spPr>
+          <a:xfrm>
+            <a:off x="4663440" y="3063240"/>
+            <a:ext cx="2788920" cy="320040"/>
           </a:xfrm>
           <a:prstGeom prst="rect">
             <a:avLst/>
@@ -6820,31 +8381,31 @@
           <a:bodyPr wrap="square" lIns="0" tIns="0" rIns="0" bIns="0" rtlCol="0" anchor="ctr"/>
           <a:lstStyle/>
           <a:p>
-            <a:pPr indent="0" marL="0">
-              <a:buNone/>
-            </a:pPr>
-            <a:r>
-              <a:rPr lang="en-US" sz="1000" dirty="0">
-                <a:solidFill>
-                  <a:srgbClr val="4B5E71"/>
-                </a:solidFill>
-              </a:rPr>
-              <a:t>A02  •  Segurança Digital</a:t>
-            </a:r>
-            <a:endParaRPr lang="en-US" sz="1000" dirty="0"/>
-          </a:p>
-        </p:txBody>
-      </p:sp>
-      <p:sp>
-        <p:nvSpPr>
-          <p:cNvPr id="15" name="Text 13"/>
-          <p:cNvSpPr/>
-          <p:nvPr/>
-        </p:nvSpPr>
-        <p:spPr>
-          <a:xfrm>
-            <a:off x="5943600" y="6528816"/>
-            <a:ext cx="5623560" cy="182880"/>
+            <a:pPr algn="ctr" indent="0" marL="0">
+              <a:buNone/>
+            </a:pPr>
+            <a:r>
+              <a:rPr lang="en-US" sz="1700" b="1" dirty="0">
+                <a:solidFill>
+                  <a:srgbClr val="FFFFFF"/>
+                </a:solidFill>
+              </a:rPr>
+              <a:t>AUTORIZAR</a:t>
+            </a:r>
+            <a:endParaRPr lang="en-US" sz="1700" dirty="0"/>
+          </a:p>
+        </p:txBody>
+      </p:sp>
+      <p:sp>
+        <p:nvSpPr>
+          <p:cNvPr id="9" name="Text 7"/>
+          <p:cNvSpPr/>
+          <p:nvPr/>
+        </p:nvSpPr>
+        <p:spPr>
+          <a:xfrm>
+            <a:off x="4709160" y="3657600"/>
+            <a:ext cx="2697480" cy="566928"/>
           </a:xfrm>
           <a:prstGeom prst="rect">
             <a:avLst/>
@@ -6856,18 +8417,151 @@
           <a:bodyPr wrap="square" lIns="0" tIns="0" rIns="0" bIns="0" rtlCol="0" anchor="ctr"/>
           <a:lstStyle/>
           <a:p>
-            <a:pPr algn="r" indent="0" marL="0">
-              <a:buNone/>
-            </a:pPr>
-            <a:r>
-              <a:rPr lang="en-US" sz="900" dirty="0">
-                <a:solidFill>
-                  <a:srgbClr val="4B5E71"/>
-                </a:solidFill>
-              </a:rPr>
-              <a:t>NIST CSF 2.0 • CWE • CVE</a:t>
-            </a:r>
-            <a:endParaRPr lang="en-US" sz="900" dirty="0"/>
+            <a:pPr algn="ctr" indent="0" marL="0">
+              <a:buNone/>
+            </a:pPr>
+            <a:r>
+              <a:rPr lang="en-US" sz="1700" dirty="0">
+                <a:solidFill>
+                  <a:srgbClr val="FFFFFF"/>
+                </a:solidFill>
+              </a:rPr>
+              <a:t>papel específico precisa acessar</a:t>
+            </a:r>
+            <a:endParaRPr lang="en-US" sz="1700" dirty="0"/>
+          </a:p>
+        </p:txBody>
+      </p:sp>
+      <p:sp>
+        <p:nvSpPr>
+          <p:cNvPr id="10" name="Shape 8"/>
+          <p:cNvSpPr/>
+          <p:nvPr/>
+        </p:nvSpPr>
+        <p:spPr>
+          <a:xfrm>
+            <a:off x="8138160" y="2743200"/>
+            <a:ext cx="3246120" cy="1828800"/>
+          </a:xfrm>
+          <a:prstGeom prst="roundRect">
+            <a:avLst/>
+          </a:prstGeom>
+          <a:solidFill>
+            <a:srgbClr val="70461B"/>
+          </a:solidFill>
+          <a:ln w="12700">
+            <a:solidFill>
+              <a:srgbClr val="FFFFFF"/>
+            </a:solidFill>
+            <a:prstDash val="solid"/>
+          </a:ln>
+        </p:spPr>
+      </p:sp>
+      <p:sp>
+        <p:nvSpPr>
+          <p:cNvPr id="11" name="Text 9"/>
+          <p:cNvSpPr/>
+          <p:nvPr/>
+        </p:nvSpPr>
+        <p:spPr>
+          <a:xfrm>
+            <a:off x="8366760" y="3063240"/>
+            <a:ext cx="2788920" cy="320040"/>
+          </a:xfrm>
+          <a:prstGeom prst="rect">
+            <a:avLst/>
+          </a:prstGeom>
+          <a:noFill/>
+          <a:ln/>
+        </p:spPr>
+        <p:txBody>
+          <a:bodyPr wrap="square" lIns="0" tIns="0" rIns="0" bIns="0" rtlCol="0" anchor="ctr"/>
+          <a:lstStyle/>
+          <a:p>
+            <a:pPr algn="ctr" indent="0" marL="0">
+              <a:buNone/>
+            </a:pPr>
+            <a:r>
+              <a:rPr lang="en-US" sz="1700" b="1" dirty="0">
+                <a:solidFill>
+                  <a:srgbClr val="FFFFFF"/>
+                </a:solidFill>
+              </a:rPr>
+              <a:t>MONITORAR</a:t>
+            </a:r>
+            <a:endParaRPr lang="en-US" sz="1700" dirty="0"/>
+          </a:p>
+        </p:txBody>
+      </p:sp>
+      <p:sp>
+        <p:nvSpPr>
+          <p:cNvPr id="12" name="Text 10"/>
+          <p:cNvSpPr/>
+          <p:nvPr/>
+        </p:nvSpPr>
+        <p:spPr>
+          <a:xfrm>
+            <a:off x="8412480" y="3657600"/>
+            <a:ext cx="2697480" cy="566928"/>
+          </a:xfrm>
+          <a:prstGeom prst="rect">
+            <a:avLst/>
+          </a:prstGeom>
+          <a:noFill/>
+          <a:ln/>
+        </p:spPr>
+        <p:txBody>
+          <a:bodyPr wrap="square" lIns="0" tIns="0" rIns="0" bIns="0" rtlCol="0" anchor="ctr"/>
+          <a:lstStyle/>
+          <a:p>
+            <a:pPr algn="ctr" indent="0" marL="0">
+              <a:buNone/>
+            </a:pPr>
+            <a:r>
+              <a:rPr lang="en-US" sz="1700" dirty="0">
+                <a:solidFill>
+                  <a:srgbClr val="FFFFFF"/>
+                </a:solidFill>
+              </a:rPr>
+              <a:t>correção imediata é inviável</a:t>
+            </a:r>
+            <a:endParaRPr lang="en-US" sz="1700" dirty="0"/>
+          </a:p>
+        </p:txBody>
+      </p:sp>
+      <p:sp>
+        <p:nvSpPr>
+          <p:cNvPr id="13" name="Text 11"/>
+          <p:cNvSpPr/>
+          <p:nvPr/>
+        </p:nvSpPr>
+        <p:spPr>
+          <a:xfrm>
+            <a:off x="822960" y="5806440"/>
+            <a:ext cx="10332720" cy="365760"/>
+          </a:xfrm>
+          <a:prstGeom prst="rect">
+            <a:avLst/>
+          </a:prstGeom>
+          <a:noFill/>
+          <a:ln/>
+        </p:spPr>
+        <p:txBody>
+          <a:bodyPr wrap="square" lIns="0" tIns="0" rIns="0" bIns="0" rtlCol="0" anchor="ctr"/>
+          <a:lstStyle/>
+          <a:p>
+            <a:pPr algn="ctr" indent="0" marL="0">
+              <a:buNone/>
+            </a:pPr>
+            <a:r>
+              <a:rPr lang="en-US" sz="1800" dirty="0">
+                <a:solidFill>
+                  <a:srgbClr val="D6E5F0"/>
+                </a:solidFill>
+              </a:rPr>
+              <a:t>Declare a premissa e a evidência de reteste.</a:t>
+            </a:r>
+            <a:endParaRPr lang="en-US" sz="1800" dirty="0"/>
           </a:p>
         </p:txBody>
       </p:sp>
@@ -6933,7 +8627,7 @@
                   <a:srgbClr val="087F7A"/>
                 </a:solidFill>
               </a:rPr>
-              <a:t>SÍNTESE</a:t>
+              <a:t>REGISTRO</a:t>
             </a:r>
             <a:endParaRPr lang="en-US" sz="1300" dirty="0"/>
           </a:p>
@@ -6971,7 +8665,7 @@
                   <a:srgbClr val="12304A"/>
                 </a:solidFill>
               </a:rPr>
-              <a:t>Inventário orienta a prioridade</a:t>
+              <a:t>Uma frase profissional liga os conceitos</a:t>
             </a:r>
             <a:endParaRPr lang="en-US" sz="3000" dirty="0"/>
           </a:p>
@@ -7009,7 +8703,7 @@
                   <a:srgbClr val="4B5E71"/>
                 </a:solidFill>
               </a:rPr>
-              <a:t>A terminologia conecta evidência, causa, consequência, ação e validação.</a:t>
+              <a:t>A dupla receberá pontos de partida e deverá justificar limites e evidências.</a:t>
             </a:r>
             <a:endParaRPr lang="en-US" sz="1700" dirty="0"/>
           </a:p>
@@ -7023,16 +8717,16 @@
         </p:nvSpPr>
         <p:spPr>
           <a:xfrm>
-            <a:off x="411480" y="2423160"/>
-            <a:ext cx="2103120" cy="1097280"/>
+            <a:off x="685800" y="1993392"/>
+            <a:ext cx="10835640" cy="2103120"/>
           </a:xfrm>
           <a:prstGeom prst="roundRect">
             <a:avLst/>
           </a:prstGeom>
           <a:solidFill>
-            <a:srgbClr val="0B65C2"/>
+            <a:srgbClr val="FFFFFF"/>
           </a:solidFill>
-          <a:ln w="12700">
+          <a:ln w="25400">
             <a:solidFill>
               <a:srgbClr val="0B65C2"/>
             </a:solidFill>
@@ -7048,8 +8742,46 @@
         </p:nvSpPr>
         <p:spPr>
           <a:xfrm>
-            <a:off x="521208" y="2770632"/>
-            <a:ext cx="1883664" cy="320040"/>
+            <a:off x="1051560" y="2450592"/>
+            <a:ext cx="10104120" cy="1143000"/>
+          </a:xfrm>
+          <a:prstGeom prst="rect">
+            <a:avLst/>
+          </a:prstGeom>
+          <a:noFill/>
+          <a:ln/>
+        </p:spPr>
+        <p:txBody>
+          <a:bodyPr wrap="square" lIns="0" tIns="0" rIns="0" bIns="0" rtlCol="0" anchor="ctr">
+            <a:normAutofit/>
+          </a:bodyPr>
+          <a:lstStyle/>
+          <a:p>
+            <a:pPr algn="ctr" indent="0" marL="0">
+              <a:buNone/>
+            </a:pPr>
+            <a:r>
+              <a:rPr lang="en-US" sz="2100" b="1" dirty="0">
+                <a:solidFill>
+                  <a:srgbClr val="12304A"/>
+                </a:solidFill>
+              </a:rPr>
+              <a:t>Nesta implantação, uma requisição GET sem autenticação recebeu 200 e entregou o arquivo acquisitions.md. Isso expõe informação fictícia de aquisição a um usuário não autorizado. A condição provável ainda precisa ser confirmada na arquitetura.</a:t>
+            </a:r>
+            <a:endParaRPr lang="en-US" sz="2100" dirty="0"/>
+          </a:p>
+        </p:txBody>
+      </p:sp>
+      <p:sp>
+        <p:nvSpPr>
+          <p:cNvPr id="7" name="Text 5"/>
+          <p:cNvSpPr/>
+          <p:nvPr/>
+        </p:nvSpPr>
+        <p:spPr>
+          <a:xfrm>
+            <a:off x="1051560" y="4526280"/>
+            <a:ext cx="2926080" cy="274320"/>
           </a:xfrm>
           <a:prstGeom prst="rect">
             <a:avLst/>
@@ -7061,304 +8793,60 @@
           <a:bodyPr wrap="square" lIns="0" tIns="0" rIns="0" bIns="0" rtlCol="0" anchor="ctr"/>
           <a:lstStyle/>
           <a:p>
+            <a:pPr indent="0" marL="0">
+              <a:buNone/>
+            </a:pPr>
+            <a:r>
+              <a:rPr lang="en-US" sz="1400" b="1" dirty="0">
+                <a:solidFill>
+                  <a:srgbClr val="087F7A"/>
+                </a:solidFill>
+              </a:rPr>
+              <a:t>A dupla deve marcar na frase:</a:t>
+            </a:r>
+            <a:endParaRPr lang="en-US" sz="1400" dirty="0"/>
+          </a:p>
+        </p:txBody>
+      </p:sp>
+      <p:sp>
+        <p:nvSpPr>
+          <p:cNvPr id="8" name="Text 6"/>
+          <p:cNvSpPr/>
+          <p:nvPr/>
+        </p:nvSpPr>
+        <p:spPr>
+          <a:xfrm>
+            <a:off x="1051560" y="4956048"/>
+            <a:ext cx="10104120" cy="475488"/>
+          </a:xfrm>
+          <a:prstGeom prst="rect">
+            <a:avLst/>
+          </a:prstGeom>
+          <a:noFill/>
+          <a:ln/>
+        </p:spPr>
+        <p:txBody>
+          <a:bodyPr wrap="square" lIns="0" tIns="0" rIns="0" bIns="0" rtlCol="0" anchor="ctr"/>
+          <a:lstStyle/>
+          <a:p>
             <a:pPr algn="ctr" indent="0" marL="0">
               <a:buNone/>
             </a:pPr>
             <a:r>
-              <a:rPr lang="en-US" sz="1500" b="1" dirty="0">
-                <a:solidFill>
-                  <a:srgbClr val="FFFFFF"/>
-                </a:solidFill>
-              </a:rPr>
-              <a:t>INVENTARIAR</a:t>
-            </a:r>
-            <a:endParaRPr lang="en-US" sz="1500" dirty="0"/>
-          </a:p>
-        </p:txBody>
-      </p:sp>
-      <p:sp>
-        <p:nvSpPr>
-          <p:cNvPr id="7" name="Shape 5"/>
-          <p:cNvSpPr/>
-          <p:nvPr/>
-        </p:nvSpPr>
-        <p:spPr>
-          <a:xfrm>
-            <a:off x="2770632" y="2423160"/>
-            <a:ext cx="2103120" cy="1097280"/>
-          </a:xfrm>
-          <a:prstGeom prst="roundRect">
-            <a:avLst/>
-          </a:prstGeom>
-          <a:solidFill>
-            <a:srgbClr val="087F7A"/>
-          </a:solidFill>
-          <a:ln w="12700">
-            <a:solidFill>
-              <a:srgbClr val="087F7A"/>
-            </a:solidFill>
-            <a:prstDash val="solid"/>
-          </a:ln>
-        </p:spPr>
-      </p:sp>
-      <p:sp>
-        <p:nvSpPr>
-          <p:cNvPr id="8" name="Text 6"/>
-          <p:cNvSpPr/>
-          <p:nvPr/>
-        </p:nvSpPr>
-        <p:spPr>
-          <a:xfrm>
-            <a:off x="2880360" y="2770632"/>
-            <a:ext cx="1883664" cy="320040"/>
-          </a:xfrm>
-          <a:prstGeom prst="rect">
-            <a:avLst/>
-          </a:prstGeom>
-          <a:noFill/>
-          <a:ln/>
-        </p:spPr>
-        <p:txBody>
-          <a:bodyPr wrap="square" lIns="0" tIns="0" rIns="0" bIns="0" rtlCol="0" anchor="ctr"/>
-          <a:lstStyle/>
-          <a:p>
-            <a:pPr algn="ctr" indent="0" marL="0">
-              <a:buNone/>
-            </a:pPr>
-            <a:r>
-              <a:rPr lang="en-US" sz="1500" b="1" dirty="0">
-                <a:solidFill>
-                  <a:srgbClr val="FFFFFF"/>
-                </a:solidFill>
-              </a:rPr>
-              <a:t>OBSERVAR</a:t>
-            </a:r>
-            <a:endParaRPr lang="en-US" sz="1500" dirty="0"/>
+              <a:rPr lang="en-US" sz="1750" b="1" dirty="0">
+                <a:solidFill>
+                  <a:srgbClr val="12304A"/>
+                </a:solidFill>
+              </a:rPr>
+              <a:t>evidência observada  •  ativo  •  vulnerabilidade concreta  •  ameaça  •  consequência  •  hipótese de fraqueza</a:t>
+            </a:r>
+            <a:endParaRPr lang="en-US" sz="1750" dirty="0"/>
           </a:p>
         </p:txBody>
       </p:sp>
       <p:sp>
         <p:nvSpPr>
           <p:cNvPr id="9" name="Shape 7"/>
-          <p:cNvSpPr/>
-          <p:nvPr/>
-        </p:nvSpPr>
-        <p:spPr>
-          <a:xfrm>
-            <a:off x="5129784" y="2423160"/>
-            <a:ext cx="2103120" cy="1097280"/>
-          </a:xfrm>
-          <a:prstGeom prst="roundRect">
-            <a:avLst/>
-          </a:prstGeom>
-          <a:solidFill>
-            <a:srgbClr val="B75D00"/>
-          </a:solidFill>
-          <a:ln w="12700">
-            <a:solidFill>
-              <a:srgbClr val="B75D00"/>
-            </a:solidFill>
-            <a:prstDash val="solid"/>
-          </a:ln>
-        </p:spPr>
-      </p:sp>
-      <p:sp>
-        <p:nvSpPr>
-          <p:cNvPr id="10" name="Text 8"/>
-          <p:cNvSpPr/>
-          <p:nvPr/>
-        </p:nvSpPr>
-        <p:spPr>
-          <a:xfrm>
-            <a:off x="5239512" y="2770632"/>
-            <a:ext cx="1883664" cy="320040"/>
-          </a:xfrm>
-          <a:prstGeom prst="rect">
-            <a:avLst/>
-          </a:prstGeom>
-          <a:noFill/>
-          <a:ln/>
-        </p:spPr>
-        <p:txBody>
-          <a:bodyPr wrap="square" lIns="0" tIns="0" rIns="0" bIns="0" rtlCol="0" anchor="ctr"/>
-          <a:lstStyle/>
-          <a:p>
-            <a:pPr algn="ctr" indent="0" marL="0">
-              <a:buNone/>
-            </a:pPr>
-            <a:r>
-              <a:rPr lang="en-US" sz="1500" b="1" dirty="0">
-                <a:solidFill>
-                  <a:srgbClr val="FFFFFF"/>
-                </a:solidFill>
-              </a:rPr>
-              <a:t>EXPLICAR</a:t>
-            </a:r>
-            <a:endParaRPr lang="en-US" sz="1500" dirty="0"/>
-          </a:p>
-        </p:txBody>
-      </p:sp>
-      <p:sp>
-        <p:nvSpPr>
-          <p:cNvPr id="11" name="Shape 9"/>
-          <p:cNvSpPr/>
-          <p:nvPr/>
-        </p:nvSpPr>
-        <p:spPr>
-          <a:xfrm>
-            <a:off x="7488936" y="2423160"/>
-            <a:ext cx="2103120" cy="1097280"/>
-          </a:xfrm>
-          <a:prstGeom prst="roundRect">
-            <a:avLst/>
-          </a:prstGeom>
-          <a:solidFill>
-            <a:srgbClr val="B42318"/>
-          </a:solidFill>
-          <a:ln w="12700">
-            <a:solidFill>
-              <a:srgbClr val="B42318"/>
-            </a:solidFill>
-            <a:prstDash val="solid"/>
-          </a:ln>
-        </p:spPr>
-      </p:sp>
-      <p:sp>
-        <p:nvSpPr>
-          <p:cNvPr id="12" name="Text 10"/>
-          <p:cNvSpPr/>
-          <p:nvPr/>
-        </p:nvSpPr>
-        <p:spPr>
-          <a:xfrm>
-            <a:off x="7598664" y="2770632"/>
-            <a:ext cx="1883664" cy="320040"/>
-          </a:xfrm>
-          <a:prstGeom prst="rect">
-            <a:avLst/>
-          </a:prstGeom>
-          <a:noFill/>
-          <a:ln/>
-        </p:spPr>
-        <p:txBody>
-          <a:bodyPr wrap="square" lIns="0" tIns="0" rIns="0" bIns="0" rtlCol="0" anchor="ctr"/>
-          <a:lstStyle/>
-          <a:p>
-            <a:pPr algn="ctr" indent="0" marL="0">
-              <a:buNone/>
-            </a:pPr>
-            <a:r>
-              <a:rPr lang="en-US" sz="1500" b="1" dirty="0">
-                <a:solidFill>
-                  <a:srgbClr val="FFFFFF"/>
-                </a:solidFill>
-              </a:rPr>
-              <a:t>TRATAR</a:t>
-            </a:r>
-            <a:endParaRPr lang="en-US" sz="1500" dirty="0"/>
-          </a:p>
-        </p:txBody>
-      </p:sp>
-      <p:sp>
-        <p:nvSpPr>
-          <p:cNvPr id="13" name="Shape 11"/>
-          <p:cNvSpPr/>
-          <p:nvPr/>
-        </p:nvSpPr>
-        <p:spPr>
-          <a:xfrm>
-            <a:off x="9848088" y="2423160"/>
-            <a:ext cx="2103120" cy="1097280"/>
-          </a:xfrm>
-          <a:prstGeom prst="roundRect">
-            <a:avLst/>
-          </a:prstGeom>
-          <a:solidFill>
-            <a:srgbClr val="26734D"/>
-          </a:solidFill>
-          <a:ln w="12700">
-            <a:solidFill>
-              <a:srgbClr val="26734D"/>
-            </a:solidFill>
-            <a:prstDash val="solid"/>
-          </a:ln>
-        </p:spPr>
-      </p:sp>
-      <p:sp>
-        <p:nvSpPr>
-          <p:cNvPr id="14" name="Text 12"/>
-          <p:cNvSpPr/>
-          <p:nvPr/>
-        </p:nvSpPr>
-        <p:spPr>
-          <a:xfrm>
-            <a:off x="9957816" y="2770632"/>
-            <a:ext cx="1883664" cy="320040"/>
-          </a:xfrm>
-          <a:prstGeom prst="rect">
-            <a:avLst/>
-          </a:prstGeom>
-          <a:noFill/>
-          <a:ln/>
-        </p:spPr>
-        <p:txBody>
-          <a:bodyPr wrap="square" lIns="0" tIns="0" rIns="0" bIns="0" rtlCol="0" anchor="ctr"/>
-          <a:lstStyle/>
-          <a:p>
-            <a:pPr algn="ctr" indent="0" marL="0">
-              <a:buNone/>
-            </a:pPr>
-            <a:r>
-              <a:rPr lang="en-US" sz="1500" b="1" dirty="0">
-                <a:solidFill>
-                  <a:srgbClr val="FFFFFF"/>
-                </a:solidFill>
-              </a:rPr>
-              <a:t>RETESTAR</a:t>
-            </a:r>
-            <a:endParaRPr lang="en-US" sz="1500" dirty="0"/>
-          </a:p>
-        </p:txBody>
-      </p:sp>
-      <p:sp>
-        <p:nvSpPr>
-          <p:cNvPr id="15" name="Text 13"/>
-          <p:cNvSpPr/>
-          <p:nvPr/>
-        </p:nvSpPr>
-        <p:spPr>
-          <a:xfrm>
-            <a:off x="960120" y="4389120"/>
-            <a:ext cx="10241280" cy="822960"/>
-          </a:xfrm>
-          <a:prstGeom prst="rect">
-            <a:avLst/>
-          </a:prstGeom>
-          <a:noFill/>
-          <a:ln/>
-        </p:spPr>
-        <p:txBody>
-          <a:bodyPr wrap="square" lIns="0" tIns="0" rIns="0" bIns="0" rtlCol="0" anchor="ctr"/>
-          <a:lstStyle/>
-          <a:p>
-            <a:pPr algn="ctr" indent="0" marL="0">
-              <a:buNone/>
-            </a:pPr>
-            <a:r>
-              <a:rPr lang="en-US" sz="2400" b="1" dirty="0">
-                <a:solidFill>
-                  <a:srgbClr val="12304A"/>
-                </a:solidFill>
-              </a:rPr>
-              <a:t>Transferência: qual consequência física mudaria sua prioridade em uma HMI?</a:t>
-            </a:r>
-            <a:endParaRPr lang="en-US" sz="2400" dirty="0"/>
-          </a:p>
-        </p:txBody>
-      </p:sp>
-      <p:sp>
-        <p:nvSpPr>
-          <p:cNvPr id="16" name="Shape 14"/>
           <p:cNvSpPr/>
           <p:nvPr/>
         </p:nvSpPr>
@@ -7381,7 +8869,7 @@
       </p:sp>
       <p:sp>
         <p:nvSpPr>
-          <p:cNvPr id="17" name="Text 15"/>
+          <p:cNvPr id="10" name="Text 8"/>
           <p:cNvSpPr/>
           <p:nvPr/>
         </p:nvSpPr>
@@ -7417,7 +8905,7 @@
       </p:sp>
       <p:sp>
         <p:nvSpPr>
-          <p:cNvPr id="18" name="Text 16"/>
+          <p:cNvPr id="11" name="Text 9"/>
           <p:cNvSpPr/>
           <p:nvPr/>
         </p:nvSpPr>
@@ -7445,7 +8933,7 @@
                   <a:srgbClr val="4B5E71"/>
                 </a:solidFill>
               </a:rPr>
-              <a:t>NIST CSF 2.0; CWE; CVE; OWASP Juice Shop</a:t>
+              <a:t>NIST CSF 2.0 • CWE • CVE</a:t>
             </a:r>
             <a:endParaRPr lang="en-US" sz="900" dirty="0"/>
           </a:p>
